--- a/seminario_julho2026/Apresentacao_Seminario_Julho2026.pptx
+++ b/seminario_julho2026/Apresentacao_Seminario_Julho2026.pptx
@@ -5,45 +5,45 @@
     <p:sldMasterId id="2147483648" r:id="rId1"/>
   </p:sldMasterIdLst>
   <p:notesMasterIdLst>
-    <p:notesMasterId r:id="rId33"/>
+    <p:notesMasterId r:id="rId38"/>
   </p:notesMasterIdLst>
   <p:sldIdLst>
     <p:sldId id="256" r:id="rId2"/>
-    <p:sldId id="367" r:id="rId45"/>
+    <p:sldId id="367" r:id="rId3"/>
     <p:sldId id="281" r:id="rId4"/>
     <p:sldId id="332" r:id="rId5"/>
     <p:sldId id="301" r:id="rId6"/>
     <p:sldId id="302" r:id="rId7"/>
     <p:sldId id="310" r:id="rId8"/>
     <p:sldId id="311" r:id="rId9"/>
-    <p:sldId id="363" r:id="rId44"/>
-    <p:sldId id="304" r:id="rId13"/>
-    <p:sldId id="353" r:id="rId14"/>
-    <p:sldId id="354" r:id="rId15"/>
-    <p:sldId id="355" r:id="rId16"/>
-    <p:sldId id="338" r:id="rId17"/>
-    <p:sldId id="359" r:id="rId3"/>
-    <p:sldId id="314" r:id="rId18"/>
-    <p:sldId id="345" r:id="rId19"/>
-    <p:sldId id="346" r:id="rId20"/>
-    <p:sldId id="303" r:id="rId21"/>
-    <p:sldId id="358" r:id="rId22"/>
-    <p:sldId id="356" r:id="rId23"/>
-    <p:sldId id="364" r:id="rId12"/>
+    <p:sldId id="363" r:id="rId10"/>
+    <p:sldId id="304" r:id="rId11"/>
+    <p:sldId id="353" r:id="rId12"/>
+    <p:sldId id="354" r:id="rId13"/>
+    <p:sldId id="355" r:id="rId14"/>
+    <p:sldId id="338" r:id="rId15"/>
+    <p:sldId id="359" r:id="rId16"/>
+    <p:sldId id="314" r:id="rId17"/>
+    <p:sldId id="345" r:id="rId18"/>
+    <p:sldId id="346" r:id="rId19"/>
+    <p:sldId id="303" r:id="rId20"/>
+    <p:sldId id="358" r:id="rId21"/>
+    <p:sldId id="356" r:id="rId22"/>
+    <p:sldId id="364" r:id="rId23"/>
     <p:sldId id="280" r:id="rId24"/>
-    <p:sldId id="360" r:id="rId41"/>
-    <p:sldId id="365" r:id="rId11"/>
-    <p:sldId id="361" r:id="rId42"/>
-    <p:sldId id="366" r:id="rId10"/>
-    <p:sldId id="357" r:id="rId25"/>
-    <p:sldId id="307" r:id="rId26"/>
-    <p:sldId id="316" r:id="rId27"/>
-    <p:sldId id="362" r:id="rId43"/>
-    <p:sldId id="351" r:id="rId28"/>
-    <p:sldId id="308" r:id="rId29"/>
-    <p:sldId id="352" r:id="rId30"/>
-    <p:sldId id="318" r:id="rId31"/>
-    <p:sldId id="278" r:id="rId32"/>
+    <p:sldId id="360" r:id="rId25"/>
+    <p:sldId id="365" r:id="rId26"/>
+    <p:sldId id="361" r:id="rId27"/>
+    <p:sldId id="366" r:id="rId28"/>
+    <p:sldId id="357" r:id="rId29"/>
+    <p:sldId id="307" r:id="rId30"/>
+    <p:sldId id="316" r:id="rId31"/>
+    <p:sldId id="362" r:id="rId32"/>
+    <p:sldId id="351" r:id="rId33"/>
+    <p:sldId id="308" r:id="rId34"/>
+    <p:sldId id="352" r:id="rId35"/>
+    <p:sldId id="318" r:id="rId36"/>
+    <p:sldId id="278" r:id="rId37"/>
   </p:sldIdLst>
   <p:sldSz cx="12192000" cy="6858000"/>
   <p:notesSz cx="6858000" cy="9144000"/>
@@ -148,31 +148,36 @@
         <p14:section name="Seção Padrão" id="{94C04E78-9DC5-41B5-804B-59E2F83F620C}">
           <p14:sldIdLst>
             <p14:sldId id="256"/>
-            <p14:sldId id="359"/>
+            <p14:sldId id="367"/>
             <p14:sldId id="281"/>
             <p14:sldId id="332"/>
             <p14:sldId id="301"/>
             <p14:sldId id="302"/>
             <p14:sldId id="310"/>
             <p14:sldId id="311"/>
-            <p14:sldId id="339"/>
-            <p14:sldId id="342"/>
-            <p14:sldId id="344"/>
+            <p14:sldId id="363"/>
             <p14:sldId id="304"/>
             <p14:sldId id="353"/>
             <p14:sldId id="354"/>
             <p14:sldId id="355"/>
             <p14:sldId id="338"/>
+            <p14:sldId id="359"/>
             <p14:sldId id="314"/>
             <p14:sldId id="345"/>
             <p14:sldId id="346"/>
             <p14:sldId id="303"/>
             <p14:sldId id="358"/>
             <p14:sldId id="356"/>
+            <p14:sldId id="364"/>
             <p14:sldId id="280"/>
+            <p14:sldId id="360"/>
+            <p14:sldId id="365"/>
+            <p14:sldId id="361"/>
+            <p14:sldId id="366"/>
             <p14:sldId id="357"/>
             <p14:sldId id="307"/>
             <p14:sldId id="316"/>
+            <p14:sldId id="362"/>
             <p14:sldId id="351"/>
             <p14:sldId id="308"/>
             <p14:sldId id="352"/>
@@ -209,7 +214,7 @@
 <file path=ppt/revisionInfo.xml><?xml version="1.0" encoding="utf-8"?>
 <p1510:revInfo xmlns:a="http://schemas.openxmlformats.org/drawingml/2006/main" xmlns:r="http://schemas.openxmlformats.org/officeDocument/2006/relationships" xmlns:p1510="http://schemas.microsoft.com/office/powerpoint/2015/10/main">
   <p1510:revLst>
-    <p1510:client id="{1F906071-AE03-DEFA-F367-A0ADBD0624C7}" v="18" dt="2026-06-26T17:19:09.544"/>
+    <p1510:client id="{438288CE-D2AA-4F90-8FE8-4C3DDF3E9990}" v="22" dt="2026-07-02T13:55:31.441"/>
   </p1510:revLst>
 </p1510:revInfo>
 </file>
@@ -354,157 +359,6 @@
             <ac:spMk id="2" creationId="{F8B4A312-9B5F-FAC3-8CAD-AFA3F997C083}"/>
           </ac:spMkLst>
         </pc:spChg>
-        <pc:spChg chg="add mod">
-          <ac:chgData name="Vanderlei Barbosa da Silva" userId="S::silvavbs@stj.jus.br::24e62a6a-a92d-4f90-9f09-efc0d92c1770" providerId="AD" clId="Web-{892DECCF-0073-4512-920A-A6C593DBC0C2}" dt="2026-06-08T16:15:24.296" v="1001" actId="1076"/>
-          <ac:spMkLst>
-            <pc:docMk/>
-            <pc:sldMk cId="2588760046" sldId="332"/>
-            <ac:spMk id="4" creationId="{3F6A35B6-07E0-A5CB-6A1C-1DBEEE2A26C6}"/>
-          </ac:spMkLst>
-        </pc:spChg>
-        <pc:spChg chg="add mod">
-          <ac:chgData name="Vanderlei Barbosa da Silva" userId="S::silvavbs@stj.jus.br::24e62a6a-a92d-4f90-9f09-efc0d92c1770" providerId="AD" clId="Web-{892DECCF-0073-4512-920A-A6C593DBC0C2}" dt="2026-06-08T16:11:23.742" v="987" actId="20577"/>
-          <ac:spMkLst>
-            <pc:docMk/>
-            <pc:sldMk cId="2588760046" sldId="332"/>
-            <ac:spMk id="6" creationId="{2B5BCD62-D4D9-3ACA-7790-6D5CEFB53B17}"/>
-          </ac:spMkLst>
-        </pc:spChg>
-        <pc:picChg chg="add mod">
-          <ac:chgData name="Vanderlei Barbosa da Silva" userId="S::silvavbs@stj.jus.br::24e62a6a-a92d-4f90-9f09-efc0d92c1770" providerId="AD" clId="Web-{892DECCF-0073-4512-920A-A6C593DBC0C2}" dt="2026-06-08T16:13:46.976" v="997" actId="14100"/>
-          <ac:picMkLst>
-            <pc:docMk/>
-            <pc:sldMk cId="2588760046" sldId="332"/>
-            <ac:picMk id="9" creationId="{EC73A99D-5770-C0B4-2F30-F3F3DA2F05FE}"/>
-          </ac:picMkLst>
-        </pc:picChg>
-        <pc:cxnChg chg="add mod">
-          <ac:chgData name="Vanderlei Barbosa da Silva" userId="S::silvavbs@stj.jus.br::24e62a6a-a92d-4f90-9f09-efc0d92c1770" providerId="AD" clId="Web-{892DECCF-0073-4512-920A-A6C593DBC0C2}" dt="2026-06-08T16:09:29.509" v="862"/>
-          <ac:cxnSpMkLst>
-            <pc:docMk/>
-            <pc:sldMk cId="2588760046" sldId="332"/>
-            <ac:cxnSpMk id="5" creationId="{8A639628-FAED-62E0-CF68-D285AE5B2288}"/>
-          </ac:cxnSpMkLst>
-        </pc:cxnChg>
-      </pc:sldChg>
-      <pc:sldChg chg="addSp delSp modSp add mod replId modClrScheme chgLayout">
-        <pc:chgData name="Vanderlei Barbosa da Silva" userId="S::silvavbs@stj.jus.br::24e62a6a-a92d-4f90-9f09-efc0d92c1770" providerId="AD" clId="Web-{892DECCF-0073-4512-920A-A6C593DBC0C2}" dt="2026-06-08T17:07:41.875" v="1027" actId="1076"/>
-        <pc:sldMkLst>
-          <pc:docMk/>
-          <pc:sldMk cId="2195579995" sldId="333"/>
-        </pc:sldMkLst>
-        <pc:spChg chg="mod ord">
-          <ac:chgData name="Vanderlei Barbosa da Silva" userId="S::silvavbs@stj.jus.br::24e62a6a-a92d-4f90-9f09-efc0d92c1770" providerId="AD" clId="Web-{892DECCF-0073-4512-920A-A6C593DBC0C2}" dt="2026-06-08T17:07:41.875" v="1027" actId="1076"/>
-          <ac:spMkLst>
-            <pc:docMk/>
-            <pc:sldMk cId="2195579995" sldId="333"/>
-            <ac:spMk id="2" creationId="{8AB0D916-6940-AEF2-EDEA-0DBACA353A8A}"/>
-          </ac:spMkLst>
-        </pc:spChg>
-        <pc:spChg chg="add mod">
-          <ac:chgData name="Vanderlei Barbosa da Silva" userId="S::silvavbs@stj.jus.br::24e62a6a-a92d-4f90-9f09-efc0d92c1770" providerId="AD" clId="Web-{892DECCF-0073-4512-920A-A6C593DBC0C2}" dt="2026-06-08T15:32:05.095" v="676" actId="1076"/>
-          <ac:spMkLst>
-            <pc:docMk/>
-            <pc:sldMk cId="2195579995" sldId="333"/>
-            <ac:spMk id="7" creationId="{50288C5E-4F6A-7DDB-BE70-A5AECA43C1CA}"/>
-          </ac:spMkLst>
-        </pc:spChg>
-        <pc:spChg chg="add mod">
-          <ac:chgData name="Vanderlei Barbosa da Silva" userId="S::silvavbs@stj.jus.br::24e62a6a-a92d-4f90-9f09-efc0d92c1770" providerId="AD" clId="Web-{892DECCF-0073-4512-920A-A6C593DBC0C2}" dt="2026-06-08T15:35:16.774" v="775" actId="20577"/>
-          <ac:spMkLst>
-            <pc:docMk/>
-            <pc:sldMk cId="2195579995" sldId="333"/>
-            <ac:spMk id="10" creationId="{31D889B8-EC76-5E67-B4CF-F03431F0B69B}"/>
-          </ac:spMkLst>
-        </pc:spChg>
-        <pc:spChg chg="add mod">
-          <ac:chgData name="Vanderlei Barbosa da Silva" userId="S::silvavbs@stj.jus.br::24e62a6a-a92d-4f90-9f09-efc0d92c1770" providerId="AD" clId="Web-{892DECCF-0073-4512-920A-A6C593DBC0C2}" dt="2026-06-08T15:36:39.357" v="838" actId="1076"/>
-          <ac:spMkLst>
-            <pc:docMk/>
-            <pc:sldMk cId="2195579995" sldId="333"/>
-            <ac:spMk id="12" creationId="{C547B4D1-58C0-D315-2334-ED04474A264E}"/>
-          </ac:spMkLst>
-        </pc:spChg>
-        <pc:spChg chg="add mod">
-          <ac:chgData name="Vanderlei Barbosa da Silva" userId="S::silvavbs@stj.jus.br::24e62a6a-a92d-4f90-9f09-efc0d92c1770" providerId="AD" clId="Web-{892DECCF-0073-4512-920A-A6C593DBC0C2}" dt="2026-06-08T15:36:42.998" v="839" actId="1076"/>
-          <ac:spMkLst>
-            <pc:docMk/>
-            <pc:sldMk cId="2195579995" sldId="333"/>
-            <ac:spMk id="13" creationId="{BD401224-612B-7A70-0C04-1E9CDBB14B9B}"/>
-          </ac:spMkLst>
-        </pc:spChg>
-        <pc:spChg chg="add mod">
-          <ac:chgData name="Vanderlei Barbosa da Silva" userId="S::silvavbs@stj.jus.br::24e62a6a-a92d-4f90-9f09-efc0d92c1770" providerId="AD" clId="Web-{892DECCF-0073-4512-920A-A6C593DBC0C2}" dt="2026-06-08T15:34:32.255" v="732" actId="14100"/>
-          <ac:spMkLst>
-            <pc:docMk/>
-            <pc:sldMk cId="2195579995" sldId="333"/>
-            <ac:spMk id="15" creationId="{1D85957A-63E5-D774-8326-5DBE98DE6E85}"/>
-          </ac:spMkLst>
-        </pc:spChg>
-        <pc:spChg chg="add mod">
-          <ac:chgData name="Vanderlei Barbosa da Silva" userId="S::silvavbs@stj.jus.br::24e62a6a-a92d-4f90-9f09-efc0d92c1770" providerId="AD" clId="Web-{892DECCF-0073-4512-920A-A6C593DBC0C2}" dt="2026-06-08T15:35:54.964" v="834" actId="20577"/>
-          <ac:spMkLst>
-            <pc:docMk/>
-            <pc:sldMk cId="2195579995" sldId="333"/>
-            <ac:spMk id="16" creationId="{CE77996E-5DBA-4CCA-11B9-614CFE2A2EEE}"/>
-          </ac:spMkLst>
-        </pc:spChg>
-        <pc:picChg chg="add mod">
-          <ac:chgData name="Vanderlei Barbosa da Silva" userId="S::silvavbs@stj.jus.br::24e62a6a-a92d-4f90-9f09-efc0d92c1770" providerId="AD" clId="Web-{892DECCF-0073-4512-920A-A6C593DBC0C2}" dt="2026-06-08T15:37:14.109" v="842" actId="1076"/>
-          <ac:picMkLst>
-            <pc:docMk/>
-            <pc:sldMk cId="2195579995" sldId="333"/>
-            <ac:picMk id="11" creationId="{1C58FD48-A5FB-29AF-2827-ADA737C5A4AA}"/>
-          </ac:picMkLst>
-        </pc:picChg>
-        <pc:picChg chg="add mod">
-          <ac:chgData name="Vanderlei Barbosa da Silva" userId="S::silvavbs@stj.jus.br::24e62a6a-a92d-4f90-9f09-efc0d92c1770" providerId="AD" clId="Web-{892DECCF-0073-4512-920A-A6C593DBC0C2}" dt="2026-06-08T15:36:51.967" v="840" actId="1076"/>
-          <ac:picMkLst>
-            <pc:docMk/>
-            <pc:sldMk cId="2195579995" sldId="333"/>
-            <ac:picMk id="14" creationId="{23632FB3-FB7E-7103-FC20-199CF1428838}"/>
-          </ac:picMkLst>
-        </pc:picChg>
-        <pc:picChg chg="add mod">
-          <ac:chgData name="Vanderlei Barbosa da Silva" userId="S::silvavbs@stj.jus.br::24e62a6a-a92d-4f90-9f09-efc0d92c1770" providerId="AD" clId="Web-{892DECCF-0073-4512-920A-A6C593DBC0C2}" dt="2026-06-08T15:36:15.794" v="836" actId="1076"/>
-          <ac:picMkLst>
-            <pc:docMk/>
-            <pc:sldMk cId="2195579995" sldId="333"/>
-            <ac:picMk id="17" creationId="{2D17EB4E-ABF7-69A2-1156-6630A2812525}"/>
-          </ac:picMkLst>
-        </pc:picChg>
-        <pc:cxnChg chg="add mod">
-          <ac:chgData name="Vanderlei Barbosa da Silva" userId="S::silvavbs@stj.jus.br::24e62a6a-a92d-4f90-9f09-efc0d92c1770" providerId="AD" clId="Web-{892DECCF-0073-4512-920A-A6C593DBC0C2}" dt="2026-06-08T17:07:26.671" v="1026" actId="1076"/>
-          <ac:cxnSpMkLst>
-            <pc:docMk/>
-            <pc:sldMk cId="2195579995" sldId="333"/>
-            <ac:cxnSpMk id="4" creationId="{9BB6AA00-A3B6-BBD4-CBC2-A81E98AEFDAE}"/>
-          </ac:cxnSpMkLst>
-        </pc:cxnChg>
-      </pc:sldChg>
-    </pc:docChg>
-  </pc:docChgLst>
-  <pc:docChgLst>
-    <pc:chgData name="Vanderlei Barbosa da Silva" userId="S::silvavbs@stj.jus.br::24e62a6a-a92d-4f90-9f09-efc0d92c1770" providerId="AD" clId="Web-{1F906071-AE03-DEFA-F367-A0ADBD0624C7}"/>
-    <pc:docChg chg="modSld">
-      <pc:chgData name="Vanderlei Barbosa da Silva" userId="S::silvavbs@stj.jus.br::24e62a6a-a92d-4f90-9f09-efc0d92c1770" providerId="AD" clId="Web-{1F906071-AE03-DEFA-F367-A0ADBD0624C7}" dt="2026-06-26T17:19:08.263" v="8" actId="20577"/>
-      <pc:docMkLst>
-        <pc:docMk/>
-      </pc:docMkLst>
-      <pc:sldChg chg="modSp">
-        <pc:chgData name="Vanderlei Barbosa da Silva" userId="S::silvavbs@stj.jus.br::24e62a6a-a92d-4f90-9f09-efc0d92c1770" providerId="AD" clId="Web-{1F906071-AE03-DEFA-F367-A0ADBD0624C7}" dt="2026-06-26T17:19:08.263" v="8" actId="20577"/>
-        <pc:sldMkLst>
-          <pc:docMk/>
-          <pc:sldMk cId="2518470170" sldId="311"/>
-        </pc:sldMkLst>
-        <pc:spChg chg="mod">
-          <ac:chgData name="Vanderlei Barbosa da Silva" userId="S::silvavbs@stj.jus.br::24e62a6a-a92d-4f90-9f09-efc0d92c1770" providerId="AD" clId="Web-{1F906071-AE03-DEFA-F367-A0ADBD0624C7}" dt="2026-06-26T17:19:08.263" v="8" actId="20577"/>
-          <ac:spMkLst>
-            <pc:docMk/>
-            <pc:sldMk cId="2518470170" sldId="311"/>
-            <ac:spMk id="12" creationId="{5DC7200A-9C17-5991-6D14-2D08EDBB0E4A}"/>
-          </ac:spMkLst>
-        </pc:spChg>
       </pc:sldChg>
     </pc:docChg>
   </pc:docChgLst>
@@ -521,92 +375,6 @@
           <pc:docMk/>
           <pc:sldMk cId="1527027247" sldId="303"/>
         </pc:sldMkLst>
-      </pc:sldChg>
-      <pc:sldChg chg="addSp delSp modSp mod ord">
-        <pc:chgData name="Vanderlei Barbosa da Silva" userId="24e62a6a-a92d-4f90-9f09-efc0d92c1770" providerId="ADAL" clId="{B7BF07C5-55BE-4A63-A797-64077BB8B758}" dt="2026-06-09T00:00:46.256" v="183" actId="1037"/>
-        <pc:sldMkLst>
-          <pc:docMk/>
-          <pc:sldMk cId="2753903397" sldId="312"/>
-        </pc:sldMkLst>
-        <pc:spChg chg="add mod">
-          <ac:chgData name="Vanderlei Barbosa da Silva" userId="24e62a6a-a92d-4f90-9f09-efc0d92c1770" providerId="ADAL" clId="{B7BF07C5-55BE-4A63-A797-64077BB8B758}" dt="2026-06-08T23:54:07.151" v="14"/>
-          <ac:spMkLst>
-            <pc:docMk/>
-            <pc:sldMk cId="2753903397" sldId="312"/>
-            <ac:spMk id="6" creationId="{4F73D340-0855-A6E6-A71F-F73303A40994}"/>
-          </ac:spMkLst>
-        </pc:spChg>
-        <pc:spChg chg="add mod">
-          <ac:chgData name="Vanderlei Barbosa da Silva" userId="24e62a6a-a92d-4f90-9f09-efc0d92c1770" providerId="ADAL" clId="{B7BF07C5-55BE-4A63-A797-64077BB8B758}" dt="2026-06-09T00:00:46.256" v="183" actId="1037"/>
-          <ac:spMkLst>
-            <pc:docMk/>
-            <pc:sldMk cId="2753903397" sldId="312"/>
-            <ac:spMk id="14" creationId="{912FC02A-7642-5F02-D411-C42F1D42E465}"/>
-          </ac:spMkLst>
-        </pc:spChg>
-        <pc:picChg chg="add mod">
-          <ac:chgData name="Vanderlei Barbosa da Silva" userId="24e62a6a-a92d-4f90-9f09-efc0d92c1770" providerId="ADAL" clId="{B7BF07C5-55BE-4A63-A797-64077BB8B758}" dt="2026-06-08T23:56:11.235" v="33" actId="1076"/>
-          <ac:picMkLst>
-            <pc:docMk/>
-            <pc:sldMk cId="2753903397" sldId="312"/>
-            <ac:picMk id="9" creationId="{E13E9169-0DF4-BD93-975E-537E160E300C}"/>
-          </ac:picMkLst>
-        </pc:picChg>
-        <pc:picChg chg="add mod">
-          <ac:chgData name="Vanderlei Barbosa da Silva" userId="24e62a6a-a92d-4f90-9f09-efc0d92c1770" providerId="ADAL" clId="{B7BF07C5-55BE-4A63-A797-64077BB8B758}" dt="2026-06-08T23:56:21.362" v="37" actId="1076"/>
-          <ac:picMkLst>
-            <pc:docMk/>
-            <pc:sldMk cId="2753903397" sldId="312"/>
-            <ac:picMk id="13" creationId="{7A81FECC-3790-8BB2-C7C7-7899B58ABDD8}"/>
-          </ac:picMkLst>
-        </pc:picChg>
-        <pc:cxnChg chg="add mod">
-          <ac:chgData name="Vanderlei Barbosa da Silva" userId="24e62a6a-a92d-4f90-9f09-efc0d92c1770" providerId="ADAL" clId="{B7BF07C5-55BE-4A63-A797-64077BB8B758}" dt="2026-06-08T23:54:07.151" v="14"/>
-          <ac:cxnSpMkLst>
-            <pc:docMk/>
-            <pc:sldMk cId="2753903397" sldId="312"/>
-            <ac:cxnSpMk id="7" creationId="{3B5371D6-1810-AFA5-82A6-47CC92C41EB6}"/>
-          </ac:cxnSpMkLst>
-        </pc:cxnChg>
-        <pc:cxnChg chg="add mod">
-          <ac:chgData name="Vanderlei Barbosa da Silva" userId="24e62a6a-a92d-4f90-9f09-efc0d92c1770" providerId="ADAL" clId="{B7BF07C5-55BE-4A63-A797-64077BB8B758}" dt="2026-06-09T00:00:32.674" v="174" actId="14100"/>
-          <ac:cxnSpMkLst>
-            <pc:docMk/>
-            <pc:sldMk cId="2753903397" sldId="312"/>
-            <ac:cxnSpMk id="11" creationId="{A0AD2595-C4EF-F948-E509-0B9F46E30AFD}"/>
-          </ac:cxnSpMkLst>
-        </pc:cxnChg>
-        <pc:cxnChg chg="add mod">
-          <ac:chgData name="Vanderlei Barbosa da Silva" userId="24e62a6a-a92d-4f90-9f09-efc0d92c1770" providerId="ADAL" clId="{B7BF07C5-55BE-4A63-A797-64077BB8B758}" dt="2026-06-09T00:00:41.115" v="176" actId="1076"/>
-          <ac:cxnSpMkLst>
-            <pc:docMk/>
-            <pc:sldMk cId="2753903397" sldId="312"/>
-            <ac:cxnSpMk id="19" creationId="{888BBBB6-EB62-4302-CBF6-B5169EBC7760}"/>
-          </ac:cxnSpMkLst>
-        </pc:cxnChg>
-      </pc:sldChg>
-      <pc:sldChg chg="addSp delSp modSp mod modTransition modNotesTx">
-        <pc:chgData name="Vanderlei Barbosa da Silva" userId="24e62a6a-a92d-4f90-9f09-efc0d92c1770" providerId="ADAL" clId="{B7BF07C5-55BE-4A63-A797-64077BB8B758}" dt="2026-06-09T01:45:06.146" v="512" actId="20577"/>
-        <pc:sldMkLst>
-          <pc:docMk/>
-          <pc:sldMk cId="2898277315" sldId="313"/>
-        </pc:sldMkLst>
-        <pc:picChg chg="add mod">
-          <ac:chgData name="Vanderlei Barbosa da Silva" userId="24e62a6a-a92d-4f90-9f09-efc0d92c1770" providerId="ADAL" clId="{B7BF07C5-55BE-4A63-A797-64077BB8B758}" dt="2026-06-09T01:38:14.217" v="470" actId="1038"/>
-          <ac:picMkLst>
-            <pc:docMk/>
-            <pc:sldMk cId="2898277315" sldId="313"/>
-            <ac:picMk id="5" creationId="{DEC3F2FC-FBB7-7834-2C31-36CC3A5651F1}"/>
-          </ac:picMkLst>
-        </pc:picChg>
-        <pc:cxnChg chg="add mod">
-          <ac:chgData name="Vanderlei Barbosa da Silva" userId="24e62a6a-a92d-4f90-9f09-efc0d92c1770" providerId="ADAL" clId="{B7BF07C5-55BE-4A63-A797-64077BB8B758}" dt="2026-06-09T01:34:08.389" v="429"/>
-          <ac:cxnSpMkLst>
-            <pc:docMk/>
-            <pc:sldMk cId="2898277315" sldId="313"/>
-            <ac:cxnSpMk id="6" creationId="{9CFB8F8C-5266-C225-BCF4-DAD0B846562C}"/>
-          </ac:cxnSpMkLst>
-        </pc:cxnChg>
       </pc:sldChg>
       <pc:sldChg chg="addSp modSp mod modNotesTx">
         <pc:chgData name="Vanderlei Barbosa da Silva" userId="24e62a6a-a92d-4f90-9f09-efc0d92c1770" providerId="ADAL" clId="{B7BF07C5-55BE-4A63-A797-64077BB8B758}" dt="2026-06-09T00:45:21.383" v="404" actId="113"/>
@@ -661,14 +429,6 @@
             <ac:spMk id="2" creationId="{7A866035-D737-E59D-1CC5-1958C54336A2}"/>
           </ac:spMkLst>
         </pc:spChg>
-        <pc:spChg chg="add mod">
-          <ac:chgData name="Vanderlei Barbosa da Silva" userId="24e62a6a-a92d-4f90-9f09-efc0d92c1770" providerId="ADAL" clId="{B7BF07C5-55BE-4A63-A797-64077BB8B758}" dt="2026-06-09T02:11:10.979" v="661" actId="20577"/>
-          <ac:spMkLst>
-            <pc:docMk/>
-            <pc:sldMk cId="2585261711" sldId="316"/>
-            <ac:spMk id="6" creationId="{99BF5907-39E4-3794-CF3E-DE34EBAEA8EC}"/>
-          </ac:spMkLst>
-        </pc:spChg>
         <pc:cxnChg chg="add mod">
           <ac:chgData name="Vanderlei Barbosa da Silva" userId="24e62a6a-a92d-4f90-9f09-efc0d92c1770" providerId="ADAL" clId="{B7BF07C5-55BE-4A63-A797-64077BB8B758}" dt="2026-06-09T02:06:23.376" v="561"/>
           <ac:cxnSpMkLst>
@@ -677,129 +437,6 @@
             <ac:cxnSpMk id="3" creationId="{621497EE-CB74-12DC-9C90-54CC5417CD79}"/>
           </ac:cxnSpMkLst>
         </pc:cxnChg>
-      </pc:sldChg>
-      <pc:sldChg chg="addSp delSp modSp mod ord modNotesTx">
-        <pc:chgData name="Vanderlei Barbosa da Silva" userId="24e62a6a-a92d-4f90-9f09-efc0d92c1770" providerId="ADAL" clId="{B7BF07C5-55BE-4A63-A797-64077BB8B758}" dt="2026-06-09T15:07:37.628" v="911" actId="20577"/>
-        <pc:sldMkLst>
-          <pc:docMk/>
-          <pc:sldMk cId="2442843238" sldId="324"/>
-        </pc:sldMkLst>
-        <pc:picChg chg="add mod">
-          <ac:chgData name="Vanderlei Barbosa da Silva" userId="24e62a6a-a92d-4f90-9f09-efc0d92c1770" providerId="ADAL" clId="{B7BF07C5-55BE-4A63-A797-64077BB8B758}" dt="2026-06-09T00:10:04.837" v="198" actId="14100"/>
-          <ac:picMkLst>
-            <pc:docMk/>
-            <pc:sldMk cId="2442843238" sldId="324"/>
-            <ac:picMk id="9" creationId="{45898E4C-4BD5-7AF6-10E5-CF3972EFE608}"/>
-          </ac:picMkLst>
-        </pc:picChg>
-        <pc:cxnChg chg="add mod">
-          <ac:chgData name="Vanderlei Barbosa da Silva" userId="24e62a6a-a92d-4f90-9f09-efc0d92c1770" providerId="ADAL" clId="{B7BF07C5-55BE-4A63-A797-64077BB8B758}" dt="2026-06-08T23:35:13.848" v="4" actId="1076"/>
-          <ac:cxnSpMkLst>
-            <pc:docMk/>
-            <pc:sldMk cId="2442843238" sldId="324"/>
-            <ac:cxnSpMk id="4" creationId="{D92DCA6D-2826-B035-9D3E-EDF0D42329C1}"/>
-          </ac:cxnSpMkLst>
-        </pc:cxnChg>
-      </pc:sldChg>
-      <pc:sldChg chg="addSp modSp add mod modNotesTx">
-        <pc:chgData name="Vanderlei Barbosa da Silva" userId="24e62a6a-a92d-4f90-9f09-efc0d92c1770" providerId="ADAL" clId="{B7BF07C5-55BE-4A63-A797-64077BB8B758}" dt="2026-06-09T15:08:30.624" v="915" actId="113"/>
-        <pc:sldMkLst>
-          <pc:docMk/>
-          <pc:sldMk cId="2271119202" sldId="334"/>
-        </pc:sldMkLst>
-        <pc:spChg chg="add mod">
-          <ac:chgData name="Vanderlei Barbosa da Silva" userId="24e62a6a-a92d-4f90-9f09-efc0d92c1770" providerId="ADAL" clId="{B7BF07C5-55BE-4A63-A797-64077BB8B758}" dt="2026-06-09T00:16:08.273" v="212" actId="208"/>
-          <ac:spMkLst>
-            <pc:docMk/>
-            <pc:sldMk cId="2271119202" sldId="334"/>
-            <ac:spMk id="3" creationId="{689BBC2D-0DC5-82ED-3D26-E7424B2466EF}"/>
-          </ac:spMkLst>
-        </pc:spChg>
-        <pc:spChg chg="add mod">
-          <ac:chgData name="Vanderlei Barbosa da Silva" userId="24e62a6a-a92d-4f90-9f09-efc0d92c1770" providerId="ADAL" clId="{B7BF07C5-55BE-4A63-A797-64077BB8B758}" dt="2026-06-09T00:15:58.983" v="211" actId="208"/>
-          <ac:spMkLst>
-            <pc:docMk/>
-            <pc:sldMk cId="2271119202" sldId="334"/>
-            <ac:spMk id="6" creationId="{83FBA928-F62D-F7C8-D40C-7EE316EB4E2B}"/>
-          </ac:spMkLst>
-        </pc:spChg>
-      </pc:sldChg>
-      <pc:sldChg chg="modSp add mod modNotesTx">
-        <pc:chgData name="Vanderlei Barbosa da Silva" userId="24e62a6a-a92d-4f90-9f09-efc0d92c1770" providerId="ADAL" clId="{B7BF07C5-55BE-4A63-A797-64077BB8B758}" dt="2026-06-09T15:09:04.104" v="919" actId="113"/>
-        <pc:sldMkLst>
-          <pc:docMk/>
-          <pc:sldMk cId="1160404001" sldId="335"/>
-        </pc:sldMkLst>
-        <pc:spChg chg="mod">
-          <ac:chgData name="Vanderlei Barbosa da Silva" userId="24e62a6a-a92d-4f90-9f09-efc0d92c1770" providerId="ADAL" clId="{B7BF07C5-55BE-4A63-A797-64077BB8B758}" dt="2026-06-09T00:16:44.992" v="214" actId="1076"/>
-          <ac:spMkLst>
-            <pc:docMk/>
-            <pc:sldMk cId="1160404001" sldId="335"/>
-            <ac:spMk id="3" creationId="{D425282F-8462-43E8-67F6-25D0DA17853F}"/>
-          </ac:spMkLst>
-        </pc:spChg>
-        <pc:spChg chg="mod">
-          <ac:chgData name="Vanderlei Barbosa da Silva" userId="24e62a6a-a92d-4f90-9f09-efc0d92c1770" providerId="ADAL" clId="{B7BF07C5-55BE-4A63-A797-64077BB8B758}" dt="2026-06-09T00:17:11.725" v="219" actId="1037"/>
-          <ac:spMkLst>
-            <pc:docMk/>
-            <pc:sldMk cId="1160404001" sldId="335"/>
-            <ac:spMk id="6" creationId="{035A8970-0F6F-82AE-F620-DC152D3F4FCB}"/>
-          </ac:spMkLst>
-        </pc:spChg>
-      </pc:sldChg>
-      <pc:sldChg chg="modSp add mod modNotesTx">
-        <pc:chgData name="Vanderlei Barbosa da Silva" userId="24e62a6a-a92d-4f90-9f09-efc0d92c1770" providerId="ADAL" clId="{B7BF07C5-55BE-4A63-A797-64077BB8B758}" dt="2026-06-09T15:10:13.473" v="923" actId="113"/>
-        <pc:sldMkLst>
-          <pc:docMk/>
-          <pc:sldMk cId="2306077870" sldId="336"/>
-        </pc:sldMkLst>
-        <pc:spChg chg="mod">
-          <ac:chgData name="Vanderlei Barbosa da Silva" userId="24e62a6a-a92d-4f90-9f09-efc0d92c1770" providerId="ADAL" clId="{B7BF07C5-55BE-4A63-A797-64077BB8B758}" dt="2026-06-09T00:18:45.815" v="225" actId="14100"/>
-          <ac:spMkLst>
-            <pc:docMk/>
-            <pc:sldMk cId="2306077870" sldId="336"/>
-            <ac:spMk id="3" creationId="{F60702F5-6D80-11DB-A17E-58DA604E9C96}"/>
-          </ac:spMkLst>
-        </pc:spChg>
-        <pc:spChg chg="mod">
-          <ac:chgData name="Vanderlei Barbosa da Silva" userId="24e62a6a-a92d-4f90-9f09-efc0d92c1770" providerId="ADAL" clId="{B7BF07C5-55BE-4A63-A797-64077BB8B758}" dt="2026-06-09T00:18:34.513" v="223" actId="14100"/>
-          <ac:spMkLst>
-            <pc:docMk/>
-            <pc:sldMk cId="2306077870" sldId="336"/>
-            <ac:spMk id="6" creationId="{0A6CCABA-A564-B659-F453-BDBA6A1DD007}"/>
-          </ac:spMkLst>
-        </pc:spChg>
-      </pc:sldChg>
-      <pc:sldChg chg="addSp modSp add mod modNotesTx">
-        <pc:chgData name="Vanderlei Barbosa da Silva" userId="24e62a6a-a92d-4f90-9f09-efc0d92c1770" providerId="ADAL" clId="{B7BF07C5-55BE-4A63-A797-64077BB8B758}" dt="2026-06-09T00:21:10.222" v="236" actId="14100"/>
-        <pc:sldMkLst>
-          <pc:docMk/>
-          <pc:sldMk cId="344419398" sldId="337"/>
-        </pc:sldMkLst>
-        <pc:spChg chg="mod">
-          <ac:chgData name="Vanderlei Barbosa da Silva" userId="24e62a6a-a92d-4f90-9f09-efc0d92c1770" providerId="ADAL" clId="{B7BF07C5-55BE-4A63-A797-64077BB8B758}" dt="2026-06-09T00:20:32.663" v="232" actId="1076"/>
-          <ac:spMkLst>
-            <pc:docMk/>
-            <pc:sldMk cId="344419398" sldId="337"/>
-            <ac:spMk id="3" creationId="{7B87D4F8-CABA-B64E-FF8B-47D03803B1E5}"/>
-          </ac:spMkLst>
-        </pc:spChg>
-        <pc:spChg chg="add mod">
-          <ac:chgData name="Vanderlei Barbosa da Silva" userId="24e62a6a-a92d-4f90-9f09-efc0d92c1770" providerId="ADAL" clId="{B7BF07C5-55BE-4A63-A797-64077BB8B758}" dt="2026-06-09T00:21:10.222" v="236" actId="14100"/>
-          <ac:spMkLst>
-            <pc:docMk/>
-            <pc:sldMk cId="344419398" sldId="337"/>
-            <ac:spMk id="5" creationId="{04BBC616-2D2C-6046-7823-2247242A38EB}"/>
-          </ac:spMkLst>
-        </pc:spChg>
-        <pc:spChg chg="mod">
-          <ac:chgData name="Vanderlei Barbosa da Silva" userId="24e62a6a-a92d-4f90-9f09-efc0d92c1770" providerId="ADAL" clId="{B7BF07C5-55BE-4A63-A797-64077BB8B758}" dt="2026-06-09T00:20:53.615" v="233" actId="1076"/>
-          <ac:spMkLst>
-            <pc:docMk/>
-            <pc:sldMk cId="344419398" sldId="337"/>
-            <ac:spMk id="6" creationId="{5843F9A5-8513-217B-1118-D03F61209571}"/>
-          </ac:spMkLst>
-        </pc:spChg>
       </pc:sldChg>
       <pc:sldChg chg="addSp modSp add mod modNotesTx">
         <pc:chgData name="Vanderlei Barbosa da Silva" userId="24e62a6a-a92d-4f90-9f09-efc0d92c1770" providerId="ADAL" clId="{B7BF07C5-55BE-4A63-A797-64077BB8B758}" dt="2026-06-09T00:23:01.174" v="245" actId="1035"/>
@@ -815,104 +452,6 @@
             <ac:spMk id="7" creationId="{8201391D-5274-FF78-7ED7-F0657A6A7585}"/>
           </ac:spMkLst>
         </pc:spChg>
-      </pc:sldChg>
-      <pc:sldChg chg="addSp delSp modSp add mod">
-        <pc:chgData name="Vanderlei Barbosa da Silva" userId="24e62a6a-a92d-4f90-9f09-efc0d92c1770" providerId="ADAL" clId="{B7BF07C5-55BE-4A63-A797-64077BB8B758}" dt="2026-06-09T00:32:40.017" v="269" actId="1076"/>
-        <pc:sldMkLst>
-          <pc:docMk/>
-          <pc:sldMk cId="2295001194" sldId="339"/>
-        </pc:sldMkLst>
-        <pc:spChg chg="add mod">
-          <ac:chgData name="Vanderlei Barbosa da Silva" userId="24e62a6a-a92d-4f90-9f09-efc0d92c1770" providerId="ADAL" clId="{B7BF07C5-55BE-4A63-A797-64077BB8B758}" dt="2026-06-09T00:32:14.765" v="264" actId="2085"/>
-          <ac:spMkLst>
-            <pc:docMk/>
-            <pc:sldMk cId="2295001194" sldId="339"/>
-            <ac:spMk id="7" creationId="{4D850EDF-2E4B-1156-3B7C-CBB2D33FBF54}"/>
-          </ac:spMkLst>
-        </pc:spChg>
-        <pc:spChg chg="add mod">
-          <ac:chgData name="Vanderlei Barbosa da Silva" userId="24e62a6a-a92d-4f90-9f09-efc0d92c1770" providerId="ADAL" clId="{B7BF07C5-55BE-4A63-A797-64077BB8B758}" dt="2026-06-09T00:32:40.017" v="269" actId="1076"/>
-          <ac:spMkLst>
-            <pc:docMk/>
-            <pc:sldMk cId="2295001194" sldId="339"/>
-            <ac:spMk id="9" creationId="{4A860FF2-AB8D-472D-D129-191824751716}"/>
-          </ac:spMkLst>
-        </pc:spChg>
-        <pc:picChg chg="add mod">
-          <ac:chgData name="Vanderlei Barbosa da Silva" userId="24e62a6a-a92d-4f90-9f09-efc0d92c1770" providerId="ADAL" clId="{B7BF07C5-55BE-4A63-A797-64077BB8B758}" dt="2026-06-09T00:32:04.902" v="263" actId="2085"/>
-          <ac:picMkLst>
-            <pc:docMk/>
-            <pc:sldMk cId="2295001194" sldId="339"/>
-            <ac:picMk id="4" creationId="{FD292AD6-C1AB-F9A6-D94A-749F09175FBC}"/>
-          </ac:picMkLst>
-        </pc:picChg>
-      </pc:sldChg>
-      <pc:sldChg chg="modSp add mod">
-        <pc:chgData name="Vanderlei Barbosa da Silva" userId="24e62a6a-a92d-4f90-9f09-efc0d92c1770" providerId="ADAL" clId="{B7BF07C5-55BE-4A63-A797-64077BB8B758}" dt="2026-06-09T00:33:05.505" v="273" actId="14100"/>
-        <pc:sldMkLst>
-          <pc:docMk/>
-          <pc:sldMk cId="1087436643" sldId="340"/>
-        </pc:sldMkLst>
-        <pc:spChg chg="mod">
-          <ac:chgData name="Vanderlei Barbosa da Silva" userId="24e62a6a-a92d-4f90-9f09-efc0d92c1770" providerId="ADAL" clId="{B7BF07C5-55BE-4A63-A797-64077BB8B758}" dt="2026-06-09T00:33:05.505" v="273" actId="14100"/>
-          <ac:spMkLst>
-            <pc:docMk/>
-            <pc:sldMk cId="1087436643" sldId="340"/>
-            <ac:spMk id="7" creationId="{347C0B87-2D6D-BA54-CF02-959E62C0FE97}"/>
-          </ac:spMkLst>
-        </pc:spChg>
-      </pc:sldChg>
-      <pc:sldChg chg="modSp add mod">
-        <pc:chgData name="Vanderlei Barbosa da Silva" userId="24e62a6a-a92d-4f90-9f09-efc0d92c1770" providerId="ADAL" clId="{B7BF07C5-55BE-4A63-A797-64077BB8B758}" dt="2026-06-09T00:33:31.800" v="275" actId="14100"/>
-        <pc:sldMkLst>
-          <pc:docMk/>
-          <pc:sldMk cId="227488450" sldId="341"/>
-        </pc:sldMkLst>
-        <pc:spChg chg="mod">
-          <ac:chgData name="Vanderlei Barbosa da Silva" userId="24e62a6a-a92d-4f90-9f09-efc0d92c1770" providerId="ADAL" clId="{B7BF07C5-55BE-4A63-A797-64077BB8B758}" dt="2026-06-09T00:33:31.800" v="275" actId="14100"/>
-          <ac:spMkLst>
-            <pc:docMk/>
-            <pc:sldMk cId="227488450" sldId="341"/>
-            <ac:spMk id="7" creationId="{5072C99F-D757-4E8D-CCF6-21E92839D327}"/>
-          </ac:spMkLst>
-        </pc:spChg>
-      </pc:sldChg>
-      <pc:sldChg chg="modSp add mod">
-        <pc:chgData name="Vanderlei Barbosa da Silva" userId="24e62a6a-a92d-4f90-9f09-efc0d92c1770" providerId="ADAL" clId="{B7BF07C5-55BE-4A63-A797-64077BB8B758}" dt="2026-06-09T00:33:47.833" v="277" actId="14100"/>
-        <pc:sldMkLst>
-          <pc:docMk/>
-          <pc:sldMk cId="3973576404" sldId="342"/>
-        </pc:sldMkLst>
-        <pc:spChg chg="mod">
-          <ac:chgData name="Vanderlei Barbosa da Silva" userId="24e62a6a-a92d-4f90-9f09-efc0d92c1770" providerId="ADAL" clId="{B7BF07C5-55BE-4A63-A797-64077BB8B758}" dt="2026-06-09T00:33:47.833" v="277" actId="14100"/>
-          <ac:spMkLst>
-            <pc:docMk/>
-            <pc:sldMk cId="3973576404" sldId="342"/>
-            <ac:spMk id="7" creationId="{32BDCAE3-D0E5-80D2-F603-0303449C2DF5}"/>
-          </ac:spMkLst>
-        </pc:spChg>
-      </pc:sldChg>
-      <pc:sldChg chg="delSp modSp add mod">
-        <pc:chgData name="Vanderlei Barbosa da Silva" userId="24e62a6a-a92d-4f90-9f09-efc0d92c1770" providerId="ADAL" clId="{B7BF07C5-55BE-4A63-A797-64077BB8B758}" dt="2026-06-09T00:34:18.464" v="282" actId="1076"/>
-        <pc:sldMkLst>
-          <pc:docMk/>
-          <pc:sldMk cId="2965498340" sldId="343"/>
-        </pc:sldMkLst>
-        <pc:spChg chg="mod">
-          <ac:chgData name="Vanderlei Barbosa da Silva" userId="24e62a6a-a92d-4f90-9f09-efc0d92c1770" providerId="ADAL" clId="{B7BF07C5-55BE-4A63-A797-64077BB8B758}" dt="2026-06-09T00:34:18.464" v="282" actId="1076"/>
-          <ac:spMkLst>
-            <pc:docMk/>
-            <pc:sldMk cId="2965498340" sldId="343"/>
-            <ac:spMk id="7" creationId="{44BB6993-71D1-B64C-F813-988EAF3DC966}"/>
-          </ac:spMkLst>
-        </pc:spChg>
-      </pc:sldChg>
-      <pc:sldChg chg="delSp add mod">
-        <pc:chgData name="Vanderlei Barbosa da Silva" userId="24e62a6a-a92d-4f90-9f09-efc0d92c1770" providerId="ADAL" clId="{B7BF07C5-55BE-4A63-A797-64077BB8B758}" dt="2026-06-09T00:34:26.523" v="284" actId="478"/>
-        <pc:sldMkLst>
-          <pc:docMk/>
-          <pc:sldMk cId="248471939" sldId="344"/>
-        </pc:sldMkLst>
       </pc:sldChg>
       <pc:sldChg chg="addSp modSp add mod">
         <pc:chgData name="Vanderlei Barbosa da Silva" userId="24e62a6a-a92d-4f90-9f09-efc0d92c1770" providerId="ADAL" clId="{B7BF07C5-55BE-4A63-A797-64077BB8B758}" dt="2026-06-09T00:45:30.303" v="406" actId="113"/>
@@ -984,50 +523,6 @@
           </ac:spMkLst>
         </pc:spChg>
       </pc:sldChg>
-      <pc:sldChg chg="delSp add mod modTransition modAnim modNotesTx">
-        <pc:chgData name="Vanderlei Barbosa da Silva" userId="24e62a6a-a92d-4f90-9f09-efc0d92c1770" providerId="ADAL" clId="{B7BF07C5-55BE-4A63-A797-64077BB8B758}" dt="2026-06-09T01:46:16.993" v="526" actId="20577"/>
-        <pc:sldMkLst>
-          <pc:docMk/>
-          <pc:sldMk cId="716722756" sldId="347"/>
-        </pc:sldMkLst>
-      </pc:sldChg>
-      <pc:sldChg chg="delSp add mod modNotesTx">
-        <pc:chgData name="Vanderlei Barbosa da Silva" userId="24e62a6a-a92d-4f90-9f09-efc0d92c1770" providerId="ADAL" clId="{B7BF07C5-55BE-4A63-A797-64077BB8B758}" dt="2026-06-09T01:49:24.185" v="534" actId="20577"/>
-        <pc:sldMkLst>
-          <pc:docMk/>
-          <pc:sldMk cId="399034805" sldId="348"/>
-        </pc:sldMkLst>
-      </pc:sldChg>
-      <pc:sldChg chg="add modNotesTx">
-        <pc:chgData name="Vanderlei Barbosa da Silva" userId="24e62a6a-a92d-4f90-9f09-efc0d92c1770" providerId="ADAL" clId="{B7BF07C5-55BE-4A63-A797-64077BB8B758}" dt="2026-06-09T01:51:46.305" v="543" actId="20577"/>
-        <pc:sldMkLst>
-          <pc:docMk/>
-          <pc:sldMk cId="358743533" sldId="349"/>
-        </pc:sldMkLst>
-      </pc:sldChg>
-      <pc:sldChg chg="addSp delSp modSp add mod modNotesTx">
-        <pc:chgData name="Vanderlei Barbosa da Silva" userId="24e62a6a-a92d-4f90-9f09-efc0d92c1770" providerId="ADAL" clId="{B7BF07C5-55BE-4A63-A797-64077BB8B758}" dt="2026-06-09T02:19:38.858" v="758" actId="20577"/>
-        <pc:sldMkLst>
-          <pc:docMk/>
-          <pc:sldMk cId="3466443467" sldId="350"/>
-        </pc:sldMkLst>
-        <pc:spChg chg="mod">
-          <ac:chgData name="Vanderlei Barbosa da Silva" userId="24e62a6a-a92d-4f90-9f09-efc0d92c1770" providerId="ADAL" clId="{B7BF07C5-55BE-4A63-A797-64077BB8B758}" dt="2026-06-09T02:18:09.080" v="745" actId="20577"/>
-          <ac:spMkLst>
-            <pc:docMk/>
-            <pc:sldMk cId="3466443467" sldId="350"/>
-            <ac:spMk id="2" creationId="{03B37C23-A520-7906-09AE-599D93B632FE}"/>
-          </ac:spMkLst>
-        </pc:spChg>
-        <pc:picChg chg="add mod">
-          <ac:chgData name="Vanderlei Barbosa da Silva" userId="24e62a6a-a92d-4f90-9f09-efc0d92c1770" providerId="ADAL" clId="{B7BF07C5-55BE-4A63-A797-64077BB8B758}" dt="2026-06-09T02:16:17.258" v="680" actId="1076"/>
-          <ac:picMkLst>
-            <pc:docMk/>
-            <pc:sldMk cId="3466443467" sldId="350"/>
-            <ac:picMk id="5" creationId="{27970D97-E3D0-513F-C866-FB6F4242ECB5}"/>
-          </ac:picMkLst>
-        </pc:picChg>
-      </pc:sldChg>
       <pc:sldChg chg="addSp delSp modSp add mod modNotesTx">
         <pc:chgData name="Vanderlei Barbosa da Silva" userId="24e62a6a-a92d-4f90-9f09-efc0d92c1770" providerId="ADAL" clId="{B7BF07C5-55BE-4A63-A797-64077BB8B758}" dt="2026-06-09T02:28:55.730" v="835" actId="20577"/>
         <pc:sldMkLst>
@@ -1042,14 +537,6 @@
             <ac:spMk id="2" creationId="{C03DB1DC-F0EF-3B15-C608-74C4A0F0162D}"/>
           </ac:spMkLst>
         </pc:spChg>
-        <pc:graphicFrameChg chg="add mod modGraphic">
-          <ac:chgData name="Vanderlei Barbosa da Silva" userId="24e62a6a-a92d-4f90-9f09-efc0d92c1770" providerId="ADAL" clId="{B7BF07C5-55BE-4A63-A797-64077BB8B758}" dt="2026-06-09T02:27:50.088" v="824" actId="14100"/>
-          <ac:graphicFrameMkLst>
-            <pc:docMk/>
-            <pc:sldMk cId="834736343" sldId="351"/>
-            <ac:graphicFrameMk id="7" creationId="{FD682DF2-FDC2-7D6F-91F0-A8E43340234D}"/>
-          </ac:graphicFrameMkLst>
-        </pc:graphicFrameChg>
       </pc:sldChg>
       <pc:sldChg chg="addSp delSp modSp add mod">
         <pc:chgData name="Vanderlei Barbosa da Silva" userId="24e62a6a-a92d-4f90-9f09-efc0d92c1770" providerId="ADAL" clId="{B7BF07C5-55BE-4A63-A797-64077BB8B758}" dt="2026-06-09T12:55:30.591" v="903" actId="1076"/>
@@ -1065,30 +552,85 @@
             <ac:spMk id="2" creationId="{F3E115AB-0E6A-E75B-7042-9D525A9CC0AF}"/>
           </ac:spMkLst>
         </pc:spChg>
-        <pc:picChg chg="add mod">
-          <ac:chgData name="Vanderlei Barbosa da Silva" userId="24e62a6a-a92d-4f90-9f09-efc0d92c1770" providerId="ADAL" clId="{B7BF07C5-55BE-4A63-A797-64077BB8B758}" dt="2026-06-09T12:55:30.591" v="903" actId="1076"/>
-          <ac:picMkLst>
+      </pc:sldChg>
+    </pc:docChg>
+  </pc:docChgLst>
+  <pc:docChgLst>
+    <pc:chgData name="Vanderlei Barbosa da Silva" userId="S::silvavbs@stj.jus.br::24e62a6a-a92d-4f90-9f09-efc0d92c1770" providerId="AD" clId="Web-{1F906071-AE03-DEFA-F367-A0ADBD0624C7}"/>
+    <pc:docChg chg="modSld">
+      <pc:chgData name="Vanderlei Barbosa da Silva" userId="S::silvavbs@stj.jus.br::24e62a6a-a92d-4f90-9f09-efc0d92c1770" providerId="AD" clId="Web-{1F906071-AE03-DEFA-F367-A0ADBD0624C7}" dt="2026-06-26T17:19:08.263" v="8" actId="20577"/>
+      <pc:docMkLst>
+        <pc:docMk/>
+      </pc:docMkLst>
+      <pc:sldChg chg="modSp">
+        <pc:chgData name="Vanderlei Barbosa da Silva" userId="S::silvavbs@stj.jus.br::24e62a6a-a92d-4f90-9f09-efc0d92c1770" providerId="AD" clId="Web-{1F906071-AE03-DEFA-F367-A0ADBD0624C7}" dt="2026-06-26T17:19:08.263" v="8" actId="20577"/>
+        <pc:sldMkLst>
+          <pc:docMk/>
+          <pc:sldMk cId="2518470170" sldId="311"/>
+        </pc:sldMkLst>
+        <pc:spChg chg="mod">
+          <ac:chgData name="Vanderlei Barbosa da Silva" userId="S::silvavbs@stj.jus.br::24e62a6a-a92d-4f90-9f09-efc0d92c1770" providerId="AD" clId="Web-{1F906071-AE03-DEFA-F367-A0ADBD0624C7}" dt="2026-06-26T17:19:08.263" v="8" actId="20577"/>
+          <ac:spMkLst>
             <pc:docMk/>
-            <pc:sldMk cId="1724249474" sldId="352"/>
-            <ac:picMk id="8" creationId="{1E756564-1C87-CE0D-CAD0-FFCB25C8C221}"/>
-          </ac:picMkLst>
-        </pc:picChg>
+            <pc:sldMk cId="2518470170" sldId="311"/>
+            <ac:spMk id="12" creationId="{5DC7200A-9C17-5991-6D14-2D08EDBB0E4A}"/>
+          </ac:spMkLst>
+        </pc:spChg>
       </pc:sldChg>
     </pc:docChg>
   </pc:docChgLst>
   <pc:docChgLst>
     <pc:chgData name="Vanderlei Barbosa da Silva" userId="24e62a6a-a92d-4f90-9f09-efc0d92c1770" providerId="ADAL" clId="{26A2EC59-7300-4526-A9AE-3A4D8AA35A8E}"/>
     <pc:docChg chg="undo custSel delSld modSld modSection">
-      <pc:chgData name="Vanderlei Barbosa da Silva" userId="24e62a6a-a92d-4f90-9f09-efc0d92c1770" providerId="ADAL" clId="{26A2EC59-7300-4526-A9AE-3A4D8AA35A8E}" dt="2026-06-09T17:00:32.751" v="138" actId="6549"/>
+      <pc:chgData name="Vanderlei Barbosa da Silva" userId="24e62a6a-a92d-4f90-9f09-efc0d92c1770" providerId="ADAL" clId="{26A2EC59-7300-4526-A9AE-3A4D8AA35A8E}" dt="2026-07-02T14:39:28.613" v="811" actId="6549"/>
       <pc:docMkLst>
         <pc:docMk/>
       </pc:docMkLst>
-      <pc:sldChg chg="modNotesTx">
-        <pc:chgData name="Vanderlei Barbosa da Silva" userId="24e62a6a-a92d-4f90-9f09-efc0d92c1770" providerId="ADAL" clId="{26A2EC59-7300-4526-A9AE-3A4D8AA35A8E}" dt="2026-06-09T16:41:33.083" v="4" actId="20577"/>
+      <pc:sldChg chg="addSp modSp mod">
+        <pc:chgData name="Vanderlei Barbosa da Silva" userId="24e62a6a-a92d-4f90-9f09-efc0d92c1770" providerId="ADAL" clId="{26A2EC59-7300-4526-A9AE-3A4D8AA35A8E}" dt="2026-07-02T14:39:28.613" v="811" actId="6549"/>
+        <pc:sldMkLst>
+          <pc:docMk/>
+          <pc:sldMk cId="3768051510" sldId="256"/>
+        </pc:sldMkLst>
+        <pc:spChg chg="mod">
+          <ac:chgData name="Vanderlei Barbosa da Silva" userId="24e62a6a-a92d-4f90-9f09-efc0d92c1770" providerId="ADAL" clId="{26A2EC59-7300-4526-A9AE-3A4D8AA35A8E}" dt="2026-07-02T14:39:28.613" v="811" actId="6549"/>
+          <ac:spMkLst>
+            <pc:docMk/>
+            <pc:sldMk cId="3768051510" sldId="256"/>
+            <ac:spMk id="3" creationId="{7F42A33A-D40D-D94A-A311-D61290DA0B73}"/>
+          </ac:spMkLst>
+        </pc:spChg>
+        <pc:spChg chg="add mod">
+          <ac:chgData name="Vanderlei Barbosa da Silva" userId="24e62a6a-a92d-4f90-9f09-efc0d92c1770" providerId="ADAL" clId="{26A2EC59-7300-4526-A9AE-3A4D8AA35A8E}" dt="2026-07-02T14:06:02.456" v="809" actId="6549"/>
+          <ac:spMkLst>
+            <pc:docMk/>
+            <pc:sldMk cId="3768051510" sldId="256"/>
+            <ac:spMk id="4" creationId="{A15DD5E0-8BEC-B1AA-B32B-4F3009B75DEA}"/>
+          </ac:spMkLst>
+        </pc:spChg>
+        <pc:spChg chg="mod">
+          <ac:chgData name="Vanderlei Barbosa da Silva" userId="24e62a6a-a92d-4f90-9f09-efc0d92c1770" providerId="ADAL" clId="{26A2EC59-7300-4526-A9AE-3A4D8AA35A8E}" dt="2026-07-02T12:46:47.009" v="661" actId="1076"/>
+          <ac:spMkLst>
+            <pc:docMk/>
+            <pc:sldMk cId="3768051510" sldId="256"/>
+            <ac:spMk id="6" creationId="{C0939EFC-3A1F-0D2C-770C-747BC7C55472}"/>
+          </ac:spMkLst>
+        </pc:spChg>
+      </pc:sldChg>
+      <pc:sldChg chg="modSp mod modNotesTx">
+        <pc:chgData name="Vanderlei Barbosa da Silva" userId="24e62a6a-a92d-4f90-9f09-efc0d92c1770" providerId="ADAL" clId="{26A2EC59-7300-4526-A9AE-3A4D8AA35A8E}" dt="2026-07-02T13:19:47.641" v="783" actId="1076"/>
         <pc:sldMkLst>
           <pc:docMk/>
           <pc:sldMk cId="4105379344" sldId="280"/>
         </pc:sldMkLst>
+        <pc:picChg chg="mod">
+          <ac:chgData name="Vanderlei Barbosa da Silva" userId="24e62a6a-a92d-4f90-9f09-efc0d92c1770" providerId="ADAL" clId="{26A2EC59-7300-4526-A9AE-3A4D8AA35A8E}" dt="2026-07-02T13:19:47.641" v="783" actId="1076"/>
+          <ac:picMkLst>
+            <pc:docMk/>
+            <pc:sldMk cId="4105379344" sldId="280"/>
+            <ac:picMk id="5" creationId="{00000000-0000-0000-0000-000000000000}"/>
+          </ac:picMkLst>
+        </pc:picChg>
       </pc:sldChg>
       <pc:sldChg chg="modNotesTx">
         <pc:chgData name="Vanderlei Barbosa da Silva" userId="24e62a6a-a92d-4f90-9f09-efc0d92c1770" providerId="ADAL" clId="{26A2EC59-7300-4526-A9AE-3A4D8AA35A8E}" dt="2026-06-09T16:46:21.672" v="64" actId="20577"/>
@@ -1111,19 +653,74 @@
           <pc:sldMk cId="3989337020" sldId="310"/>
         </pc:sldMkLst>
       </pc:sldChg>
-      <pc:sldChg chg="modNotesTx">
-        <pc:chgData name="Vanderlei Barbosa da Silva" userId="24e62a6a-a92d-4f90-9f09-efc0d92c1770" providerId="ADAL" clId="{26A2EC59-7300-4526-A9AE-3A4D8AA35A8E}" dt="2026-06-09T16:53:56.131" v="91" actId="20577"/>
+      <pc:sldChg chg="addSp modSp mod modNotesTx">
+        <pc:chgData name="Vanderlei Barbosa da Silva" userId="24e62a6a-a92d-4f90-9f09-efc0d92c1770" providerId="ADAL" clId="{26A2EC59-7300-4526-A9AE-3A4D8AA35A8E}" dt="2026-07-02T12:45:47.297" v="660" actId="20577"/>
         <pc:sldMkLst>
           <pc:docMk/>
           <pc:sldMk cId="2518470170" sldId="311"/>
         </pc:sldMkLst>
+        <pc:spChg chg="add mod">
+          <ac:chgData name="Vanderlei Barbosa da Silva" userId="24e62a6a-a92d-4f90-9f09-efc0d92c1770" providerId="ADAL" clId="{26A2EC59-7300-4526-A9AE-3A4D8AA35A8E}" dt="2026-07-02T12:45:47.297" v="660" actId="20577"/>
+          <ac:spMkLst>
+            <pc:docMk/>
+            <pc:sldMk cId="2518470170" sldId="311"/>
+            <ac:spMk id="3" creationId="{1A0931CF-DA5F-F7EC-4FB6-219B40506354}"/>
+          </ac:spMkLst>
+        </pc:spChg>
+        <pc:spChg chg="mod">
+          <ac:chgData name="Vanderlei Barbosa da Silva" userId="24e62a6a-a92d-4f90-9f09-efc0d92c1770" providerId="ADAL" clId="{26A2EC59-7300-4526-A9AE-3A4D8AA35A8E}" dt="2026-07-02T12:34:49.595" v="416" actId="1076"/>
+          <ac:spMkLst>
+            <pc:docMk/>
+            <pc:sldMk cId="2518470170" sldId="311"/>
+            <ac:spMk id="12" creationId="{5DC7200A-9C17-5991-6D14-2D08EDBB0E4A}"/>
+          </ac:spMkLst>
+        </pc:spChg>
+        <pc:spChg chg="mod">
+          <ac:chgData name="Vanderlei Barbosa da Silva" userId="24e62a6a-a92d-4f90-9f09-efc0d92c1770" providerId="ADAL" clId="{26A2EC59-7300-4526-A9AE-3A4D8AA35A8E}" dt="2026-07-02T12:34:35.803" v="412" actId="1076"/>
+          <ac:spMkLst>
+            <pc:docMk/>
+            <pc:sldMk cId="2518470170" sldId="311"/>
+            <ac:spMk id="14" creationId="{274FB233-3AA5-14FC-4967-CDD12E4043A3}"/>
+          </ac:spMkLst>
+        </pc:spChg>
+        <pc:graphicFrameChg chg="modGraphic">
+          <ac:chgData name="Vanderlei Barbosa da Silva" userId="24e62a6a-a92d-4f90-9f09-efc0d92c1770" providerId="ADAL" clId="{26A2EC59-7300-4526-A9AE-3A4D8AA35A8E}" dt="2026-07-02T12:26:25.804" v="299" actId="20577"/>
+          <ac:graphicFrameMkLst>
+            <pc:docMk/>
+            <pc:sldMk cId="2518470170" sldId="311"/>
+            <ac:graphicFrameMk id="8" creationId="{A8B218D5-DDA1-AB53-7604-A31FCF8BCF92}"/>
+          </ac:graphicFrameMkLst>
+        </pc:graphicFrameChg>
       </pc:sldChg>
-      <pc:sldChg chg="modNotesTx">
-        <pc:chgData name="Vanderlei Barbosa da Silva" userId="24e62a6a-a92d-4f90-9f09-efc0d92c1770" providerId="ADAL" clId="{26A2EC59-7300-4526-A9AE-3A4D8AA35A8E}" dt="2026-06-09T17:00:32.751" v="138" actId="6549"/>
+      <pc:sldChg chg="modSp mod">
+        <pc:chgData name="Vanderlei Barbosa da Silva" userId="24e62a6a-a92d-4f90-9f09-efc0d92c1770" providerId="ADAL" clId="{26A2EC59-7300-4526-A9AE-3A4D8AA35A8E}" dt="2026-07-02T13:38:33.491" v="805" actId="6549"/>
         <pc:sldMkLst>
           <pc:docMk/>
-          <pc:sldMk cId="2753903397" sldId="312"/>
+          <pc:sldMk cId="2585261711" sldId="316"/>
         </pc:sldMkLst>
+        <pc:spChg chg="mod">
+          <ac:chgData name="Vanderlei Barbosa da Silva" userId="24e62a6a-a92d-4f90-9f09-efc0d92c1770" providerId="ADAL" clId="{26A2EC59-7300-4526-A9AE-3A4D8AA35A8E}" dt="2026-07-02T13:38:33.491" v="805" actId="6549"/>
+          <ac:spMkLst>
+            <pc:docMk/>
+            <pc:sldMk cId="2585261711" sldId="316"/>
+            <ac:spMk id="19" creationId="{00000000-0000-0000-0000-000000000000}"/>
+          </ac:spMkLst>
+        </pc:spChg>
+      </pc:sldChg>
+      <pc:sldChg chg="modSp mod">
+        <pc:chgData name="Vanderlei Barbosa da Silva" userId="24e62a6a-a92d-4f90-9f09-efc0d92c1770" providerId="ADAL" clId="{26A2EC59-7300-4526-A9AE-3A4D8AA35A8E}" dt="2026-07-02T12:50:26.587" v="758"/>
+        <pc:sldMkLst>
+          <pc:docMk/>
+          <pc:sldMk cId="903475675" sldId="318"/>
+        </pc:sldMkLst>
+        <pc:spChg chg="mod">
+          <ac:chgData name="Vanderlei Barbosa da Silva" userId="24e62a6a-a92d-4f90-9f09-efc0d92c1770" providerId="ADAL" clId="{26A2EC59-7300-4526-A9AE-3A4D8AA35A8E}" dt="2026-07-02T12:50:26.587" v="758"/>
+          <ac:spMkLst>
+            <pc:docMk/>
+            <pc:sldMk cId="903475675" sldId="318"/>
+            <ac:spMk id="4" creationId="{6CBB7969-5F3A-BF5D-BE08-2DFC83D7A0BD}"/>
+          </ac:spMkLst>
+        </pc:spChg>
       </pc:sldChg>
       <pc:sldChg chg="modNotesTx">
         <pc:chgData name="Vanderlei Barbosa da Silva" userId="24e62a6a-a92d-4f90-9f09-efc0d92c1770" providerId="ADAL" clId="{26A2EC59-7300-4526-A9AE-3A4D8AA35A8E}" dt="2026-06-09T16:45:53.935" v="57" actId="6549"/>
@@ -1132,33 +729,172 @@
           <pc:sldMk cId="2588760046" sldId="332"/>
         </pc:sldMkLst>
       </pc:sldChg>
-      <pc:sldChg chg="modNotesTx">
-        <pc:chgData name="Vanderlei Barbosa da Silva" userId="24e62a6a-a92d-4f90-9f09-efc0d92c1770" providerId="ADAL" clId="{26A2EC59-7300-4526-A9AE-3A4D8AA35A8E}" dt="2026-06-09T16:44:31.010" v="48" actId="20577"/>
+      <pc:sldChg chg="modSp mod">
+        <pc:chgData name="Vanderlei Barbosa da Silva" userId="24e62a6a-a92d-4f90-9f09-efc0d92c1770" providerId="ADAL" clId="{26A2EC59-7300-4526-A9AE-3A4D8AA35A8E}" dt="2026-07-02T12:56:01.671" v="772" actId="6549"/>
         <pc:sldMkLst>
           <pc:docMk/>
-          <pc:sldMk cId="2195579995" sldId="333"/>
+          <pc:sldMk cId="2553994211" sldId="346"/>
+        </pc:sldMkLst>
+        <pc:spChg chg="mod">
+          <ac:chgData name="Vanderlei Barbosa da Silva" userId="24e62a6a-a92d-4f90-9f09-efc0d92c1770" providerId="ADAL" clId="{26A2EC59-7300-4526-A9AE-3A4D8AA35A8E}" dt="2026-07-02T12:54:49.143" v="768" actId="113"/>
+          <ac:spMkLst>
+            <pc:docMk/>
+            <pc:sldMk cId="2553994211" sldId="346"/>
+            <ac:spMk id="4" creationId="{4F893018-56B5-B409-8ADA-35014BF97920}"/>
+          </ac:spMkLst>
+        </pc:spChg>
+        <pc:spChg chg="mod">
+          <ac:chgData name="Vanderlei Barbosa da Silva" userId="24e62a6a-a92d-4f90-9f09-efc0d92c1770" providerId="ADAL" clId="{26A2EC59-7300-4526-A9AE-3A4D8AA35A8E}" dt="2026-07-02T12:54:58.230" v="769" actId="113"/>
+          <ac:spMkLst>
+            <pc:docMk/>
+            <pc:sldMk cId="2553994211" sldId="346"/>
+            <ac:spMk id="6" creationId="{2909BD7E-7F18-7EB7-79DE-B54AE5D8BC68}"/>
+          </ac:spMkLst>
+        </pc:spChg>
+        <pc:spChg chg="mod">
+          <ac:chgData name="Vanderlei Barbosa da Silva" userId="24e62a6a-a92d-4f90-9f09-efc0d92c1770" providerId="ADAL" clId="{26A2EC59-7300-4526-A9AE-3A4D8AA35A8E}" dt="2026-07-02T12:56:01.671" v="772" actId="6549"/>
+          <ac:spMkLst>
+            <pc:docMk/>
+            <pc:sldMk cId="2553994211" sldId="346"/>
+            <ac:spMk id="8" creationId="{03B97F2F-4D4A-AC35-226A-B60F17D4DA8A}"/>
+          </ac:spMkLst>
+        </pc:spChg>
+      </pc:sldChg>
+      <pc:sldChg chg="mod modShow">
+        <pc:chgData name="Vanderlei Barbosa da Silva" userId="24e62a6a-a92d-4f90-9f09-efc0d92c1770" providerId="ADAL" clId="{26A2EC59-7300-4526-A9AE-3A4D8AA35A8E}" dt="2026-07-02T13:52:47.890" v="808" actId="729"/>
+        <pc:sldMkLst>
+          <pc:docMk/>
+          <pc:sldMk cId="834736343" sldId="351"/>
         </pc:sldMkLst>
       </pc:sldChg>
-      <pc:sldChg chg="modNotesTx">
-        <pc:chgData name="Vanderlei Barbosa da Silva" userId="24e62a6a-a92d-4f90-9f09-efc0d92c1770" providerId="ADAL" clId="{26A2EC59-7300-4526-A9AE-3A4D8AA35A8E}" dt="2026-06-09T16:57:24.218" v="104" actId="20577"/>
+      <pc:sldChg chg="modSp mod">
+        <pc:chgData name="Vanderlei Barbosa da Silva" userId="24e62a6a-a92d-4f90-9f09-efc0d92c1770" providerId="ADAL" clId="{26A2EC59-7300-4526-A9AE-3A4D8AA35A8E}" dt="2026-07-02T12:53:02.612" v="767" actId="1076"/>
         <pc:sldMkLst>
           <pc:docMk/>
-          <pc:sldMk cId="2271119202" sldId="334"/>
+          <pc:sldMk cId="0" sldId="355"/>
         </pc:sldMkLst>
+        <pc:spChg chg="mod">
+          <ac:chgData name="Vanderlei Barbosa da Silva" userId="24e62a6a-a92d-4f90-9f09-efc0d92c1770" providerId="ADAL" clId="{26A2EC59-7300-4526-A9AE-3A4D8AA35A8E}" dt="2026-07-02T12:53:02.612" v="767" actId="1076"/>
+          <ac:spMkLst>
+            <pc:docMk/>
+            <pc:sldMk cId="0" sldId="355"/>
+            <ac:spMk id="7" creationId="{00000000-0000-0000-0000-000000000000}"/>
+          </ac:spMkLst>
+        </pc:spChg>
       </pc:sldChg>
-      <pc:sldChg chg="modNotesTx">
-        <pc:chgData name="Vanderlei Barbosa da Silva" userId="24e62a6a-a92d-4f90-9f09-efc0d92c1770" providerId="ADAL" clId="{26A2EC59-7300-4526-A9AE-3A4D8AA35A8E}" dt="2026-06-09T16:57:41.183" v="108" actId="20577"/>
+      <pc:sldChg chg="delSp modSp mod">
+        <pc:chgData name="Vanderlei Barbosa da Silva" userId="24e62a6a-a92d-4f90-9f09-efc0d92c1770" providerId="ADAL" clId="{26A2EC59-7300-4526-A9AE-3A4D8AA35A8E}" dt="2026-07-02T13:37:02.697" v="804" actId="6549"/>
         <pc:sldMkLst>
           <pc:docMk/>
-          <pc:sldMk cId="1160404001" sldId="335"/>
+          <pc:sldMk cId="0" sldId="357"/>
         </pc:sldMkLst>
+        <pc:spChg chg="mod">
+          <ac:chgData name="Vanderlei Barbosa da Silva" userId="24e62a6a-a92d-4f90-9f09-efc0d92c1770" providerId="ADAL" clId="{26A2EC59-7300-4526-A9AE-3A4D8AA35A8E}" dt="2026-07-02T13:37:02.697" v="804" actId="6549"/>
+          <ac:spMkLst>
+            <pc:docMk/>
+            <pc:sldMk cId="0" sldId="357"/>
+            <ac:spMk id="6" creationId="{00000000-0000-0000-0000-000000000000}"/>
+          </ac:spMkLst>
+        </pc:spChg>
+        <pc:spChg chg="del">
+          <ac:chgData name="Vanderlei Barbosa da Silva" userId="24e62a6a-a92d-4f90-9f09-efc0d92c1770" providerId="ADAL" clId="{26A2EC59-7300-4526-A9AE-3A4D8AA35A8E}" dt="2026-07-02T13:35:38.416" v="788" actId="478"/>
+          <ac:spMkLst>
+            <pc:docMk/>
+            <pc:sldMk cId="0" sldId="357"/>
+            <ac:spMk id="7" creationId="{00000000-0000-0000-0000-000000000000}"/>
+          </ac:spMkLst>
+        </pc:spChg>
       </pc:sldChg>
-      <pc:sldChg chg="modNotesTx">
-        <pc:chgData name="Vanderlei Barbosa da Silva" userId="24e62a6a-a92d-4f90-9f09-efc0d92c1770" providerId="ADAL" clId="{26A2EC59-7300-4526-A9AE-3A4D8AA35A8E}" dt="2026-06-09T16:58:12.659" v="120" actId="6549"/>
+      <pc:sldChg chg="modSp mod">
+        <pc:chgData name="Vanderlei Barbosa da Silva" userId="24e62a6a-a92d-4f90-9f09-efc0d92c1770" providerId="ADAL" clId="{26A2EC59-7300-4526-A9AE-3A4D8AA35A8E}" dt="2026-07-02T12:59:02.903" v="779" actId="20577"/>
         <pc:sldMkLst>
           <pc:docMk/>
-          <pc:sldMk cId="2306077870" sldId="336"/>
+          <pc:sldMk cId="0" sldId="358"/>
         </pc:sldMkLst>
+        <pc:spChg chg="mod">
+          <ac:chgData name="Vanderlei Barbosa da Silva" userId="24e62a6a-a92d-4f90-9f09-efc0d92c1770" providerId="ADAL" clId="{26A2EC59-7300-4526-A9AE-3A4D8AA35A8E}" dt="2026-07-02T12:59:02.903" v="779" actId="20577"/>
+          <ac:spMkLst>
+            <pc:docMk/>
+            <pc:sldMk cId="0" sldId="358"/>
+            <ac:spMk id="7" creationId="{00000000-0000-0000-0000-000000000000}"/>
+          </ac:spMkLst>
+        </pc:spChg>
+      </pc:sldChg>
+      <pc:sldChg chg="modSp mod">
+        <pc:chgData name="Vanderlei Barbosa da Silva" userId="24e62a6a-a92d-4f90-9f09-efc0d92c1770" providerId="ADAL" clId="{26A2EC59-7300-4526-A9AE-3A4D8AA35A8E}" dt="2026-07-02T13:42:19.773" v="807" actId="6549"/>
+        <pc:sldMkLst>
+          <pc:docMk/>
+          <pc:sldMk cId="0" sldId="362"/>
+        </pc:sldMkLst>
+        <pc:spChg chg="mod">
+          <ac:chgData name="Vanderlei Barbosa da Silva" userId="24e62a6a-a92d-4f90-9f09-efc0d92c1770" providerId="ADAL" clId="{26A2EC59-7300-4526-A9AE-3A4D8AA35A8E}" dt="2026-07-02T13:42:19.773" v="807" actId="6549"/>
+          <ac:spMkLst>
+            <pc:docMk/>
+            <pc:sldMk cId="0" sldId="362"/>
+            <ac:spMk id="8" creationId="{00000000-0000-0000-0000-000000000000}"/>
+          </ac:spMkLst>
+        </pc:spChg>
+      </pc:sldChg>
+      <pc:sldChg chg="addSp delSp modSp mod">
+        <pc:chgData name="Vanderlei Barbosa da Silva" userId="24e62a6a-a92d-4f90-9f09-efc0d92c1770" providerId="ADAL" clId="{26A2EC59-7300-4526-A9AE-3A4D8AA35A8E}" dt="2026-07-02T12:32:53.067" v="411" actId="14100"/>
+        <pc:sldMkLst>
+          <pc:docMk/>
+          <pc:sldMk cId="0" sldId="363"/>
+        </pc:sldMkLst>
+        <pc:spChg chg="add del mod">
+          <ac:chgData name="Vanderlei Barbosa da Silva" userId="24e62a6a-a92d-4f90-9f09-efc0d92c1770" providerId="ADAL" clId="{26A2EC59-7300-4526-A9AE-3A4D8AA35A8E}" dt="2026-07-02T12:30:23.963" v="369" actId="478"/>
+          <ac:spMkLst>
+            <pc:docMk/>
+            <pc:sldMk cId="0" sldId="363"/>
+            <ac:spMk id="3" creationId="{77A6C8B4-14EF-9DAA-AA53-F92B4B10C46B}"/>
+          </ac:spMkLst>
+        </pc:spChg>
+        <pc:spChg chg="add mod">
+          <ac:chgData name="Vanderlei Barbosa da Silva" userId="24e62a6a-a92d-4f90-9f09-efc0d92c1770" providerId="ADAL" clId="{26A2EC59-7300-4526-A9AE-3A4D8AA35A8E}" dt="2026-07-02T12:32:53.067" v="411" actId="14100"/>
+          <ac:spMkLst>
+            <pc:docMk/>
+            <pc:sldMk cId="0" sldId="363"/>
+            <ac:spMk id="4" creationId="{FB55A8F3-E373-8478-C5B8-AC894C676C79}"/>
+          </ac:spMkLst>
+        </pc:spChg>
+      </pc:sldChg>
+      <pc:sldChg chg="modSp mod">
+        <pc:chgData name="Vanderlei Barbosa da Silva" userId="24e62a6a-a92d-4f90-9f09-efc0d92c1770" providerId="ADAL" clId="{26A2EC59-7300-4526-A9AE-3A4D8AA35A8E}" dt="2026-07-02T13:13:52.102" v="782" actId="1076"/>
+        <pc:sldMkLst>
+          <pc:docMk/>
+          <pc:sldMk cId="0" sldId="364"/>
+        </pc:sldMkLst>
+        <pc:spChg chg="mod">
+          <ac:chgData name="Vanderlei Barbosa da Silva" userId="24e62a6a-a92d-4f90-9f09-efc0d92c1770" providerId="ADAL" clId="{26A2EC59-7300-4526-A9AE-3A4D8AA35A8E}" dt="2026-07-02T13:11:12.495" v="780" actId="113"/>
+          <ac:spMkLst>
+            <pc:docMk/>
+            <pc:sldMk cId="0" sldId="364"/>
+            <ac:spMk id="7" creationId="{00000000-0000-0000-0000-000000000000}"/>
+          </ac:spMkLst>
+        </pc:spChg>
+        <pc:spChg chg="mod">
+          <ac:chgData name="Vanderlei Barbosa da Silva" userId="24e62a6a-a92d-4f90-9f09-efc0d92c1770" providerId="ADAL" clId="{26A2EC59-7300-4526-A9AE-3A4D8AA35A8E}" dt="2026-07-02T13:13:52.102" v="782" actId="1076"/>
+          <ac:spMkLst>
+            <pc:docMk/>
+            <pc:sldMk cId="0" sldId="364"/>
+            <ac:spMk id="9" creationId="{00000000-0000-0000-0000-000000000000}"/>
+          </ac:spMkLst>
+        </pc:spChg>
+      </pc:sldChg>
+      <pc:sldChg chg="modSp mod">
+        <pc:chgData name="Vanderlei Barbosa da Silva" userId="24e62a6a-a92d-4f90-9f09-efc0d92c1770" providerId="ADAL" clId="{26A2EC59-7300-4526-A9AE-3A4D8AA35A8E}" dt="2026-07-02T13:23:19.236" v="784" actId="6549"/>
+        <pc:sldMkLst>
+          <pc:docMk/>
+          <pc:sldMk cId="0" sldId="365"/>
+        </pc:sldMkLst>
+        <pc:spChg chg="mod">
+          <ac:chgData name="Vanderlei Barbosa da Silva" userId="24e62a6a-a92d-4f90-9f09-efc0d92c1770" providerId="ADAL" clId="{26A2EC59-7300-4526-A9AE-3A4D8AA35A8E}" dt="2026-07-02T13:23:19.236" v="784" actId="6549"/>
+          <ac:spMkLst>
+            <pc:docMk/>
+            <pc:sldMk cId="0" sldId="365"/>
+            <ac:spMk id="8" creationId="{00000000-0000-0000-0000-000000000000}"/>
+          </ac:spMkLst>
+        </pc:spChg>
       </pc:sldChg>
     </pc:docChg>
   </pc:docChgLst>
@@ -1291,7 +1027,7 @@
           <a:p>
             <a:fld id="{BDC85A01-7F43-DF4B-A56A-D56FBC29A924}" type="datetimeFigureOut">
               <a:rPr lang="pt-BR" smtClean="0"/>
-              <a:t>30/06/2026</a:t>
+              <a:t>02/07/2026</a:t>
             </a:fld>
             <a:endParaRPr lang="pt-BR"/>
           </a:p>
@@ -1586,6 +1322,13 @@
           </p:nvPr>
         </p:nvSpPr>
         <p:spPr/>
+        <p:txBody>
+          <a:bodyPr/>
+          <a:lstStyle/>
+          <a:p>
+            <a:endParaRPr lang="pt-BR"/>
+          </a:p>
+        </p:txBody>
       </p:sp>
       <p:sp>
         <p:nvSpPr>
@@ -1655,278 +1398,6 @@
 </file>
 
 <file path=ppt/notesSlides/notesSlide10.xml><?xml version="1.0" encoding="utf-8"?>
-<p:notes xmlns:a="http://schemas.openxmlformats.org/drawingml/2006/main" xmlns:r="http://schemas.openxmlformats.org/officeDocument/2006/relationships" xmlns:p="http://schemas.openxmlformats.org/presentationml/2006/main">
-  <p:cSld>
-    <p:spTree>
-      <p:nvGrpSpPr>
-        <p:cNvPr id="1" name="">
-          <a:extLst>
-            <a:ext uri="{FF2B5EF4-FFF2-40B4-BE49-F238E27FC236}">
-              <a16:creationId xmlns:a16="http://schemas.microsoft.com/office/drawing/2014/main" id="{283A14D8-7651-932E-621A-DBF0DF9B19EA}"/>
-            </a:ext>
-          </a:extLst>
-        </p:cNvPr>
-        <p:cNvGrpSpPr/>
-        <p:nvPr/>
-      </p:nvGrpSpPr>
-      <p:grpSpPr>
-        <a:xfrm>
-          <a:off x="0" y="0"/>
-          <a:ext cx="0" cy="0"/>
-          <a:chOff x="0" y="0"/>
-          <a:chExt cx="0" cy="0"/>
-        </a:xfrm>
-      </p:grpSpPr>
-      <p:sp>
-        <p:nvSpPr>
-          <p:cNvPr id="2" name="Espaço Reservado para Imagem de Slide 1">
-            <a:extLst>
-              <a:ext uri="{FF2B5EF4-FFF2-40B4-BE49-F238E27FC236}">
-                <a16:creationId xmlns:a16="http://schemas.microsoft.com/office/drawing/2014/main" id="{A632E9C4-259B-EF49-5C3F-5CCD8E0D2CE9}"/>
-              </a:ext>
-            </a:extLst>
-          </p:cNvPr>
-          <p:cNvSpPr>
-            <a:spLocks noGrp="1" noRot="1" noChangeAspect="1"/>
-          </p:cNvSpPr>
-          <p:nvPr>
-            <p:ph type="sldImg"/>
-          </p:nvPr>
-        </p:nvSpPr>
-        <p:spPr/>
-      </p:sp>
-      <p:sp>
-        <p:nvSpPr>
-          <p:cNvPr id="3" name="Espaço Reservado para Anotações 2">
-            <a:extLst>
-              <a:ext uri="{FF2B5EF4-FFF2-40B4-BE49-F238E27FC236}">
-                <a16:creationId xmlns:a16="http://schemas.microsoft.com/office/drawing/2014/main" id="{1DFF1A9C-0765-928F-4B5A-77691386FC67}"/>
-              </a:ext>
-            </a:extLst>
-          </p:cNvPr>
-          <p:cNvSpPr>
-            <a:spLocks noGrp="1"/>
-          </p:cNvSpPr>
-          <p:nvPr>
-            <p:ph type="body" idx="1"/>
-          </p:nvPr>
-        </p:nvSpPr>
-        <p:spPr/>
-        <p:txBody>
-          <a:bodyPr/>
-          <a:lstStyle/>
-          <a:p>
-            <a:pPr marL="0" marR="0" lvl="0" indent="0" algn="l" defTabSz="914400" rtl="0" eaLnBrk="1" fontAlgn="auto" latinLnBrk="0" hangingPunct="1">
-              <a:lnSpc>
-                <a:spcPct val="100000"/>
-              </a:lnSpc>
-              <a:spcBef>
-                <a:spcPts val="0"/>
-              </a:spcBef>
-              <a:spcAft>
-                <a:spcPts val="0"/>
-              </a:spcAft>
-              <a:buClrTx/>
-              <a:buSzTx/>
-              <a:buFontTx/>
-              <a:buNone/>
-              <a:tabLst/>
-              <a:defRPr/>
-            </a:pPr>
-            <a:r>
-              <a:rPr lang="pt-BR" sz="1200" b="0" i="1" kern="1200" dirty="0">
-                <a:solidFill>
-                  <a:schemeClr val="tx1"/>
-                </a:solidFill>
-                <a:effectLst/>
-                <a:latin typeface="+mn-lt"/>
-                <a:ea typeface="+mn-ea"/>
-                <a:cs typeface="+mn-cs"/>
-              </a:rPr>
-              <a:t>Preenchemos a lacuna ao abandonar as médias do IBOVESPA para focar cirurgicamente na PETR4, criando um ecossistema de Data Fusion que o estado da arte ainda não havia unificado no Brasil."</a:t>
-            </a:r>
-          </a:p>
-          <a:p>
-            <a:pPr marL="0" marR="0" lvl="0" indent="0" algn="l" defTabSz="914400" rtl="0" eaLnBrk="1" fontAlgn="auto" latinLnBrk="0" hangingPunct="1">
-              <a:lnSpc>
-                <a:spcPct val="100000"/>
-              </a:lnSpc>
-              <a:spcBef>
-                <a:spcPts val="0"/>
-              </a:spcBef>
-              <a:spcAft>
-                <a:spcPts val="0"/>
-              </a:spcAft>
-              <a:buClrTx/>
-              <a:buSzTx/>
-              <a:buFontTx/>
-              <a:buNone/>
-              <a:tabLst/>
-              <a:defRPr/>
-            </a:pPr>
-            <a:endParaRPr lang="pt-BR" sz="1200" b="0" i="1" kern="1200" dirty="0">
-              <a:solidFill>
-                <a:schemeClr val="tx1"/>
-              </a:solidFill>
-              <a:effectLst/>
-              <a:latin typeface="+mn-lt"/>
-              <a:ea typeface="+mn-ea"/>
-              <a:cs typeface="+mn-cs"/>
-            </a:endParaRPr>
-          </a:p>
-        </p:txBody>
-      </p:sp>
-      <p:sp>
-        <p:nvSpPr>
-          <p:cNvPr id="4" name="Espaço Reservado para Número de Slide 3">
-            <a:extLst>
-              <a:ext uri="{FF2B5EF4-FFF2-40B4-BE49-F238E27FC236}">
-                <a16:creationId xmlns:a16="http://schemas.microsoft.com/office/drawing/2014/main" id="{88722551-488B-934B-354B-78D61CE993CC}"/>
-              </a:ext>
-            </a:extLst>
-          </p:cNvPr>
-          <p:cNvSpPr>
-            <a:spLocks noGrp="1"/>
-          </p:cNvSpPr>
-          <p:nvPr>
-            <p:ph type="sldNum" sz="quarter" idx="5"/>
-          </p:nvPr>
-        </p:nvSpPr>
-        <p:spPr/>
-        <p:txBody>
-          <a:bodyPr/>
-          <a:lstStyle/>
-          <a:p>
-            <a:fld id="{C5973500-FE24-774E-8932-3833A078E141}" type="slidenum">
-              <a:rPr lang="pt-BR" smtClean="0"/>
-              <a:t>16</a:t>
-            </a:fld>
-            <a:endParaRPr lang="pt-BR"/>
-          </a:p>
-        </p:txBody>
-      </p:sp>
-    </p:spTree>
-    <p:extLst>
-      <p:ext uri="{BB962C8B-B14F-4D97-AF65-F5344CB8AC3E}">
-        <p14:creationId xmlns:p14="http://schemas.microsoft.com/office/powerpoint/2010/main" val="627361416"/>
-      </p:ext>
-    </p:extLst>
-  </p:cSld>
-  <p:clrMapOvr>
-    <a:masterClrMapping/>
-  </p:clrMapOvr>
-</p:notes>
-</file>
-
-<file path=ppt/notesSlides/notesSlide11.xml><?xml version="1.0" encoding="utf-8"?>
-<p:notes xmlns:a="http://schemas.openxmlformats.org/drawingml/2006/main" xmlns:r="http://schemas.openxmlformats.org/officeDocument/2006/relationships" xmlns:p="http://schemas.openxmlformats.org/presentationml/2006/main">
-  <p:cSld>
-    <p:spTree>
-      <p:nvGrpSpPr>
-        <p:cNvPr id="1" name="">
-          <a:extLst>
-            <a:ext uri="{FF2B5EF4-FFF2-40B4-BE49-F238E27FC236}">
-              <a16:creationId xmlns:a16="http://schemas.microsoft.com/office/drawing/2014/main" id="{A6FEBBA8-95FE-7190-8C19-4BBE90E25481}"/>
-            </a:ext>
-          </a:extLst>
-        </p:cNvPr>
-        <p:cNvGrpSpPr/>
-        <p:nvPr/>
-      </p:nvGrpSpPr>
-      <p:grpSpPr>
-        <a:xfrm>
-          <a:off x="0" y="0"/>
-          <a:ext cx="0" cy="0"/>
-          <a:chOff x="0" y="0"/>
-          <a:chExt cx="0" cy="0"/>
-        </a:xfrm>
-      </p:grpSpPr>
-      <p:sp>
-        <p:nvSpPr>
-          <p:cNvPr id="2" name="Espaço Reservado para Imagem de Slide 1">
-            <a:extLst>
-              <a:ext uri="{FF2B5EF4-FFF2-40B4-BE49-F238E27FC236}">
-                <a16:creationId xmlns:a16="http://schemas.microsoft.com/office/drawing/2014/main" id="{958BC06E-3A4A-BEF5-48D0-4B4E76CF6CCC}"/>
-              </a:ext>
-            </a:extLst>
-          </p:cNvPr>
-          <p:cNvSpPr>
-            <a:spLocks noGrp="1" noRot="1" noChangeAspect="1"/>
-          </p:cNvSpPr>
-          <p:nvPr>
-            <p:ph type="sldImg"/>
-          </p:nvPr>
-        </p:nvSpPr>
-        <p:spPr/>
-      </p:sp>
-      <p:sp>
-        <p:nvSpPr>
-          <p:cNvPr id="3" name="Espaço Reservado para Anotações 2">
-            <a:extLst>
-              <a:ext uri="{FF2B5EF4-FFF2-40B4-BE49-F238E27FC236}">
-                <a16:creationId xmlns:a16="http://schemas.microsoft.com/office/drawing/2014/main" id="{9DB0496B-5902-9EDB-7363-5FE9DDFFDE6D}"/>
-              </a:ext>
-            </a:extLst>
-          </p:cNvPr>
-          <p:cNvSpPr>
-            <a:spLocks noGrp="1"/>
-          </p:cNvSpPr>
-          <p:nvPr>
-            <p:ph type="body" idx="1"/>
-          </p:nvPr>
-        </p:nvSpPr>
-        <p:spPr/>
-        <p:txBody>
-          <a:bodyPr/>
-          <a:lstStyle/>
-          <a:p>
-            <a:endParaRPr lang="pt-BR" dirty="0"/>
-          </a:p>
-        </p:txBody>
-      </p:sp>
-      <p:sp>
-        <p:nvSpPr>
-          <p:cNvPr id="4" name="Espaço Reservado para Número de Slide 3">
-            <a:extLst>
-              <a:ext uri="{FF2B5EF4-FFF2-40B4-BE49-F238E27FC236}">
-                <a16:creationId xmlns:a16="http://schemas.microsoft.com/office/drawing/2014/main" id="{B3D8B64F-81E2-B051-549F-782FC943E298}"/>
-              </a:ext>
-            </a:extLst>
-          </p:cNvPr>
-          <p:cNvSpPr>
-            <a:spLocks noGrp="1"/>
-          </p:cNvSpPr>
-          <p:nvPr>
-            <p:ph type="sldNum" sz="quarter" idx="5"/>
-          </p:nvPr>
-        </p:nvSpPr>
-        <p:spPr/>
-        <p:txBody>
-          <a:bodyPr/>
-          <a:lstStyle/>
-          <a:p>
-            <a:fld id="{C5973500-FE24-774E-8932-3833A078E141}" type="slidenum">
-              <a:rPr lang="pt-BR" smtClean="0"/>
-              <a:t>17</a:t>
-            </a:fld>
-            <a:endParaRPr lang="pt-BR"/>
-          </a:p>
-        </p:txBody>
-      </p:sp>
-    </p:spTree>
-    <p:extLst>
-      <p:ext uri="{BB962C8B-B14F-4D97-AF65-F5344CB8AC3E}">
-        <p14:creationId xmlns:p14="http://schemas.microsoft.com/office/powerpoint/2010/main" val="648879002"/>
-      </p:ext>
-    </p:extLst>
-  </p:cSld>
-  <p:clrMapOvr>
-    <a:masterClrMapping/>
-  </p:clrMapOvr>
-</p:notes>
-</file>
-
-<file path=ppt/notesSlides/notesSlide12.xml><?xml version="1.0" encoding="utf-8"?>
 <p:notes xmlns:a="http://schemas.openxmlformats.org/drawingml/2006/main" xmlns:r="http://schemas.openxmlformats.org/officeDocument/2006/relationships" xmlns:p="http://schemas.openxmlformats.org/presentationml/2006/main">
   <p:cSld>
     <p:spTree>
@@ -1966,6 +1437,13 @@
           </p:nvPr>
         </p:nvSpPr>
         <p:spPr/>
+        <p:txBody>
+          <a:bodyPr/>
+          <a:lstStyle/>
+          <a:p>
+            <a:endParaRPr lang="pt-BR"/>
+          </a:p>
+        </p:txBody>
       </p:sp>
       <p:sp>
         <p:nvSpPr>
@@ -2015,7 +1493,7 @@
           <a:p>
             <a:fld id="{C5973500-FE24-774E-8932-3833A078E141}" type="slidenum">
               <a:rPr lang="pt-BR" smtClean="0"/>
-              <a:t>18</a:t>
+              <a:t>17</a:t>
             </a:fld>
             <a:endParaRPr lang="pt-BR"/>
           </a:p>
@@ -2034,7 +1512,7 @@
 </p:notes>
 </file>
 
-<file path=ppt/notesSlides/notesSlide13.xml><?xml version="1.0" encoding="utf-8"?>
+<file path=ppt/notesSlides/notesSlide11.xml><?xml version="1.0" encoding="utf-8"?>
 <p:notes xmlns:a="http://schemas.openxmlformats.org/drawingml/2006/main" xmlns:r="http://schemas.openxmlformats.org/officeDocument/2006/relationships" xmlns:p="http://schemas.openxmlformats.org/presentationml/2006/main">
   <p:cSld>
     <p:spTree>
@@ -2074,6 +1552,13 @@
           </p:nvPr>
         </p:nvSpPr>
         <p:spPr/>
+        <p:txBody>
+          <a:bodyPr/>
+          <a:lstStyle/>
+          <a:p>
+            <a:endParaRPr lang="pt-BR"/>
+          </a:p>
+        </p:txBody>
       </p:sp>
       <p:sp>
         <p:nvSpPr>
@@ -2123,7 +1608,7 @@
           <a:p>
             <a:fld id="{C5973500-FE24-774E-8932-3833A078E141}" type="slidenum">
               <a:rPr lang="pt-BR" smtClean="0"/>
-              <a:t>19</a:t>
+              <a:t>18</a:t>
             </a:fld>
             <a:endParaRPr lang="pt-BR"/>
           </a:p>
@@ -2133,6 +1618,225 @@
     <p:extLst>
       <p:ext uri="{BB962C8B-B14F-4D97-AF65-F5344CB8AC3E}">
         <p14:creationId xmlns:p14="http://schemas.microsoft.com/office/powerpoint/2010/main" val="979201101"/>
+      </p:ext>
+    </p:extLst>
+  </p:cSld>
+  <p:clrMapOvr>
+    <a:masterClrMapping/>
+  </p:clrMapOvr>
+</p:notes>
+</file>
+
+<file path=ppt/notesSlides/notesSlide12.xml><?xml version="1.0" encoding="utf-8"?>
+<p:notes xmlns:a="http://schemas.openxmlformats.org/drawingml/2006/main" xmlns:r="http://schemas.openxmlformats.org/officeDocument/2006/relationships" xmlns:p="http://schemas.openxmlformats.org/presentationml/2006/main">
+  <p:cSld>
+    <p:spTree>
+      <p:nvGrpSpPr>
+        <p:cNvPr id="1" name=""/>
+        <p:cNvGrpSpPr/>
+        <p:nvPr/>
+      </p:nvGrpSpPr>
+      <p:grpSpPr>
+        <a:xfrm>
+          <a:off x="0" y="0"/>
+          <a:ext cx="0" cy="0"/>
+          <a:chOff x="0" y="0"/>
+          <a:chExt cx="0" cy="0"/>
+        </a:xfrm>
+      </p:grpSpPr>
+      <p:sp>
+        <p:nvSpPr>
+          <p:cNvPr id="2" name="Espaço Reservado para Imagem de Slide 1"/>
+          <p:cNvSpPr>
+            <a:spLocks noGrp="1" noRot="1" noChangeAspect="1"/>
+          </p:cNvSpPr>
+          <p:nvPr>
+            <p:ph type="sldImg"/>
+          </p:nvPr>
+        </p:nvSpPr>
+        <p:spPr/>
+        <p:txBody>
+          <a:bodyPr/>
+          <a:lstStyle/>
+          <a:p>
+            <a:endParaRPr lang="pt-BR"/>
+          </a:p>
+        </p:txBody>
+      </p:sp>
+      <p:sp>
+        <p:nvSpPr>
+          <p:cNvPr id="3" name="Espaço Reservado para Anotações 2"/>
+          <p:cNvSpPr>
+            <a:spLocks noGrp="1"/>
+          </p:cNvSpPr>
+          <p:nvPr>
+            <p:ph type="body" idx="1"/>
+          </p:nvPr>
+        </p:nvSpPr>
+        <p:spPr/>
+        <p:txBody>
+          <a:bodyPr/>
+          <a:lstStyle/>
+          <a:p>
+            <a:r>
+              <a:rPr lang="pt-BR" sz="1200" b="0" i="1" kern="1200" dirty="0">
+                <a:solidFill>
+                  <a:schemeClr val="tx1"/>
+                </a:solidFill>
+                <a:effectLst/>
+                <a:latin typeface="+mn-lt"/>
+                <a:ea typeface="+mn-ea"/>
+                <a:cs typeface="+mn-cs"/>
+              </a:rPr>
+              <a:t>Professores, apresento agora o diagrama da nossa Arquitetura de Data Fusion, que é o verdadeiro motor desta dissertação. </a:t>
+            </a:r>
+          </a:p>
+          <a:p>
+            <a:endParaRPr lang="pt-BR" sz="1200" b="0" i="1" kern="1200" dirty="0">
+              <a:solidFill>
+                <a:schemeClr val="tx1"/>
+              </a:solidFill>
+              <a:effectLst/>
+              <a:latin typeface="+mn-lt"/>
+              <a:ea typeface="+mn-ea"/>
+              <a:cs typeface="+mn-cs"/>
+            </a:endParaRPr>
+          </a:p>
+          <a:p>
+            <a:r>
+              <a:rPr lang="pt-BR" sz="1200" b="0" i="1" kern="1200" dirty="0">
+                <a:solidFill>
+                  <a:schemeClr val="tx1"/>
+                </a:solidFill>
+                <a:effectLst/>
+                <a:latin typeface="+mn-lt"/>
+                <a:ea typeface="+mn-ea"/>
+                <a:cs typeface="+mn-cs"/>
+              </a:rPr>
+              <a:t>O nosso objetivo foi construir um pipeline computacional capaz de ingerir dados caóticos, purificá-los e prever a direção da PETR4. Nós dividimos essa arquitetura em passos lógicos, e vou explicar o porquê de cada escolha tecnológica que fizemos.</a:t>
+            </a:r>
+            <a:endParaRPr lang="pt-BR" dirty="0"/>
+          </a:p>
+        </p:txBody>
+      </p:sp>
+      <p:sp>
+        <p:nvSpPr>
+          <p:cNvPr id="4" name="Espaço Reservado para Número de Slide 3"/>
+          <p:cNvSpPr>
+            <a:spLocks noGrp="1"/>
+          </p:cNvSpPr>
+          <p:nvPr>
+            <p:ph type="sldNum" sz="quarter" idx="5"/>
+          </p:nvPr>
+        </p:nvSpPr>
+        <p:spPr/>
+        <p:txBody>
+          <a:bodyPr/>
+          <a:lstStyle/>
+          <a:p>
+            <a:fld id="{C5973500-FE24-774E-8932-3833A078E141}" type="slidenum">
+              <a:rPr lang="pt-BR" smtClean="0"/>
+              <a:t>19</a:t>
+            </a:fld>
+            <a:endParaRPr lang="pt-BR"/>
+          </a:p>
+        </p:txBody>
+      </p:sp>
+    </p:spTree>
+    <p:extLst>
+      <p:ext uri="{BB962C8B-B14F-4D97-AF65-F5344CB8AC3E}">
+        <p14:creationId xmlns:p14="http://schemas.microsoft.com/office/powerpoint/2010/main" val="2252897071"/>
+      </p:ext>
+    </p:extLst>
+  </p:cSld>
+  <p:clrMapOvr>
+    <a:masterClrMapping/>
+  </p:clrMapOvr>
+</p:notes>
+</file>
+
+<file path=ppt/notesSlides/notesSlide13.xml><?xml version="1.0" encoding="utf-8"?>
+<p:notes xmlns:a="http://schemas.openxmlformats.org/drawingml/2006/main" xmlns:r="http://schemas.openxmlformats.org/officeDocument/2006/relationships" xmlns:p="http://schemas.openxmlformats.org/presentationml/2006/main">
+  <p:cSld>
+    <p:spTree>
+      <p:nvGrpSpPr>
+        <p:cNvPr id="1" name=""/>
+        <p:cNvGrpSpPr/>
+        <p:nvPr/>
+      </p:nvGrpSpPr>
+      <p:grpSpPr>
+        <a:xfrm>
+          <a:off x="0" y="0"/>
+          <a:ext cx="0" cy="0"/>
+          <a:chOff x="0" y="0"/>
+          <a:chExt cx="0" cy="0"/>
+        </a:xfrm>
+      </p:grpSpPr>
+      <p:sp>
+        <p:nvSpPr>
+          <p:cNvPr id="2" name="Espaço Reservado para Imagem de Slide 1"/>
+          <p:cNvSpPr>
+            <a:spLocks noGrp="1" noRot="1" noChangeAspect="1"/>
+          </p:cNvSpPr>
+          <p:nvPr>
+            <p:ph type="sldImg"/>
+          </p:nvPr>
+        </p:nvSpPr>
+        <p:spPr/>
+        <p:txBody>
+          <a:bodyPr/>
+          <a:lstStyle/>
+          <a:p>
+            <a:endParaRPr lang="pt-BR"/>
+          </a:p>
+        </p:txBody>
+      </p:sp>
+      <p:sp>
+        <p:nvSpPr>
+          <p:cNvPr id="3" name="Espaço Reservado para Anotações 2"/>
+          <p:cNvSpPr>
+            <a:spLocks noGrp="1"/>
+          </p:cNvSpPr>
+          <p:nvPr>
+            <p:ph type="body" idx="1"/>
+          </p:nvPr>
+        </p:nvSpPr>
+        <p:spPr/>
+        <p:txBody>
+          <a:bodyPr/>
+          <a:lstStyle/>
+          <a:p>
+            <a:endParaRPr lang="pt-BR" dirty="0"/>
+          </a:p>
+        </p:txBody>
+      </p:sp>
+      <p:sp>
+        <p:nvSpPr>
+          <p:cNvPr id="4" name="Espaço Reservado para Número de Slide 3"/>
+          <p:cNvSpPr>
+            <a:spLocks noGrp="1"/>
+          </p:cNvSpPr>
+          <p:nvPr>
+            <p:ph type="sldNum" sz="quarter" idx="5"/>
+          </p:nvPr>
+        </p:nvSpPr>
+        <p:spPr/>
+        <p:txBody>
+          <a:bodyPr/>
+          <a:lstStyle/>
+          <a:p>
+            <a:fld id="{C5973500-FE24-774E-8932-3833A078E141}" type="slidenum">
+              <a:rPr lang="pt-BR" smtClean="0"/>
+              <a:t>20</a:t>
+            </a:fld>
+            <a:endParaRPr lang="pt-BR"/>
+          </a:p>
+        </p:txBody>
+      </p:sp>
+    </p:spTree>
+    <p:extLst>
+      <p:ext uri="{BB962C8B-B14F-4D97-AF65-F5344CB8AC3E}">
+        <p14:creationId xmlns:p14="http://schemas.microsoft.com/office/powerpoint/2010/main" val="1356805155"/>
       </p:ext>
     </p:extLst>
   </p:cSld>
@@ -2170,6 +1874,13 @@
           </p:nvPr>
         </p:nvSpPr>
         <p:spPr/>
+        <p:txBody>
+          <a:bodyPr/>
+          <a:lstStyle/>
+          <a:p>
+            <a:endParaRPr lang="pt-BR"/>
+          </a:p>
+        </p:txBody>
       </p:sp>
       <p:sp>
         <p:nvSpPr>
@@ -2186,43 +1897,6 @@
           <a:bodyPr/>
           <a:lstStyle/>
           <a:p>
-            <a:r>
-              <a:rPr lang="pt-BR" sz="1200" b="0" i="1" kern="1200" dirty="0">
-                <a:solidFill>
-                  <a:schemeClr val="tx1"/>
-                </a:solidFill>
-                <a:effectLst/>
-                <a:latin typeface="+mn-lt"/>
-                <a:ea typeface="+mn-ea"/>
-                <a:cs typeface="+mn-cs"/>
-              </a:rPr>
-              <a:t>Professores, apresento agora o diagrama da nossa Arquitetura de Data Fusion, que é o verdadeiro motor desta dissertação. </a:t>
-            </a:r>
-          </a:p>
-          <a:p>
-            <a:endParaRPr lang="pt-BR" sz="1200" b="0" i="1" kern="1200" dirty="0">
-              <a:solidFill>
-                <a:schemeClr val="tx1"/>
-              </a:solidFill>
-              <a:effectLst/>
-              <a:latin typeface="+mn-lt"/>
-              <a:ea typeface="+mn-ea"/>
-              <a:cs typeface="+mn-cs"/>
-            </a:endParaRPr>
-          </a:p>
-          <a:p>
-            <a:r>
-              <a:rPr lang="pt-BR" sz="1200" b="0" i="1" kern="1200" dirty="0">
-                <a:solidFill>
-                  <a:schemeClr val="tx1"/>
-                </a:solidFill>
-                <a:effectLst/>
-                <a:latin typeface="+mn-lt"/>
-                <a:ea typeface="+mn-ea"/>
-                <a:cs typeface="+mn-cs"/>
-              </a:rPr>
-              <a:t>O nosso objetivo foi construir um pipeline computacional capaz de ingerir dados caóticos, purificá-los e prever a direção da PETR4. Nós dividimos essa arquitetura em passos lógicos, e vou explicar o porquê de cada escolha tecnológica que fizemos.</a:t>
-            </a:r>
             <a:endParaRPr lang="pt-BR" dirty="0"/>
           </a:p>
         </p:txBody>
@@ -2244,7 +1918,7 @@
           <a:p>
             <a:fld id="{C5973500-FE24-774E-8932-3833A078E141}" type="slidenum">
               <a:rPr lang="pt-BR" smtClean="0"/>
-              <a:t>20</a:t>
+              <a:t>22</a:t>
             </a:fld>
             <a:endParaRPr lang="pt-BR"/>
           </a:p>
@@ -2253,7 +1927,7 @@
     </p:spTree>
     <p:extLst>
       <p:ext uri="{BB962C8B-B14F-4D97-AF65-F5344CB8AC3E}">
-        <p14:creationId xmlns:p14="http://schemas.microsoft.com/office/powerpoint/2010/main" val="2252897071"/>
+        <p14:creationId xmlns:p14="http://schemas.microsoft.com/office/powerpoint/2010/main" val="3176151059"/>
       </p:ext>
     </p:extLst>
   </p:cSld>
@@ -2291,6 +1965,13 @@
           </p:nvPr>
         </p:nvSpPr>
         <p:spPr/>
+        <p:txBody>
+          <a:bodyPr/>
+          <a:lstStyle/>
+          <a:p>
+            <a:endParaRPr lang="pt-BR"/>
+          </a:p>
+        </p:txBody>
       </p:sp>
       <p:sp>
         <p:nvSpPr>
@@ -2385,6 +2066,97 @@
 </file>
 
 <file path=ppt/notesSlides/notesSlide16.xml><?xml version="1.0" encoding="utf-8"?>
+<p:notes xmlns:a="http://schemas.openxmlformats.org/drawingml/2006/main" xmlns:r="http://schemas.openxmlformats.org/officeDocument/2006/relationships" xmlns:p="http://schemas.openxmlformats.org/presentationml/2006/main">
+  <p:cSld>
+    <p:spTree>
+      <p:nvGrpSpPr>
+        <p:cNvPr id="1" name=""/>
+        <p:cNvGrpSpPr/>
+        <p:nvPr/>
+      </p:nvGrpSpPr>
+      <p:grpSpPr>
+        <a:xfrm>
+          <a:off x="0" y="0"/>
+          <a:ext cx="0" cy="0"/>
+          <a:chOff x="0" y="0"/>
+          <a:chExt cx="0" cy="0"/>
+        </a:xfrm>
+      </p:grpSpPr>
+      <p:sp>
+        <p:nvSpPr>
+          <p:cNvPr id="2" name="Espaço Reservado para Imagem de Slide 1"/>
+          <p:cNvSpPr>
+            <a:spLocks noGrp="1" noRot="1" noChangeAspect="1"/>
+          </p:cNvSpPr>
+          <p:nvPr>
+            <p:ph type="sldImg"/>
+          </p:nvPr>
+        </p:nvSpPr>
+        <p:spPr/>
+        <p:txBody>
+          <a:bodyPr/>
+          <a:lstStyle/>
+          <a:p>
+            <a:endParaRPr lang="pt-BR" dirty="0"/>
+          </a:p>
+        </p:txBody>
+      </p:sp>
+      <p:sp>
+        <p:nvSpPr>
+          <p:cNvPr id="3" name="Espaço Reservado para Anotações 2"/>
+          <p:cNvSpPr>
+            <a:spLocks noGrp="1"/>
+          </p:cNvSpPr>
+          <p:nvPr>
+            <p:ph type="body" idx="1"/>
+          </p:nvPr>
+        </p:nvSpPr>
+        <p:spPr/>
+        <p:txBody>
+          <a:bodyPr/>
+          <a:lstStyle/>
+          <a:p>
+            <a:endParaRPr lang="pt-BR" dirty="0"/>
+          </a:p>
+        </p:txBody>
+      </p:sp>
+      <p:sp>
+        <p:nvSpPr>
+          <p:cNvPr id="4" name="Espaço Reservado para Número de Slide 3"/>
+          <p:cNvSpPr>
+            <a:spLocks noGrp="1"/>
+          </p:cNvSpPr>
+          <p:nvPr>
+            <p:ph type="sldNum" sz="quarter" idx="5"/>
+          </p:nvPr>
+        </p:nvSpPr>
+        <p:spPr/>
+        <p:txBody>
+          <a:bodyPr/>
+          <a:lstStyle/>
+          <a:p>
+            <a:fld id="{C5973500-FE24-774E-8932-3833A078E141}" type="slidenum">
+              <a:rPr lang="pt-BR" smtClean="0"/>
+              <a:t>28</a:t>
+            </a:fld>
+            <a:endParaRPr lang="pt-BR" dirty="0"/>
+          </a:p>
+        </p:txBody>
+      </p:sp>
+    </p:spTree>
+    <p:extLst>
+      <p:ext uri="{BB962C8B-B14F-4D97-AF65-F5344CB8AC3E}">
+        <p14:creationId xmlns:p14="http://schemas.microsoft.com/office/powerpoint/2010/main" val="1303691216"/>
+      </p:ext>
+    </p:extLst>
+  </p:cSld>
+  <p:clrMapOvr>
+    <a:masterClrMapping/>
+  </p:clrMapOvr>
+</p:notes>
+</file>
+
+<file path=ppt/notesSlides/notesSlide17.xml><?xml version="1.0" encoding="utf-8"?>
 <p:notes xmlns:a="http://schemas.openxmlformats.org/drawingml/2006/main" xmlns:r="http://schemas.openxmlformats.org/officeDocument/2006/relationships" xmlns:p="http://schemas.openxmlformats.org/presentationml/2006/main">
   <p:cSld>
     <p:spTree>
@@ -2424,6 +2196,13 @@
           </p:nvPr>
         </p:nvSpPr>
         <p:spPr/>
+        <p:txBody>
+          <a:bodyPr/>
+          <a:lstStyle/>
+          <a:p>
+            <a:endParaRPr lang="pt-BR" dirty="0"/>
+          </a:p>
+        </p:txBody>
       </p:sp>
       <p:sp>
         <p:nvSpPr>
@@ -2643,9 +2422,9 @@
           <a:p>
             <a:fld id="{C5973500-FE24-774E-8932-3833A078E141}" type="slidenum">
               <a:rPr lang="pt-BR" smtClean="0"/>
-              <a:t>26</a:t>
+              <a:t>30</a:t>
             </a:fld>
-            <a:endParaRPr lang="pt-BR"/>
+            <a:endParaRPr lang="pt-BR" dirty="0"/>
           </a:p>
         </p:txBody>
       </p:sp>
@@ -2662,7 +2441,98 @@
 </p:notes>
 </file>
 
-<file path=ppt/notesSlides/notesSlide17.xml><?xml version="1.0" encoding="utf-8"?>
+<file path=ppt/notesSlides/notesSlide18.xml><?xml version="1.0" encoding="utf-8"?>
+<p:notes xmlns:a="http://schemas.openxmlformats.org/drawingml/2006/main" xmlns:r="http://schemas.openxmlformats.org/officeDocument/2006/relationships" xmlns:p="http://schemas.openxmlformats.org/presentationml/2006/main">
+  <p:cSld>
+    <p:spTree>
+      <p:nvGrpSpPr>
+        <p:cNvPr id="1" name=""/>
+        <p:cNvGrpSpPr/>
+        <p:nvPr/>
+      </p:nvGrpSpPr>
+      <p:grpSpPr>
+        <a:xfrm>
+          <a:off x="0" y="0"/>
+          <a:ext cx="0" cy="0"/>
+          <a:chOff x="0" y="0"/>
+          <a:chExt cx="0" cy="0"/>
+        </a:xfrm>
+      </p:grpSpPr>
+      <p:sp>
+        <p:nvSpPr>
+          <p:cNvPr id="2" name="Espaço Reservado para Imagem de Slide 1"/>
+          <p:cNvSpPr>
+            <a:spLocks noGrp="1" noRot="1" noChangeAspect="1"/>
+          </p:cNvSpPr>
+          <p:nvPr>
+            <p:ph type="sldImg"/>
+          </p:nvPr>
+        </p:nvSpPr>
+        <p:spPr/>
+        <p:txBody>
+          <a:bodyPr/>
+          <a:lstStyle/>
+          <a:p>
+            <a:endParaRPr lang="pt-BR"/>
+          </a:p>
+        </p:txBody>
+      </p:sp>
+      <p:sp>
+        <p:nvSpPr>
+          <p:cNvPr id="3" name="Espaço Reservado para Anotações 2"/>
+          <p:cNvSpPr>
+            <a:spLocks noGrp="1"/>
+          </p:cNvSpPr>
+          <p:nvPr>
+            <p:ph type="body" idx="1"/>
+          </p:nvPr>
+        </p:nvSpPr>
+        <p:spPr/>
+        <p:txBody>
+          <a:bodyPr/>
+          <a:lstStyle/>
+          <a:p>
+            <a:endParaRPr lang="pt-BR" dirty="0"/>
+          </a:p>
+        </p:txBody>
+      </p:sp>
+      <p:sp>
+        <p:nvSpPr>
+          <p:cNvPr id="4" name="Espaço Reservado para Número de Slide 3"/>
+          <p:cNvSpPr>
+            <a:spLocks noGrp="1"/>
+          </p:cNvSpPr>
+          <p:nvPr>
+            <p:ph type="sldNum" sz="quarter" idx="5"/>
+          </p:nvPr>
+        </p:nvSpPr>
+        <p:spPr/>
+        <p:txBody>
+          <a:bodyPr/>
+          <a:lstStyle/>
+          <a:p>
+            <a:fld id="{C5973500-FE24-774E-8932-3833A078E141}" type="slidenum">
+              <a:rPr lang="pt-BR" smtClean="0"/>
+              <a:t>31</a:t>
+            </a:fld>
+            <a:endParaRPr lang="pt-BR"/>
+          </a:p>
+        </p:txBody>
+      </p:sp>
+    </p:spTree>
+    <p:extLst>
+      <p:ext uri="{BB962C8B-B14F-4D97-AF65-F5344CB8AC3E}">
+        <p14:creationId xmlns:p14="http://schemas.microsoft.com/office/powerpoint/2010/main" val="518153247"/>
+      </p:ext>
+    </p:extLst>
+  </p:cSld>
+  <p:clrMapOvr>
+    <a:masterClrMapping/>
+  </p:clrMapOvr>
+</p:notes>
+</file>
+
+<file path=ppt/notesSlides/notesSlide19.xml><?xml version="1.0" encoding="utf-8"?>
 <p:notes xmlns:a="http://schemas.openxmlformats.org/drawingml/2006/main" xmlns:r="http://schemas.openxmlformats.org/officeDocument/2006/relationships" xmlns:p="http://schemas.openxmlformats.org/presentationml/2006/main">
   <p:cSld>
     <p:spTree>
@@ -2702,6 +2572,13 @@
           </p:nvPr>
         </p:nvSpPr>
         <p:spPr/>
+        <p:txBody>
+          <a:bodyPr/>
+          <a:lstStyle/>
+          <a:p>
+            <a:endParaRPr lang="pt-BR"/>
+          </a:p>
+        </p:txBody>
       </p:sp>
       <p:sp>
         <p:nvSpPr>
@@ -3084,7 +2961,7 @@
           <a:p>
             <a:fld id="{C5973500-FE24-774E-8932-3833A078E141}" type="slidenum">
               <a:rPr lang="pt-BR" smtClean="0"/>
-              <a:t>27</a:t>
+              <a:t>32</a:t>
             </a:fld>
             <a:endParaRPr lang="pt-BR"/>
           </a:p>
@@ -3094,290 +2971,6 @@
     <p:extLst>
       <p:ext uri="{BB962C8B-B14F-4D97-AF65-F5344CB8AC3E}">
         <p14:creationId xmlns:p14="http://schemas.microsoft.com/office/powerpoint/2010/main" val="39699683"/>
-      </p:ext>
-    </p:extLst>
-  </p:cSld>
-  <p:clrMapOvr>
-    <a:masterClrMapping/>
-  </p:clrMapOvr>
-</p:notes>
-</file>
-
-<file path=ppt/notesSlides/notesSlide18.xml><?xml version="1.0" encoding="utf-8"?>
-<p:notes xmlns:a="http://schemas.openxmlformats.org/drawingml/2006/main" xmlns:r="http://schemas.openxmlformats.org/officeDocument/2006/relationships" xmlns:p="http://schemas.openxmlformats.org/presentationml/2006/main">
-  <p:cSld>
-    <p:spTree>
-      <p:nvGrpSpPr>
-        <p:cNvPr id="1" name="">
-          <a:extLst>
-            <a:ext uri="{FF2B5EF4-FFF2-40B4-BE49-F238E27FC236}">
-              <a16:creationId xmlns:a16="http://schemas.microsoft.com/office/drawing/2014/main" id="{56CDC27F-9972-AE56-C47D-F986767CC86C}"/>
-            </a:ext>
-          </a:extLst>
-        </p:cNvPr>
-        <p:cNvGrpSpPr/>
-        <p:nvPr/>
-      </p:nvGrpSpPr>
-      <p:grpSpPr>
-        <a:xfrm>
-          <a:off x="0" y="0"/>
-          <a:ext cx="0" cy="0"/>
-          <a:chOff x="0" y="0"/>
-          <a:chExt cx="0" cy="0"/>
-        </a:xfrm>
-      </p:grpSpPr>
-      <p:sp>
-        <p:nvSpPr>
-          <p:cNvPr id="2" name="Espaço Reservado para Imagem de Slide 1">
-            <a:extLst>
-              <a:ext uri="{FF2B5EF4-FFF2-40B4-BE49-F238E27FC236}">
-                <a16:creationId xmlns:a16="http://schemas.microsoft.com/office/drawing/2014/main" id="{98F36F60-0217-7D7E-6696-F27B7D9AC37C}"/>
-              </a:ext>
-            </a:extLst>
-          </p:cNvPr>
-          <p:cNvSpPr>
-            <a:spLocks noGrp="1" noRot="1" noChangeAspect="1"/>
-          </p:cNvSpPr>
-          <p:nvPr>
-            <p:ph type="sldImg"/>
-          </p:nvPr>
-        </p:nvSpPr>
-        <p:spPr/>
-      </p:sp>
-      <p:sp>
-        <p:nvSpPr>
-          <p:cNvPr id="3" name="Espaço Reservado para Anotações 2">
-            <a:extLst>
-              <a:ext uri="{FF2B5EF4-FFF2-40B4-BE49-F238E27FC236}">
-                <a16:creationId xmlns:a16="http://schemas.microsoft.com/office/drawing/2014/main" id="{55E8BA4F-1444-6FC0-838F-C54F855E8542}"/>
-              </a:ext>
-            </a:extLst>
-          </p:cNvPr>
-          <p:cNvSpPr>
-            <a:spLocks noGrp="1"/>
-          </p:cNvSpPr>
-          <p:nvPr>
-            <p:ph type="body" idx="1"/>
-          </p:nvPr>
-        </p:nvSpPr>
-        <p:spPr/>
-        <p:txBody>
-          <a:bodyPr/>
-          <a:lstStyle/>
-          <a:p>
-            <a:r>
-              <a:rPr lang="pt-BR" sz="1200" b="1" i="0" kern="1200" dirty="0">
-                <a:solidFill>
-                  <a:schemeClr val="tx1"/>
-                </a:solidFill>
-                <a:effectLst/>
-                <a:latin typeface="+mn-lt"/>
-                <a:ea typeface="+mn-ea"/>
-                <a:cs typeface="+mn-cs"/>
-              </a:rPr>
-              <a:t>O que você vai falar:</a:t>
-            </a:r>
-            <a:r>
-              <a:rPr lang="pt-BR" sz="1200" b="0" i="0" kern="1200" dirty="0">
-                <a:solidFill>
-                  <a:schemeClr val="tx1"/>
-                </a:solidFill>
-                <a:effectLst/>
-                <a:latin typeface="+mn-lt"/>
-                <a:ea typeface="+mn-ea"/>
-                <a:cs typeface="+mn-cs"/>
-              </a:rPr>
-              <a:t> </a:t>
-            </a:r>
-            <a:r>
-              <a:rPr lang="pt-BR" sz="1200" b="0" i="1" kern="1200" dirty="0">
-                <a:solidFill>
-                  <a:schemeClr val="tx1"/>
-                </a:solidFill>
-                <a:effectLst/>
-                <a:latin typeface="+mn-lt"/>
-                <a:ea typeface="+mn-ea"/>
-                <a:cs typeface="+mn-cs"/>
-              </a:rPr>
-              <a:t>"Neste cronograma, já vencemos a extração bruta e a validação laboratorial (Qualificação). Os próximos meses até a defesa em março de 2027 serão focados no </a:t>
-            </a:r>
-            <a:r>
-              <a:rPr lang="pt-BR" sz="1200" b="0" i="1" kern="1200" dirty="0" err="1">
-                <a:solidFill>
-                  <a:schemeClr val="tx1"/>
-                </a:solidFill>
-                <a:effectLst/>
-                <a:latin typeface="+mn-lt"/>
-                <a:ea typeface="+mn-ea"/>
-                <a:cs typeface="+mn-cs"/>
-              </a:rPr>
-              <a:t>Tuning</a:t>
-            </a:r>
-            <a:r>
-              <a:rPr lang="pt-BR" sz="1200" b="0" i="1" kern="1200" dirty="0">
-                <a:solidFill>
-                  <a:schemeClr val="tx1"/>
-                </a:solidFill>
-                <a:effectLst/>
-                <a:latin typeface="+mn-lt"/>
-                <a:ea typeface="+mn-ea"/>
-                <a:cs typeface="+mn-cs"/>
-              </a:rPr>
-              <a:t> do </a:t>
-            </a:r>
-            <a:r>
-              <a:rPr lang="pt-BR" sz="1200" b="0" i="1" kern="1200" dirty="0" err="1">
-                <a:solidFill>
-                  <a:schemeClr val="tx1"/>
-                </a:solidFill>
-                <a:effectLst/>
-                <a:latin typeface="+mn-lt"/>
-                <a:ea typeface="+mn-ea"/>
-                <a:cs typeface="+mn-cs"/>
-              </a:rPr>
-              <a:t>XGBoost</a:t>
-            </a:r>
-            <a:r>
-              <a:rPr lang="pt-BR" sz="1200" b="0" i="1" kern="1200" dirty="0">
-                <a:solidFill>
-                  <a:schemeClr val="tx1"/>
-                </a:solidFill>
-                <a:effectLst/>
-                <a:latin typeface="+mn-lt"/>
-                <a:ea typeface="+mn-ea"/>
-                <a:cs typeface="+mn-cs"/>
-              </a:rPr>
-              <a:t> com a nova base temporal. O meu laboratório já está operacional e reproduzível. Muito obrigado pela atenção, devolvo a palavra ao meu orientador e à ilustre banca."</a:t>
-            </a:r>
-            <a:endParaRPr lang="pt-BR" sz="1200" b="0" i="0" kern="1200" dirty="0">
-              <a:solidFill>
-                <a:schemeClr val="tx1"/>
-              </a:solidFill>
-              <a:effectLst/>
-              <a:latin typeface="+mn-lt"/>
-              <a:ea typeface="+mn-ea"/>
-              <a:cs typeface="+mn-cs"/>
-            </a:endParaRPr>
-          </a:p>
-        </p:txBody>
-      </p:sp>
-      <p:sp>
-        <p:nvSpPr>
-          <p:cNvPr id="4" name="Espaço Reservado para Número de Slide 3">
-            <a:extLst>
-              <a:ext uri="{FF2B5EF4-FFF2-40B4-BE49-F238E27FC236}">
-                <a16:creationId xmlns:a16="http://schemas.microsoft.com/office/drawing/2014/main" id="{D629FF77-350C-956F-D493-AAB111D5081C}"/>
-              </a:ext>
-            </a:extLst>
-          </p:cNvPr>
-          <p:cNvSpPr>
-            <a:spLocks noGrp="1"/>
-          </p:cNvSpPr>
-          <p:nvPr>
-            <p:ph type="sldNum" sz="quarter" idx="5"/>
-          </p:nvPr>
-        </p:nvSpPr>
-        <p:spPr/>
-        <p:txBody>
-          <a:bodyPr/>
-          <a:lstStyle/>
-          <a:p>
-            <a:fld id="{C5973500-FE24-774E-8932-3833A078E141}" type="slidenum">
-              <a:rPr lang="pt-BR" smtClean="0"/>
-              <a:t>29</a:t>
-            </a:fld>
-            <a:endParaRPr lang="pt-BR"/>
-          </a:p>
-        </p:txBody>
-      </p:sp>
-    </p:spTree>
-    <p:extLst>
-      <p:ext uri="{BB962C8B-B14F-4D97-AF65-F5344CB8AC3E}">
-        <p14:creationId xmlns:p14="http://schemas.microsoft.com/office/powerpoint/2010/main" val="1680085259"/>
-      </p:ext>
-    </p:extLst>
-  </p:cSld>
-  <p:clrMapOvr>
-    <a:masterClrMapping/>
-  </p:clrMapOvr>
-</p:notes>
-</file>
-
-<file path=ppt/notesSlides/notesSlide19.xml><?xml version="1.0" encoding="utf-8"?>
-<p:notes xmlns:a="http://schemas.openxmlformats.org/drawingml/2006/main" xmlns:r="http://schemas.openxmlformats.org/officeDocument/2006/relationships" xmlns:p="http://schemas.openxmlformats.org/presentationml/2006/main">
-  <p:cSld>
-    <p:spTree>
-      <p:nvGrpSpPr>
-        <p:cNvPr id="1" name=""/>
-        <p:cNvGrpSpPr/>
-        <p:nvPr/>
-      </p:nvGrpSpPr>
-      <p:grpSpPr>
-        <a:xfrm>
-          <a:off x="0" y="0"/>
-          <a:ext cx="0" cy="0"/>
-          <a:chOff x="0" y="0"/>
-          <a:chExt cx="0" cy="0"/>
-        </a:xfrm>
-      </p:grpSpPr>
-      <p:sp>
-        <p:nvSpPr>
-          <p:cNvPr id="2" name="Espaço Reservado para Imagem de Slide 1"/>
-          <p:cNvSpPr>
-            <a:spLocks noGrp="1" noRot="1" noChangeAspect="1"/>
-          </p:cNvSpPr>
-          <p:nvPr>
-            <p:ph type="sldImg"/>
-          </p:nvPr>
-        </p:nvSpPr>
-        <p:spPr/>
-      </p:sp>
-      <p:sp>
-        <p:nvSpPr>
-          <p:cNvPr id="3" name="Espaço Reservado para Anotações 2"/>
-          <p:cNvSpPr>
-            <a:spLocks noGrp="1"/>
-          </p:cNvSpPr>
-          <p:nvPr>
-            <p:ph type="body" idx="1"/>
-          </p:nvPr>
-        </p:nvSpPr>
-        <p:spPr/>
-        <p:txBody>
-          <a:bodyPr/>
-          <a:lstStyle/>
-          <a:p>
-            <a:endParaRPr lang="pt-BR" dirty="0"/>
-          </a:p>
-        </p:txBody>
-      </p:sp>
-      <p:sp>
-        <p:nvSpPr>
-          <p:cNvPr id="4" name="Espaço Reservado para Número de Slide 3"/>
-          <p:cNvSpPr>
-            <a:spLocks noGrp="1"/>
-          </p:cNvSpPr>
-          <p:nvPr>
-            <p:ph type="sldNum" sz="quarter" idx="5"/>
-          </p:nvPr>
-        </p:nvSpPr>
-        <p:spPr/>
-        <p:txBody>
-          <a:bodyPr/>
-          <a:lstStyle/>
-          <a:p>
-            <a:fld id="{C5973500-FE24-774E-8932-3833A078E141}" type="slidenum">
-              <a:rPr lang="pt-BR" smtClean="0"/>
-              <a:t>31</a:t>
-            </a:fld>
-            <a:endParaRPr lang="pt-BR"/>
-          </a:p>
-        </p:txBody>
-      </p:sp>
-    </p:spTree>
-    <p:extLst>
-      <p:ext uri="{BB962C8B-B14F-4D97-AF65-F5344CB8AC3E}">
-        <p14:creationId xmlns:p14="http://schemas.microsoft.com/office/powerpoint/2010/main" val="1125769661"/>
       </p:ext>
     </p:extLst>
   </p:cSld>
@@ -3427,6 +3020,13 @@
           </p:nvPr>
         </p:nvSpPr>
         <p:spPr/>
+        <p:txBody>
+          <a:bodyPr/>
+          <a:lstStyle/>
+          <a:p>
+            <a:endParaRPr lang="pt-BR"/>
+          </a:p>
+        </p:txBody>
       </p:sp>
       <p:sp>
         <p:nvSpPr>
@@ -3834,6 +3434,398 @@
     <p:extLst>
       <p:ext uri="{BB962C8B-B14F-4D97-AF65-F5344CB8AC3E}">
         <p14:creationId xmlns:p14="http://schemas.microsoft.com/office/powerpoint/2010/main" val="3744606448"/>
+      </p:ext>
+    </p:extLst>
+  </p:cSld>
+  <p:clrMapOvr>
+    <a:masterClrMapping/>
+  </p:clrMapOvr>
+</p:notes>
+</file>
+
+<file path=ppt/notesSlides/notesSlide20.xml><?xml version="1.0" encoding="utf-8"?>
+<p:notes xmlns:a="http://schemas.openxmlformats.org/drawingml/2006/main" xmlns:r="http://schemas.openxmlformats.org/officeDocument/2006/relationships" xmlns:p="http://schemas.openxmlformats.org/presentationml/2006/main">
+  <p:cSld>
+    <p:spTree>
+      <p:nvGrpSpPr>
+        <p:cNvPr id="1" name="">
+          <a:extLst>
+            <a:ext uri="{FF2B5EF4-FFF2-40B4-BE49-F238E27FC236}">
+              <a16:creationId xmlns:a16="http://schemas.microsoft.com/office/drawing/2014/main" id="{56CDC27F-9972-AE56-C47D-F986767CC86C}"/>
+            </a:ext>
+          </a:extLst>
+        </p:cNvPr>
+        <p:cNvGrpSpPr/>
+        <p:nvPr/>
+      </p:nvGrpSpPr>
+      <p:grpSpPr>
+        <a:xfrm>
+          <a:off x="0" y="0"/>
+          <a:ext cx="0" cy="0"/>
+          <a:chOff x="0" y="0"/>
+          <a:chExt cx="0" cy="0"/>
+        </a:xfrm>
+      </p:grpSpPr>
+      <p:sp>
+        <p:nvSpPr>
+          <p:cNvPr id="2" name="Espaço Reservado para Imagem de Slide 1">
+            <a:extLst>
+              <a:ext uri="{FF2B5EF4-FFF2-40B4-BE49-F238E27FC236}">
+                <a16:creationId xmlns:a16="http://schemas.microsoft.com/office/drawing/2014/main" id="{98F36F60-0217-7D7E-6696-F27B7D9AC37C}"/>
+              </a:ext>
+            </a:extLst>
+          </p:cNvPr>
+          <p:cNvSpPr>
+            <a:spLocks noGrp="1" noRot="1" noChangeAspect="1"/>
+          </p:cNvSpPr>
+          <p:nvPr>
+            <p:ph type="sldImg"/>
+          </p:nvPr>
+        </p:nvSpPr>
+        <p:spPr/>
+        <p:txBody>
+          <a:bodyPr/>
+          <a:lstStyle/>
+          <a:p>
+            <a:endParaRPr lang="pt-BR"/>
+          </a:p>
+        </p:txBody>
+      </p:sp>
+      <p:sp>
+        <p:nvSpPr>
+          <p:cNvPr id="3" name="Espaço Reservado para Anotações 2">
+            <a:extLst>
+              <a:ext uri="{FF2B5EF4-FFF2-40B4-BE49-F238E27FC236}">
+                <a16:creationId xmlns:a16="http://schemas.microsoft.com/office/drawing/2014/main" id="{55E8BA4F-1444-6FC0-838F-C54F855E8542}"/>
+              </a:ext>
+            </a:extLst>
+          </p:cNvPr>
+          <p:cNvSpPr>
+            <a:spLocks noGrp="1"/>
+          </p:cNvSpPr>
+          <p:nvPr>
+            <p:ph type="body" idx="1"/>
+          </p:nvPr>
+        </p:nvSpPr>
+        <p:spPr/>
+        <p:txBody>
+          <a:bodyPr/>
+          <a:lstStyle/>
+          <a:p>
+            <a:r>
+              <a:rPr lang="pt-BR" sz="1200" b="1" i="0" kern="1200" dirty="0">
+                <a:solidFill>
+                  <a:schemeClr val="tx1"/>
+                </a:solidFill>
+                <a:effectLst/>
+                <a:latin typeface="+mn-lt"/>
+                <a:ea typeface="+mn-ea"/>
+                <a:cs typeface="+mn-cs"/>
+              </a:rPr>
+              <a:t>O que você vai falar:</a:t>
+            </a:r>
+            <a:r>
+              <a:rPr lang="pt-BR" sz="1200" b="0" i="0" kern="1200" dirty="0">
+                <a:solidFill>
+                  <a:schemeClr val="tx1"/>
+                </a:solidFill>
+                <a:effectLst/>
+                <a:latin typeface="+mn-lt"/>
+                <a:ea typeface="+mn-ea"/>
+                <a:cs typeface="+mn-cs"/>
+              </a:rPr>
+              <a:t> </a:t>
+            </a:r>
+            <a:r>
+              <a:rPr lang="pt-BR" sz="1200" b="0" i="1" kern="1200" dirty="0">
+                <a:solidFill>
+                  <a:schemeClr val="tx1"/>
+                </a:solidFill>
+                <a:effectLst/>
+                <a:latin typeface="+mn-lt"/>
+                <a:ea typeface="+mn-ea"/>
+                <a:cs typeface="+mn-cs"/>
+              </a:rPr>
+              <a:t>"Neste cronograma, já vencemos a extração bruta e a validação laboratorial (Qualificação). Os próximos meses até a defesa em março de 2027 serão focados no </a:t>
+            </a:r>
+            <a:r>
+              <a:rPr lang="pt-BR" sz="1200" b="0" i="1" kern="1200" dirty="0" err="1">
+                <a:solidFill>
+                  <a:schemeClr val="tx1"/>
+                </a:solidFill>
+                <a:effectLst/>
+                <a:latin typeface="+mn-lt"/>
+                <a:ea typeface="+mn-ea"/>
+                <a:cs typeface="+mn-cs"/>
+              </a:rPr>
+              <a:t>Tuning</a:t>
+            </a:r>
+            <a:r>
+              <a:rPr lang="pt-BR" sz="1200" b="0" i="1" kern="1200" dirty="0">
+                <a:solidFill>
+                  <a:schemeClr val="tx1"/>
+                </a:solidFill>
+                <a:effectLst/>
+                <a:latin typeface="+mn-lt"/>
+                <a:ea typeface="+mn-ea"/>
+                <a:cs typeface="+mn-cs"/>
+              </a:rPr>
+              <a:t> do </a:t>
+            </a:r>
+            <a:r>
+              <a:rPr lang="pt-BR" sz="1200" b="0" i="1" kern="1200" dirty="0" err="1">
+                <a:solidFill>
+                  <a:schemeClr val="tx1"/>
+                </a:solidFill>
+                <a:effectLst/>
+                <a:latin typeface="+mn-lt"/>
+                <a:ea typeface="+mn-ea"/>
+                <a:cs typeface="+mn-cs"/>
+              </a:rPr>
+              <a:t>XGBoost</a:t>
+            </a:r>
+            <a:r>
+              <a:rPr lang="pt-BR" sz="1200" b="0" i="1" kern="1200" dirty="0">
+                <a:solidFill>
+                  <a:schemeClr val="tx1"/>
+                </a:solidFill>
+                <a:effectLst/>
+                <a:latin typeface="+mn-lt"/>
+                <a:ea typeface="+mn-ea"/>
+                <a:cs typeface="+mn-cs"/>
+              </a:rPr>
+              <a:t> com a nova base temporal. O meu laboratório já está operacional e reproduzível. Muito obrigado pela atenção, devolvo a palavra ao meu orientador e à ilustre banca."</a:t>
+            </a:r>
+            <a:endParaRPr lang="pt-BR" sz="1200" b="0" i="0" kern="1200" dirty="0">
+              <a:solidFill>
+                <a:schemeClr val="tx1"/>
+              </a:solidFill>
+              <a:effectLst/>
+              <a:latin typeface="+mn-lt"/>
+              <a:ea typeface="+mn-ea"/>
+              <a:cs typeface="+mn-cs"/>
+            </a:endParaRPr>
+          </a:p>
+        </p:txBody>
+      </p:sp>
+      <p:sp>
+        <p:nvSpPr>
+          <p:cNvPr id="4" name="Espaço Reservado para Número de Slide 3">
+            <a:extLst>
+              <a:ext uri="{FF2B5EF4-FFF2-40B4-BE49-F238E27FC236}">
+                <a16:creationId xmlns:a16="http://schemas.microsoft.com/office/drawing/2014/main" id="{D629FF77-350C-956F-D493-AAB111D5081C}"/>
+              </a:ext>
+            </a:extLst>
+          </p:cNvPr>
+          <p:cNvSpPr>
+            <a:spLocks noGrp="1"/>
+          </p:cNvSpPr>
+          <p:nvPr>
+            <p:ph type="sldNum" sz="quarter" idx="5"/>
+          </p:nvPr>
+        </p:nvSpPr>
+        <p:spPr/>
+        <p:txBody>
+          <a:bodyPr/>
+          <a:lstStyle/>
+          <a:p>
+            <a:fld id="{C5973500-FE24-774E-8932-3833A078E141}" type="slidenum">
+              <a:rPr lang="pt-BR" smtClean="0"/>
+              <a:t>34</a:t>
+            </a:fld>
+            <a:endParaRPr lang="pt-BR"/>
+          </a:p>
+        </p:txBody>
+      </p:sp>
+    </p:spTree>
+    <p:extLst>
+      <p:ext uri="{BB962C8B-B14F-4D97-AF65-F5344CB8AC3E}">
+        <p14:creationId xmlns:p14="http://schemas.microsoft.com/office/powerpoint/2010/main" val="1680085259"/>
+      </p:ext>
+    </p:extLst>
+  </p:cSld>
+  <p:clrMapOvr>
+    <a:masterClrMapping/>
+  </p:clrMapOvr>
+</p:notes>
+</file>
+
+<file path=ppt/notesSlides/notesSlide21.xml><?xml version="1.0" encoding="utf-8"?>
+<p:notes xmlns:a="http://schemas.openxmlformats.org/drawingml/2006/main" xmlns:r="http://schemas.openxmlformats.org/officeDocument/2006/relationships" xmlns:p="http://schemas.openxmlformats.org/presentationml/2006/main">
+  <p:cSld>
+    <p:spTree>
+      <p:nvGrpSpPr>
+        <p:cNvPr id="1" name=""/>
+        <p:cNvGrpSpPr/>
+        <p:nvPr/>
+      </p:nvGrpSpPr>
+      <p:grpSpPr>
+        <a:xfrm>
+          <a:off x="0" y="0"/>
+          <a:ext cx="0" cy="0"/>
+          <a:chOff x="0" y="0"/>
+          <a:chExt cx="0" cy="0"/>
+        </a:xfrm>
+      </p:grpSpPr>
+      <p:sp>
+        <p:nvSpPr>
+          <p:cNvPr id="2" name="Espaço Reservado para Imagem de Slide 1"/>
+          <p:cNvSpPr>
+            <a:spLocks noGrp="1" noRot="1" noChangeAspect="1"/>
+          </p:cNvSpPr>
+          <p:nvPr>
+            <p:ph type="sldImg"/>
+          </p:nvPr>
+        </p:nvSpPr>
+        <p:spPr/>
+        <p:txBody>
+          <a:bodyPr/>
+          <a:lstStyle/>
+          <a:p>
+            <a:endParaRPr lang="pt-BR"/>
+          </a:p>
+        </p:txBody>
+      </p:sp>
+      <p:sp>
+        <p:nvSpPr>
+          <p:cNvPr id="3" name="Espaço Reservado para Anotações 2"/>
+          <p:cNvSpPr>
+            <a:spLocks noGrp="1"/>
+          </p:cNvSpPr>
+          <p:nvPr>
+            <p:ph type="body" idx="1"/>
+          </p:nvPr>
+        </p:nvSpPr>
+        <p:spPr/>
+        <p:txBody>
+          <a:bodyPr/>
+          <a:lstStyle/>
+          <a:p>
+            <a:r>
+              <a:rPr lang="pt-BR" dirty="0"/>
+              <a:t>https://vanderbarbosa.github.io/coleta_dados_petr4/</a:t>
+            </a:r>
+          </a:p>
+        </p:txBody>
+      </p:sp>
+      <p:sp>
+        <p:nvSpPr>
+          <p:cNvPr id="4" name="Espaço Reservado para Número de Slide 3"/>
+          <p:cNvSpPr>
+            <a:spLocks noGrp="1"/>
+          </p:cNvSpPr>
+          <p:nvPr>
+            <p:ph type="sldNum" sz="quarter" idx="5"/>
+          </p:nvPr>
+        </p:nvSpPr>
+        <p:spPr/>
+        <p:txBody>
+          <a:bodyPr/>
+          <a:lstStyle/>
+          <a:p>
+            <a:fld id="{C5973500-FE24-774E-8932-3833A078E141}" type="slidenum">
+              <a:rPr lang="pt-BR" smtClean="0"/>
+              <a:t>35</a:t>
+            </a:fld>
+            <a:endParaRPr lang="pt-BR"/>
+          </a:p>
+        </p:txBody>
+      </p:sp>
+    </p:spTree>
+    <p:extLst>
+      <p:ext uri="{BB962C8B-B14F-4D97-AF65-F5344CB8AC3E}">
+        <p14:creationId xmlns:p14="http://schemas.microsoft.com/office/powerpoint/2010/main" val="2116165056"/>
+      </p:ext>
+    </p:extLst>
+  </p:cSld>
+  <p:clrMapOvr>
+    <a:masterClrMapping/>
+  </p:clrMapOvr>
+</p:notes>
+</file>
+
+<file path=ppt/notesSlides/notesSlide22.xml><?xml version="1.0" encoding="utf-8"?>
+<p:notes xmlns:a="http://schemas.openxmlformats.org/drawingml/2006/main" xmlns:r="http://schemas.openxmlformats.org/officeDocument/2006/relationships" xmlns:p="http://schemas.openxmlformats.org/presentationml/2006/main">
+  <p:cSld>
+    <p:spTree>
+      <p:nvGrpSpPr>
+        <p:cNvPr id="1" name=""/>
+        <p:cNvGrpSpPr/>
+        <p:nvPr/>
+      </p:nvGrpSpPr>
+      <p:grpSpPr>
+        <a:xfrm>
+          <a:off x="0" y="0"/>
+          <a:ext cx="0" cy="0"/>
+          <a:chOff x="0" y="0"/>
+          <a:chExt cx="0" cy="0"/>
+        </a:xfrm>
+      </p:grpSpPr>
+      <p:sp>
+        <p:nvSpPr>
+          <p:cNvPr id="2" name="Espaço Reservado para Imagem de Slide 1"/>
+          <p:cNvSpPr>
+            <a:spLocks noGrp="1" noRot="1" noChangeAspect="1"/>
+          </p:cNvSpPr>
+          <p:nvPr>
+            <p:ph type="sldImg"/>
+          </p:nvPr>
+        </p:nvSpPr>
+        <p:spPr/>
+        <p:txBody>
+          <a:bodyPr/>
+          <a:lstStyle/>
+          <a:p>
+            <a:endParaRPr lang="pt-BR"/>
+          </a:p>
+        </p:txBody>
+      </p:sp>
+      <p:sp>
+        <p:nvSpPr>
+          <p:cNvPr id="3" name="Espaço Reservado para Anotações 2"/>
+          <p:cNvSpPr>
+            <a:spLocks noGrp="1"/>
+          </p:cNvSpPr>
+          <p:nvPr>
+            <p:ph type="body" idx="1"/>
+          </p:nvPr>
+        </p:nvSpPr>
+        <p:spPr/>
+        <p:txBody>
+          <a:bodyPr/>
+          <a:lstStyle/>
+          <a:p>
+            <a:endParaRPr lang="pt-BR" dirty="0"/>
+          </a:p>
+        </p:txBody>
+      </p:sp>
+      <p:sp>
+        <p:nvSpPr>
+          <p:cNvPr id="4" name="Espaço Reservado para Número de Slide 3"/>
+          <p:cNvSpPr>
+            <a:spLocks noGrp="1"/>
+          </p:cNvSpPr>
+          <p:nvPr>
+            <p:ph type="sldNum" sz="quarter" idx="5"/>
+          </p:nvPr>
+        </p:nvSpPr>
+        <p:spPr/>
+        <p:txBody>
+          <a:bodyPr/>
+          <a:lstStyle/>
+          <a:p>
+            <a:fld id="{C5973500-FE24-774E-8932-3833A078E141}" type="slidenum">
+              <a:rPr lang="pt-BR" smtClean="0"/>
+              <a:t>36</a:t>
+            </a:fld>
+            <a:endParaRPr lang="pt-BR"/>
+          </a:p>
+        </p:txBody>
+      </p:sp>
+    </p:spTree>
+    <p:extLst>
+      <p:ext uri="{BB962C8B-B14F-4D97-AF65-F5344CB8AC3E}">
+        <p14:creationId xmlns:p14="http://schemas.microsoft.com/office/powerpoint/2010/main" val="1125769661"/>
       </p:ext>
     </p:extLst>
   </p:cSld>
@@ -3871,6 +3863,13 @@
           </p:nvPr>
         </p:nvSpPr>
         <p:spPr/>
+        <p:txBody>
+          <a:bodyPr/>
+          <a:lstStyle/>
+          <a:p>
+            <a:endParaRPr lang="pt-BR"/>
+          </a:p>
+        </p:txBody>
       </p:sp>
       <p:sp>
         <p:nvSpPr>
@@ -4098,6 +4097,13 @@
           </p:nvPr>
         </p:nvSpPr>
         <p:spPr/>
+        <p:txBody>
+          <a:bodyPr/>
+          <a:lstStyle/>
+          <a:p>
+            <a:endParaRPr lang="pt-BR"/>
+          </a:p>
+        </p:txBody>
       </p:sp>
       <p:sp>
         <p:nvSpPr>
@@ -4335,6 +4341,13 @@
           </p:nvPr>
         </p:nvSpPr>
         <p:spPr/>
+        <p:txBody>
+          <a:bodyPr/>
+          <a:lstStyle/>
+          <a:p>
+            <a:endParaRPr lang="pt-BR"/>
+          </a:p>
+        </p:txBody>
       </p:sp>
       <p:sp>
         <p:nvSpPr>
@@ -4565,6 +4578,13 @@
           </p:nvPr>
         </p:nvSpPr>
         <p:spPr/>
+        <p:txBody>
+          <a:bodyPr/>
+          <a:lstStyle/>
+          <a:p>
+            <a:endParaRPr lang="pt-BR"/>
+          </a:p>
+        </p:txBody>
       </p:sp>
       <p:sp>
         <p:nvSpPr>
@@ -4902,6 +4922,383 @@
     <p:extLst>
       <p:ext uri="{BB962C8B-B14F-4D97-AF65-F5344CB8AC3E}">
         <p14:creationId xmlns:p14="http://schemas.microsoft.com/office/powerpoint/2010/main" val="2021580526"/>
+      </p:ext>
+    </p:extLst>
+  </p:cSld>
+  <p:clrMapOvr>
+    <a:masterClrMapping/>
+  </p:clrMapOvr>
+</p:notes>
+</file>
+
+<file path=ppt/notesSlides/notesSlide7.xml><?xml version="1.0" encoding="utf-8"?>
+<p:notes xmlns:a="http://schemas.openxmlformats.org/drawingml/2006/main" xmlns:r="http://schemas.openxmlformats.org/officeDocument/2006/relationships" xmlns:p="http://schemas.openxmlformats.org/presentationml/2006/main">
+  <p:cSld>
+    <p:spTree>
+      <p:nvGrpSpPr>
+        <p:cNvPr id="1" name=""/>
+        <p:cNvGrpSpPr/>
+        <p:nvPr/>
+      </p:nvGrpSpPr>
+      <p:grpSpPr>
+        <a:xfrm>
+          <a:off x="0" y="0"/>
+          <a:ext cx="0" cy="0"/>
+          <a:chOff x="0" y="0"/>
+          <a:chExt cx="0" cy="0"/>
+        </a:xfrm>
+      </p:grpSpPr>
+      <p:sp>
+        <p:nvSpPr>
+          <p:cNvPr id="2" name="Espaço Reservado para Imagem de Slide 1"/>
+          <p:cNvSpPr>
+            <a:spLocks noGrp="1" noRot="1" noChangeAspect="1"/>
+          </p:cNvSpPr>
+          <p:nvPr>
+            <p:ph type="sldImg"/>
+          </p:nvPr>
+        </p:nvSpPr>
+        <p:spPr/>
+        <p:txBody>
+          <a:bodyPr/>
+          <a:lstStyle/>
+          <a:p>
+            <a:endParaRPr lang="pt-BR"/>
+          </a:p>
+        </p:txBody>
+      </p:sp>
+      <p:sp>
+        <p:nvSpPr>
+          <p:cNvPr id="3" name="Espaço Reservado para Anotações 2"/>
+          <p:cNvSpPr>
+            <a:spLocks noGrp="1"/>
+          </p:cNvSpPr>
+          <p:nvPr>
+            <p:ph type="body" idx="1"/>
+          </p:nvPr>
+        </p:nvSpPr>
+        <p:spPr/>
+        <p:txBody>
+          <a:bodyPr/>
+          <a:lstStyle/>
+          <a:p>
+            <a:endParaRPr lang="pt-BR" dirty="0"/>
+          </a:p>
+        </p:txBody>
+      </p:sp>
+      <p:sp>
+        <p:nvSpPr>
+          <p:cNvPr id="4" name="Espaço Reservado para Número de Slide 3"/>
+          <p:cNvSpPr>
+            <a:spLocks noGrp="1"/>
+          </p:cNvSpPr>
+          <p:nvPr>
+            <p:ph type="sldNum" sz="quarter" idx="5"/>
+          </p:nvPr>
+        </p:nvSpPr>
+        <p:spPr/>
+        <p:txBody>
+          <a:bodyPr/>
+          <a:lstStyle/>
+          <a:p>
+            <a:fld id="{C5973500-FE24-774E-8932-3833A078E141}" type="slidenum">
+              <a:rPr lang="pt-BR" smtClean="0"/>
+              <a:t>13</a:t>
+            </a:fld>
+            <a:endParaRPr lang="pt-BR"/>
+          </a:p>
+        </p:txBody>
+      </p:sp>
+    </p:spTree>
+    <p:extLst>
+      <p:ext uri="{BB962C8B-B14F-4D97-AF65-F5344CB8AC3E}">
+        <p14:creationId xmlns:p14="http://schemas.microsoft.com/office/powerpoint/2010/main" val="213349908"/>
+      </p:ext>
+    </p:extLst>
+  </p:cSld>
+  <p:clrMapOvr>
+    <a:masterClrMapping/>
+  </p:clrMapOvr>
+</p:notes>
+</file>
+
+<file path=ppt/notesSlides/notesSlide8.xml><?xml version="1.0" encoding="utf-8"?>
+<p:notes xmlns:a="http://schemas.openxmlformats.org/drawingml/2006/main" xmlns:r="http://schemas.openxmlformats.org/officeDocument/2006/relationships" xmlns:p="http://schemas.openxmlformats.org/presentationml/2006/main">
+  <p:cSld>
+    <p:spTree>
+      <p:nvGrpSpPr>
+        <p:cNvPr id="1" name="">
+          <a:extLst>
+            <a:ext uri="{FF2B5EF4-FFF2-40B4-BE49-F238E27FC236}">
+              <a16:creationId xmlns:a16="http://schemas.microsoft.com/office/drawing/2014/main" id="{283A14D8-7651-932E-621A-DBF0DF9B19EA}"/>
+            </a:ext>
+          </a:extLst>
+        </p:cNvPr>
+        <p:cNvGrpSpPr/>
+        <p:nvPr/>
+      </p:nvGrpSpPr>
+      <p:grpSpPr>
+        <a:xfrm>
+          <a:off x="0" y="0"/>
+          <a:ext cx="0" cy="0"/>
+          <a:chOff x="0" y="0"/>
+          <a:chExt cx="0" cy="0"/>
+        </a:xfrm>
+      </p:grpSpPr>
+      <p:sp>
+        <p:nvSpPr>
+          <p:cNvPr id="2" name="Espaço Reservado para Imagem de Slide 1">
+            <a:extLst>
+              <a:ext uri="{FF2B5EF4-FFF2-40B4-BE49-F238E27FC236}">
+                <a16:creationId xmlns:a16="http://schemas.microsoft.com/office/drawing/2014/main" id="{A632E9C4-259B-EF49-5C3F-5CCD8E0D2CE9}"/>
+              </a:ext>
+            </a:extLst>
+          </p:cNvPr>
+          <p:cNvSpPr>
+            <a:spLocks noGrp="1" noRot="1" noChangeAspect="1"/>
+          </p:cNvSpPr>
+          <p:nvPr>
+            <p:ph type="sldImg"/>
+          </p:nvPr>
+        </p:nvSpPr>
+        <p:spPr/>
+        <p:txBody>
+          <a:bodyPr/>
+          <a:lstStyle/>
+          <a:p>
+            <a:endParaRPr lang="pt-BR"/>
+          </a:p>
+        </p:txBody>
+      </p:sp>
+      <p:sp>
+        <p:nvSpPr>
+          <p:cNvPr id="3" name="Espaço Reservado para Anotações 2">
+            <a:extLst>
+              <a:ext uri="{FF2B5EF4-FFF2-40B4-BE49-F238E27FC236}">
+                <a16:creationId xmlns:a16="http://schemas.microsoft.com/office/drawing/2014/main" id="{1DFF1A9C-0765-928F-4B5A-77691386FC67}"/>
+              </a:ext>
+            </a:extLst>
+          </p:cNvPr>
+          <p:cNvSpPr>
+            <a:spLocks noGrp="1"/>
+          </p:cNvSpPr>
+          <p:nvPr>
+            <p:ph type="body" idx="1"/>
+          </p:nvPr>
+        </p:nvSpPr>
+        <p:spPr/>
+        <p:txBody>
+          <a:bodyPr/>
+          <a:lstStyle/>
+          <a:p>
+            <a:pPr marL="0" marR="0" lvl="0" indent="0" algn="l" defTabSz="914400" rtl="0" eaLnBrk="1" fontAlgn="auto" latinLnBrk="0" hangingPunct="1">
+              <a:lnSpc>
+                <a:spcPct val="100000"/>
+              </a:lnSpc>
+              <a:spcBef>
+                <a:spcPts val="0"/>
+              </a:spcBef>
+              <a:spcAft>
+                <a:spcPts val="0"/>
+              </a:spcAft>
+              <a:buClrTx/>
+              <a:buSzTx/>
+              <a:buFontTx/>
+              <a:buNone/>
+              <a:tabLst/>
+              <a:defRPr/>
+            </a:pPr>
+            <a:r>
+              <a:rPr lang="pt-BR" sz="1200" b="0" i="1" kern="1200" dirty="0">
+                <a:solidFill>
+                  <a:schemeClr val="tx1"/>
+                </a:solidFill>
+                <a:effectLst/>
+                <a:latin typeface="+mn-lt"/>
+                <a:ea typeface="+mn-ea"/>
+                <a:cs typeface="+mn-cs"/>
+              </a:rPr>
+              <a:t>Preenchemos a lacuna ao abandonar as médias do IBOVESPA para focar cirurgicamente na PETR4, criando um ecossistema de Data Fusion que o estado da arte ainda não havia unificado no Brasil."</a:t>
+            </a:r>
+          </a:p>
+          <a:p>
+            <a:pPr marL="0" marR="0" lvl="0" indent="0" algn="l" defTabSz="914400" rtl="0" eaLnBrk="1" fontAlgn="auto" latinLnBrk="0" hangingPunct="1">
+              <a:lnSpc>
+                <a:spcPct val="100000"/>
+              </a:lnSpc>
+              <a:spcBef>
+                <a:spcPts val="0"/>
+              </a:spcBef>
+              <a:spcAft>
+                <a:spcPts val="0"/>
+              </a:spcAft>
+              <a:buClrTx/>
+              <a:buSzTx/>
+              <a:buFontTx/>
+              <a:buNone/>
+              <a:tabLst/>
+              <a:defRPr/>
+            </a:pPr>
+            <a:endParaRPr lang="pt-BR" sz="1200" b="0" i="1" kern="1200" dirty="0">
+              <a:solidFill>
+                <a:schemeClr val="tx1"/>
+              </a:solidFill>
+              <a:effectLst/>
+              <a:latin typeface="+mn-lt"/>
+              <a:ea typeface="+mn-ea"/>
+              <a:cs typeface="+mn-cs"/>
+            </a:endParaRPr>
+          </a:p>
+        </p:txBody>
+      </p:sp>
+      <p:sp>
+        <p:nvSpPr>
+          <p:cNvPr id="4" name="Espaço Reservado para Número de Slide 3">
+            <a:extLst>
+              <a:ext uri="{FF2B5EF4-FFF2-40B4-BE49-F238E27FC236}">
+                <a16:creationId xmlns:a16="http://schemas.microsoft.com/office/drawing/2014/main" id="{88722551-488B-934B-354B-78D61CE993CC}"/>
+              </a:ext>
+            </a:extLst>
+          </p:cNvPr>
+          <p:cNvSpPr>
+            <a:spLocks noGrp="1"/>
+          </p:cNvSpPr>
+          <p:nvPr>
+            <p:ph type="sldNum" sz="quarter" idx="5"/>
+          </p:nvPr>
+        </p:nvSpPr>
+        <p:spPr/>
+        <p:txBody>
+          <a:bodyPr/>
+          <a:lstStyle/>
+          <a:p>
+            <a:fld id="{C5973500-FE24-774E-8932-3833A078E141}" type="slidenum">
+              <a:rPr lang="pt-BR" smtClean="0"/>
+              <a:t>14</a:t>
+            </a:fld>
+            <a:endParaRPr lang="pt-BR"/>
+          </a:p>
+        </p:txBody>
+      </p:sp>
+    </p:spTree>
+    <p:extLst>
+      <p:ext uri="{BB962C8B-B14F-4D97-AF65-F5344CB8AC3E}">
+        <p14:creationId xmlns:p14="http://schemas.microsoft.com/office/powerpoint/2010/main" val="627361416"/>
+      </p:ext>
+    </p:extLst>
+  </p:cSld>
+  <p:clrMapOvr>
+    <a:masterClrMapping/>
+  </p:clrMapOvr>
+</p:notes>
+</file>
+
+<file path=ppt/notesSlides/notesSlide9.xml><?xml version="1.0" encoding="utf-8"?>
+<p:notes xmlns:a="http://schemas.openxmlformats.org/drawingml/2006/main" xmlns:r="http://schemas.openxmlformats.org/officeDocument/2006/relationships" xmlns:p="http://schemas.openxmlformats.org/presentationml/2006/main">
+  <p:cSld>
+    <p:spTree>
+      <p:nvGrpSpPr>
+        <p:cNvPr id="1" name="">
+          <a:extLst>
+            <a:ext uri="{FF2B5EF4-FFF2-40B4-BE49-F238E27FC236}">
+              <a16:creationId xmlns:a16="http://schemas.microsoft.com/office/drawing/2014/main" id="{A6FEBBA8-95FE-7190-8C19-4BBE90E25481}"/>
+            </a:ext>
+          </a:extLst>
+        </p:cNvPr>
+        <p:cNvGrpSpPr/>
+        <p:nvPr/>
+      </p:nvGrpSpPr>
+      <p:grpSpPr>
+        <a:xfrm>
+          <a:off x="0" y="0"/>
+          <a:ext cx="0" cy="0"/>
+          <a:chOff x="0" y="0"/>
+          <a:chExt cx="0" cy="0"/>
+        </a:xfrm>
+      </p:grpSpPr>
+      <p:sp>
+        <p:nvSpPr>
+          <p:cNvPr id="2" name="Espaço Reservado para Imagem de Slide 1">
+            <a:extLst>
+              <a:ext uri="{FF2B5EF4-FFF2-40B4-BE49-F238E27FC236}">
+                <a16:creationId xmlns:a16="http://schemas.microsoft.com/office/drawing/2014/main" id="{958BC06E-3A4A-BEF5-48D0-4B4E76CF6CCC}"/>
+              </a:ext>
+            </a:extLst>
+          </p:cNvPr>
+          <p:cNvSpPr>
+            <a:spLocks noGrp="1" noRot="1" noChangeAspect="1"/>
+          </p:cNvSpPr>
+          <p:nvPr>
+            <p:ph type="sldImg"/>
+          </p:nvPr>
+        </p:nvSpPr>
+        <p:spPr/>
+        <p:txBody>
+          <a:bodyPr/>
+          <a:lstStyle/>
+          <a:p>
+            <a:endParaRPr lang="pt-BR"/>
+          </a:p>
+        </p:txBody>
+      </p:sp>
+      <p:sp>
+        <p:nvSpPr>
+          <p:cNvPr id="3" name="Espaço Reservado para Anotações 2">
+            <a:extLst>
+              <a:ext uri="{FF2B5EF4-FFF2-40B4-BE49-F238E27FC236}">
+                <a16:creationId xmlns:a16="http://schemas.microsoft.com/office/drawing/2014/main" id="{9DB0496B-5902-9EDB-7363-5FE9DDFFDE6D}"/>
+              </a:ext>
+            </a:extLst>
+          </p:cNvPr>
+          <p:cNvSpPr>
+            <a:spLocks noGrp="1"/>
+          </p:cNvSpPr>
+          <p:nvPr>
+            <p:ph type="body" idx="1"/>
+          </p:nvPr>
+        </p:nvSpPr>
+        <p:spPr/>
+        <p:txBody>
+          <a:bodyPr/>
+          <a:lstStyle/>
+          <a:p>
+            <a:endParaRPr lang="pt-BR" dirty="0"/>
+          </a:p>
+        </p:txBody>
+      </p:sp>
+      <p:sp>
+        <p:nvSpPr>
+          <p:cNvPr id="4" name="Espaço Reservado para Número de Slide 3">
+            <a:extLst>
+              <a:ext uri="{FF2B5EF4-FFF2-40B4-BE49-F238E27FC236}">
+                <a16:creationId xmlns:a16="http://schemas.microsoft.com/office/drawing/2014/main" id="{B3D8B64F-81E2-B051-549F-782FC943E298}"/>
+              </a:ext>
+            </a:extLst>
+          </p:cNvPr>
+          <p:cNvSpPr>
+            <a:spLocks noGrp="1"/>
+          </p:cNvSpPr>
+          <p:nvPr>
+            <p:ph type="sldNum" sz="quarter" idx="5"/>
+          </p:nvPr>
+        </p:nvSpPr>
+        <p:spPr/>
+        <p:txBody>
+          <a:bodyPr/>
+          <a:lstStyle/>
+          <a:p>
+            <a:fld id="{C5973500-FE24-774E-8932-3833A078E141}" type="slidenum">
+              <a:rPr lang="pt-BR" smtClean="0"/>
+              <a:t>16</a:t>
+            </a:fld>
+            <a:endParaRPr lang="pt-BR"/>
+          </a:p>
+        </p:txBody>
+      </p:sp>
+    </p:spTree>
+    <p:extLst>
+      <p:ext uri="{BB962C8B-B14F-4D97-AF65-F5344CB8AC3E}">
+        <p14:creationId xmlns:p14="http://schemas.microsoft.com/office/powerpoint/2010/main" val="648879002"/>
       </p:ext>
     </p:extLst>
   </p:cSld>
@@ -5090,7 +5487,7 @@
           <a:p>
             <a:fld id="{A42F892D-862C-2D47-B31F-1150E6DD63F8}" type="datetimeFigureOut">
               <a:rPr lang="pt-BR" smtClean="0"/>
-              <a:t>30/06/2026</a:t>
+              <a:t>02/07/2026</a:t>
             </a:fld>
             <a:endParaRPr lang="pt-BR"/>
           </a:p>
@@ -5328,7 +5725,7 @@
           <a:p>
             <a:fld id="{A42F892D-862C-2D47-B31F-1150E6DD63F8}" type="datetimeFigureOut">
               <a:rPr lang="pt-BR" smtClean="0"/>
-              <a:t>30/06/2026</a:t>
+              <a:t>02/07/2026</a:t>
             </a:fld>
             <a:endParaRPr lang="pt-BR"/>
           </a:p>
@@ -5886,7 +6283,7 @@
           <a:p>
             <a:fld id="{A42F892D-862C-2D47-B31F-1150E6DD63F8}" type="datetimeFigureOut">
               <a:rPr lang="pt-BR" smtClean="0"/>
-              <a:t>30/06/2026</a:t>
+              <a:t>02/07/2026</a:t>
             </a:fld>
             <a:endParaRPr lang="pt-BR"/>
           </a:p>
@@ -6189,7 +6586,7 @@
           <a:p>
             <a:fld id="{A42F892D-862C-2D47-B31F-1150E6DD63F8}" type="datetimeFigureOut">
               <a:rPr lang="pt-BR" smtClean="0"/>
-              <a:t>30/06/2026</a:t>
+              <a:t>02/07/2026</a:t>
             </a:fld>
             <a:endParaRPr lang="pt-BR"/>
           </a:p>
@@ -6640,7 +7037,7 @@
           <a:p>
             <a:fld id="{A42F892D-862C-2D47-B31F-1150E6DD63F8}" type="datetimeFigureOut">
               <a:rPr lang="pt-BR" smtClean="0"/>
-              <a:t>30/06/2026</a:t>
+              <a:t>02/07/2026</a:t>
             </a:fld>
             <a:endParaRPr lang="pt-BR"/>
           </a:p>
@@ -6813,7 +7210,7 @@
           <a:p>
             <a:fld id="{A42F892D-862C-2D47-B31F-1150E6DD63F8}" type="datetimeFigureOut">
               <a:rPr lang="pt-BR" smtClean="0"/>
-              <a:t>30/06/2026</a:t>
+              <a:t>02/07/2026</a:t>
             </a:fld>
             <a:endParaRPr lang="pt-BR"/>
           </a:p>
@@ -6950,7 +7347,7 @@
           <a:p>
             <a:fld id="{A42F892D-862C-2D47-B31F-1150E6DD63F8}" type="datetimeFigureOut">
               <a:rPr lang="pt-BR" smtClean="0"/>
-              <a:t>30/06/2026</a:t>
+              <a:t>02/07/2026</a:t>
             </a:fld>
             <a:endParaRPr lang="pt-BR"/>
           </a:p>
@@ -7294,7 +7691,7 @@
           <a:p>
             <a:fld id="{A42F892D-862C-2D47-B31F-1150E6DD63F8}" type="datetimeFigureOut">
               <a:rPr lang="pt-BR" smtClean="0"/>
-              <a:t>30/06/2026</a:t>
+              <a:t>02/07/2026</a:t>
             </a:fld>
             <a:endParaRPr lang="pt-BR"/>
           </a:p>
@@ -7615,7 +8012,7 @@
           <a:p>
             <a:fld id="{A42F892D-862C-2D47-B31F-1150E6DD63F8}" type="datetimeFigureOut">
               <a:rPr lang="pt-BR" smtClean="0"/>
-              <a:t>30/06/2026</a:t>
+              <a:t>02/07/2026</a:t>
             </a:fld>
             <a:endParaRPr lang="pt-BR"/>
           </a:p>
@@ -8217,7 +8614,7 @@
         </p:nvSpPr>
         <p:spPr>
           <a:xfrm>
-            <a:off x="147597" y="5855049"/>
+            <a:off x="147597" y="5379929"/>
             <a:ext cx="7601406" cy="423424"/>
           </a:xfrm>
           <a:prstGeom prst="rect">
@@ -8241,7 +8638,27 @@
                 <a:latin typeface="Arial" panose="020B0604020202020204" pitchFamily="34" charset="0"/>
                 <a:cs typeface="Arial" panose="020B0604020202020204" pitchFamily="34" charset="0"/>
               </a:rPr>
-              <a:t>Orientador: Júlio Cesar </a:t>
+              <a:t>Orientador: Dr</a:t>
+            </a:r>
+            <a:r>
+              <a:rPr lang="pt-BR" sz="1800">
+                <a:solidFill>
+                  <a:schemeClr val="bg1"/>
+                </a:solidFill>
+                <a:latin typeface="Arial" panose="020B0604020202020204" pitchFamily="34" charset="0"/>
+                <a:cs typeface="Arial" panose="020B0604020202020204" pitchFamily="34" charset="0"/>
+              </a:rPr>
+              <a:t>. Júlio </a:t>
+            </a:r>
+            <a:r>
+              <a:rPr lang="pt-BR" sz="1800" dirty="0">
+                <a:solidFill>
+                  <a:schemeClr val="bg1"/>
+                </a:solidFill>
+                <a:latin typeface="Arial" panose="020B0604020202020204" pitchFamily="34" charset="0"/>
+                <a:cs typeface="Arial" panose="020B0604020202020204" pitchFamily="34" charset="0"/>
+              </a:rPr>
+              <a:t>Cesar </a:t>
             </a:r>
             <a:r>
               <a:rPr lang="pt-BR" sz="1800" dirty="0" err="1">
@@ -8309,7 +8726,7 @@
         </p:nvSpPr>
         <p:spPr>
           <a:xfrm>
-            <a:off x="2194560" y="6144812"/>
+            <a:off x="147597" y="6185707"/>
             <a:ext cx="7601406" cy="423424"/>
           </a:xfrm>
           <a:prstGeom prst="rect">
@@ -8498,6 +8915,215 @@
                 <a:cs typeface="Arial" panose="020B0604020202020204" pitchFamily="34" charset="0"/>
               </a:rPr>
               <a:t>Vanderlei Barbosa da Silva</a:t>
+            </a:r>
+          </a:p>
+        </p:txBody>
+      </p:sp>
+      <p:sp>
+        <p:nvSpPr>
+          <p:cNvPr id="4" name="Subtítulo 2">
+            <a:extLst>
+              <a:ext uri="{FF2B5EF4-FFF2-40B4-BE49-F238E27FC236}">
+                <a16:creationId xmlns:a16="http://schemas.microsoft.com/office/drawing/2014/main" id="{A15DD5E0-8BEC-B1AA-B32B-4F3009B75DEA}"/>
+              </a:ext>
+            </a:extLst>
+          </p:cNvPr>
+          <p:cNvSpPr txBox="1">
+            <a:spLocks/>
+          </p:cNvSpPr>
+          <p:nvPr/>
+        </p:nvSpPr>
+        <p:spPr>
+          <a:xfrm>
+            <a:off x="147597" y="5764593"/>
+            <a:ext cx="7601406" cy="423424"/>
+          </a:xfrm>
+          <a:prstGeom prst="rect">
+            <a:avLst/>
+          </a:prstGeom>
+        </p:spPr>
+        <p:txBody>
+          <a:bodyPr>
+            <a:noAutofit/>
+          </a:bodyPr>
+          <a:lstStyle>
+            <a:lvl1pPr marL="228600" indent="-228600" algn="l" defTabSz="914400" rtl="0" eaLnBrk="1" latinLnBrk="0" hangingPunct="1">
+              <a:lnSpc>
+                <a:spcPct val="90000"/>
+              </a:lnSpc>
+              <a:spcBef>
+                <a:spcPts val="1000"/>
+              </a:spcBef>
+              <a:buFont typeface="Arial" panose="020B0604020202020204" pitchFamily="34" charset="0"/>
+              <a:buChar char="•"/>
+              <a:defRPr sz="2800" kern="1200">
+                <a:solidFill>
+                  <a:schemeClr val="tx1"/>
+                </a:solidFill>
+                <a:latin typeface="+mn-lt"/>
+                <a:ea typeface="+mn-ea"/>
+                <a:cs typeface="+mn-cs"/>
+              </a:defRPr>
+            </a:lvl1pPr>
+            <a:lvl2pPr marL="685800" indent="-228600" algn="l" defTabSz="914400" rtl="0" eaLnBrk="1" latinLnBrk="0" hangingPunct="1">
+              <a:lnSpc>
+                <a:spcPct val="90000"/>
+              </a:lnSpc>
+              <a:spcBef>
+                <a:spcPts val="500"/>
+              </a:spcBef>
+              <a:buFont typeface="Arial" panose="020B0604020202020204" pitchFamily="34" charset="0"/>
+              <a:buChar char="•"/>
+              <a:defRPr sz="2400" kern="1200">
+                <a:solidFill>
+                  <a:schemeClr val="tx1"/>
+                </a:solidFill>
+                <a:latin typeface="+mn-lt"/>
+                <a:ea typeface="+mn-ea"/>
+                <a:cs typeface="+mn-cs"/>
+              </a:defRPr>
+            </a:lvl2pPr>
+            <a:lvl3pPr marL="1143000" indent="-228600" algn="l" defTabSz="914400" rtl="0" eaLnBrk="1" latinLnBrk="0" hangingPunct="1">
+              <a:lnSpc>
+                <a:spcPct val="90000"/>
+              </a:lnSpc>
+              <a:spcBef>
+                <a:spcPts val="500"/>
+              </a:spcBef>
+              <a:buFont typeface="Arial" panose="020B0604020202020204" pitchFamily="34" charset="0"/>
+              <a:buChar char="•"/>
+              <a:defRPr sz="2000" kern="1200">
+                <a:solidFill>
+                  <a:schemeClr val="tx1"/>
+                </a:solidFill>
+                <a:latin typeface="+mn-lt"/>
+                <a:ea typeface="+mn-ea"/>
+                <a:cs typeface="+mn-cs"/>
+              </a:defRPr>
+            </a:lvl3pPr>
+            <a:lvl4pPr marL="1600200" indent="-228600" algn="l" defTabSz="914400" rtl="0" eaLnBrk="1" latinLnBrk="0" hangingPunct="1">
+              <a:lnSpc>
+                <a:spcPct val="90000"/>
+              </a:lnSpc>
+              <a:spcBef>
+                <a:spcPts val="500"/>
+              </a:spcBef>
+              <a:buFont typeface="Arial" panose="020B0604020202020204" pitchFamily="34" charset="0"/>
+              <a:buChar char="•"/>
+              <a:defRPr sz="1800" kern="1200">
+                <a:solidFill>
+                  <a:schemeClr val="tx1"/>
+                </a:solidFill>
+                <a:latin typeface="+mn-lt"/>
+                <a:ea typeface="+mn-ea"/>
+                <a:cs typeface="+mn-cs"/>
+              </a:defRPr>
+            </a:lvl4pPr>
+            <a:lvl5pPr marL="2057400" indent="-228600" algn="l" defTabSz="914400" rtl="0" eaLnBrk="1" latinLnBrk="0" hangingPunct="1">
+              <a:lnSpc>
+                <a:spcPct val="90000"/>
+              </a:lnSpc>
+              <a:spcBef>
+                <a:spcPts val="500"/>
+              </a:spcBef>
+              <a:buFont typeface="Arial" panose="020B0604020202020204" pitchFamily="34" charset="0"/>
+              <a:buChar char="•"/>
+              <a:defRPr sz="1800" kern="1200">
+                <a:solidFill>
+                  <a:schemeClr val="tx1"/>
+                </a:solidFill>
+                <a:latin typeface="+mn-lt"/>
+                <a:ea typeface="+mn-ea"/>
+                <a:cs typeface="+mn-cs"/>
+              </a:defRPr>
+            </a:lvl5pPr>
+            <a:lvl6pPr marL="2514600" indent="-228600" algn="l" defTabSz="914400" rtl="0" eaLnBrk="1" latinLnBrk="0" hangingPunct="1">
+              <a:lnSpc>
+                <a:spcPct val="90000"/>
+              </a:lnSpc>
+              <a:spcBef>
+                <a:spcPts val="500"/>
+              </a:spcBef>
+              <a:buFont typeface="Arial" panose="020B0604020202020204" pitchFamily="34" charset="0"/>
+              <a:buChar char="•"/>
+              <a:defRPr sz="1800" kern="1200">
+                <a:solidFill>
+                  <a:schemeClr val="tx1"/>
+                </a:solidFill>
+                <a:latin typeface="+mn-lt"/>
+                <a:ea typeface="+mn-ea"/>
+                <a:cs typeface="+mn-cs"/>
+              </a:defRPr>
+            </a:lvl6pPr>
+            <a:lvl7pPr marL="2971800" indent="-228600" algn="l" defTabSz="914400" rtl="0" eaLnBrk="1" latinLnBrk="0" hangingPunct="1">
+              <a:lnSpc>
+                <a:spcPct val="90000"/>
+              </a:lnSpc>
+              <a:spcBef>
+                <a:spcPts val="500"/>
+              </a:spcBef>
+              <a:buFont typeface="Arial" panose="020B0604020202020204" pitchFamily="34" charset="0"/>
+              <a:buChar char="•"/>
+              <a:defRPr sz="1800" kern="1200">
+                <a:solidFill>
+                  <a:schemeClr val="tx1"/>
+                </a:solidFill>
+                <a:latin typeface="+mn-lt"/>
+                <a:ea typeface="+mn-ea"/>
+                <a:cs typeface="+mn-cs"/>
+              </a:defRPr>
+            </a:lvl7pPr>
+            <a:lvl8pPr marL="3429000" indent="-228600" algn="l" defTabSz="914400" rtl="0" eaLnBrk="1" latinLnBrk="0" hangingPunct="1">
+              <a:lnSpc>
+                <a:spcPct val="90000"/>
+              </a:lnSpc>
+              <a:spcBef>
+                <a:spcPts val="500"/>
+              </a:spcBef>
+              <a:buFont typeface="Arial" panose="020B0604020202020204" pitchFamily="34" charset="0"/>
+              <a:buChar char="•"/>
+              <a:defRPr sz="1800" kern="1200">
+                <a:solidFill>
+                  <a:schemeClr val="tx1"/>
+                </a:solidFill>
+                <a:latin typeface="+mn-lt"/>
+                <a:ea typeface="+mn-ea"/>
+                <a:cs typeface="+mn-cs"/>
+              </a:defRPr>
+            </a:lvl8pPr>
+            <a:lvl9pPr marL="3886200" indent="-228600" algn="l" defTabSz="914400" rtl="0" eaLnBrk="1" latinLnBrk="0" hangingPunct="1">
+              <a:lnSpc>
+                <a:spcPct val="90000"/>
+              </a:lnSpc>
+              <a:spcBef>
+                <a:spcPts val="500"/>
+              </a:spcBef>
+              <a:buFont typeface="Arial" panose="020B0604020202020204" pitchFamily="34" charset="0"/>
+              <a:buChar char="•"/>
+              <a:defRPr sz="1800" kern="1200">
+                <a:solidFill>
+                  <a:schemeClr val="tx1"/>
+                </a:solidFill>
+                <a:latin typeface="+mn-lt"/>
+                <a:ea typeface="+mn-ea"/>
+                <a:cs typeface="+mn-cs"/>
+              </a:defRPr>
+            </a:lvl9pPr>
+          </a:lstStyle>
+          <a:p>
+            <a:pPr marL="0" indent="0">
+              <a:buFont typeface="Arial" panose="020B0604020202020204" pitchFamily="34" charset="0"/>
+              <a:buNone/>
+            </a:pPr>
+            <a:r>
+              <a:rPr lang="pt-BR" sz="1800" dirty="0">
+                <a:solidFill>
+                  <a:schemeClr val="bg1"/>
+                </a:solidFill>
+                <a:latin typeface="Arial" panose="020B0604020202020204" pitchFamily="34" charset="0"/>
+                <a:cs typeface="Arial" panose="020B0604020202020204" pitchFamily="34" charset="0"/>
+              </a:rPr>
+              <a:t>Coorientador: Dr. Emerson Cabrera Paraiso</a:t>
             </a:r>
           </a:p>
         </p:txBody>
@@ -8769,7 +9395,7 @@
               <a:buNone/>
             </a:pPr>
             <a:r>
-              <a:rPr b="1" sz="1500"/>
+              <a:rPr sz="1500" b="1"/>
               <a:t>FinBERT-PT-BR:  </a:t>
             </a:r>
             <a:r>
@@ -8788,7 +9414,7 @@
               <a:buNone/>
             </a:pPr>
             <a:r>
-              <a:rPr b="1" sz="1500"/>
+              <a:rPr sz="1500" b="1"/>
               <a:t>GARCH(1,1):  </a:t>
             </a:r>
             <a:r>
@@ -8807,7 +9433,7 @@
               <a:buNone/>
             </a:pPr>
             <a:r>
-              <a:rPr b="1" sz="1500"/>
+              <a:rPr sz="1500" b="1"/>
               <a:t>SVM (Support Vector Machine):  </a:t>
             </a:r>
             <a:r>
@@ -8849,7 +9475,7 @@
               <a:buNone/>
             </a:pPr>
             <a:r>
-              <a:rPr b="1" sz="1500"/>
+              <a:rPr sz="1500" b="1"/>
               <a:t>XGBoost (Extreme Gradient Boosting):  </a:t>
             </a:r>
             <a:r>
@@ -8868,7 +9494,7 @@
               <a:buNone/>
             </a:pPr>
             <a:r>
-              <a:rPr b="1" sz="1500"/>
+              <a:rPr sz="1500" b="1"/>
               <a:t>Data Fusion:  </a:t>
             </a:r>
             <a:r>
@@ -8887,7 +9513,7 @@
               <a:buNone/>
             </a:pPr>
             <a:r>
-              <a:rPr b="1" sz="1500"/>
+              <a:rPr sz="1500" b="1"/>
               <a:t>Walk-Forward Validation:  </a:t>
             </a:r>
             <a:r>
@@ -9143,7 +9769,7 @@
               <a:buNone/>
             </a:pPr>
             <a:r>
-              <a:rPr b="1" sz="1500"/>
+              <a:rPr sz="1500" b="1"/>
               <a:t>Bases consultadas:  </a:t>
             </a:r>
             <a:r>
@@ -9162,7 +9788,7 @@
               <a:buNone/>
             </a:pPr>
             <a:r>
-              <a:rPr b="1" sz="1500"/>
+              <a:rPr sz="1500" b="1"/>
               <a:t>Strings de busca (PT/EN):  </a:t>
             </a:r>
             <a:r>
@@ -9181,7 +9807,7 @@
               <a:buNone/>
             </a:pPr>
             <a:r>
-              <a:rPr b="1" sz="1500"/>
+              <a:rPr sz="1500" b="1"/>
               <a:t>Janela da busca de literatura:  </a:t>
             </a:r>
             <a:r>
@@ -9200,7 +9826,7 @@
               <a:buNone/>
             </a:pPr>
             <a:r>
-              <a:rPr b="1" sz="1500"/>
+              <a:rPr sz="1500" b="1"/>
               <a:t>Janela dos dados empíricos:  </a:t>
             </a:r>
             <a:r>
@@ -9219,7 +9845,7 @@
               <a:buNone/>
             </a:pPr>
             <a:r>
-              <a:rPr b="1" sz="1500"/>
+              <a:rPr sz="1500" b="1"/>
               <a:t>Critérios de exclusão:  </a:t>
             </a:r>
             <a:r>
@@ -9238,7 +9864,7 @@
               <a:buNone/>
             </a:pPr>
             <a:r>
-              <a:rPr b="1" sz="1500"/>
+              <a:rPr sz="1500" b="1"/>
               <a:t>Resultado:  </a:t>
             </a:r>
             <a:r>
@@ -9256,7 +9882,7 @@
         </p:nvSpPr>
         <p:spPr>
           <a:xfrm>
-            <a:off x="640080" y="6309360"/>
+            <a:off x="1744486" y="6309360"/>
             <a:ext cx="10058400" cy="365760"/>
           </a:xfrm>
           <a:prstGeom prst="rect">
@@ -9271,12 +9897,132 @@
           <a:lstStyle/>
           <a:p>
             <a:r>
-              <a:rPr sz="1100" i="1">
+              <a:rPr sz="1100" i="1" dirty="0" err="1">
                 <a:solidFill>
                   <a:srgbClr val="888888"/>
                 </a:solidFill>
               </a:rPr>
-              <a:t>Distinção importante: a literatura é revisada de 2007 a 2026; os dados (notícias e preços) cobrem 2016 a 2026.</a:t>
+              <a:t>Distinção</a:t>
+            </a:r>
+            <a:r>
+              <a:rPr sz="1100" i="1" dirty="0">
+                <a:solidFill>
+                  <a:srgbClr val="888888"/>
+                </a:solidFill>
+              </a:rPr>
+              <a:t> </a:t>
+            </a:r>
+            <a:r>
+              <a:rPr sz="1100" i="1" dirty="0" err="1">
+                <a:solidFill>
+                  <a:srgbClr val="888888"/>
+                </a:solidFill>
+              </a:rPr>
+              <a:t>importante</a:t>
+            </a:r>
+            <a:r>
+              <a:rPr sz="1100" i="1" dirty="0">
+                <a:solidFill>
+                  <a:srgbClr val="888888"/>
+                </a:solidFill>
+              </a:rPr>
+              <a:t>: a </a:t>
+            </a:r>
+            <a:r>
+              <a:rPr sz="1100" i="1" dirty="0" err="1">
+                <a:solidFill>
+                  <a:srgbClr val="888888"/>
+                </a:solidFill>
+              </a:rPr>
+              <a:t>literatura</a:t>
+            </a:r>
+            <a:r>
+              <a:rPr sz="1100" i="1" dirty="0">
+                <a:solidFill>
+                  <a:srgbClr val="888888"/>
+                </a:solidFill>
+              </a:rPr>
+              <a:t> é </a:t>
+            </a:r>
+            <a:r>
+              <a:rPr sz="1100" i="1" dirty="0" err="1">
+                <a:solidFill>
+                  <a:srgbClr val="888888"/>
+                </a:solidFill>
+              </a:rPr>
+              <a:t>revisada</a:t>
+            </a:r>
+            <a:r>
+              <a:rPr sz="1100" i="1" dirty="0">
+                <a:solidFill>
+                  <a:srgbClr val="888888"/>
+                </a:solidFill>
+              </a:rPr>
+              <a:t> de 2007 a 2026; </a:t>
+            </a:r>
+            <a:r>
+              <a:rPr sz="1100" i="1" dirty="0" err="1">
+                <a:solidFill>
+                  <a:srgbClr val="888888"/>
+                </a:solidFill>
+              </a:rPr>
+              <a:t>os</a:t>
+            </a:r>
+            <a:r>
+              <a:rPr sz="1100" i="1" dirty="0">
+                <a:solidFill>
+                  <a:srgbClr val="888888"/>
+                </a:solidFill>
+              </a:rPr>
+              <a:t> dados (</a:t>
+            </a:r>
+            <a:r>
+              <a:rPr sz="1100" i="1" dirty="0" err="1">
+                <a:solidFill>
+                  <a:srgbClr val="888888"/>
+                </a:solidFill>
+              </a:rPr>
+              <a:t>notícias</a:t>
+            </a:r>
+            <a:r>
+              <a:rPr sz="1100" i="1" dirty="0">
+                <a:solidFill>
+                  <a:srgbClr val="888888"/>
+                </a:solidFill>
+              </a:rPr>
+              <a:t> e </a:t>
+            </a:r>
+            <a:r>
+              <a:rPr sz="1100" i="1" dirty="0" err="1">
+                <a:solidFill>
+                  <a:srgbClr val="888888"/>
+                </a:solidFill>
+              </a:rPr>
+              <a:t>preços</a:t>
+            </a:r>
+            <a:r>
+              <a:rPr sz="1100" i="1" dirty="0">
+                <a:solidFill>
+                  <a:srgbClr val="888888"/>
+                </a:solidFill>
+              </a:rPr>
+              <a:t>) </a:t>
+            </a:r>
+            <a:r>
+              <a:rPr sz="1100" i="1" dirty="0" err="1">
+                <a:solidFill>
+                  <a:srgbClr val="888888"/>
+                </a:solidFill>
+              </a:rPr>
+              <a:t>cobrem</a:t>
+            </a:r>
+            <a:r>
+              <a:rPr sz="1100" i="1" dirty="0">
+                <a:solidFill>
+                  <a:srgbClr val="888888"/>
+                </a:solidFill>
+              </a:rPr>
+              <a:t> 2016 a 2026.</a:t>
             </a:r>
           </a:p>
         </p:txBody>
@@ -9290,7 +10036,7 @@
 </file>
 
 <file path=ppt/slides/slide14.xml><?xml version="1.0" encoding="utf-8"?>
-<p:sld xmlns:a="http://schemas.openxmlformats.org/drawingml/2006/main" xmlns:r="http://schemas.openxmlformats.org/officeDocument/2006/relationships" xmlns:p="http://schemas.openxmlformats.org/presentationml/2006/main">
+<p:sld xmlns:a="http://schemas.openxmlformats.org/drawingml/2006/main" xmlns:r="http://schemas.openxmlformats.org/officeDocument/2006/relationships" xmlns:p="http://schemas.openxmlformats.org/presentationml/2006/main" show="0">
   <p:cSld>
     <p:spTree>
       <p:nvGrpSpPr>
@@ -9770,7 +10516,7 @@
           <a:lstStyle/>
           <a:p>
             <a:r>
-              <a:rPr lang="pt-BR" dirty="0" sz="2600">
+              <a:rPr lang="pt-BR" sz="2600" dirty="0">
                 <a:solidFill>
                   <a:srgbClr val="810539"/>
                 </a:solidFill>
@@ -9857,7 +10603,7 @@
               <a:buNone/>
             </a:pPr>
             <a:r>
-              <a:rPr b="1" sz="1400"/>
+              <a:rPr sz="1400" b="1"/>
               <a:t>29 estudos selecionados  </a:t>
             </a:r>
             <a:r>
@@ -9876,7 +10622,7 @@
               <a:buNone/>
             </a:pPr>
             <a:r>
-              <a:rPr b="1" sz="1400"/>
+              <a:rPr sz="1400" b="1"/>
               <a:t>Concentração recente:  </a:t>
             </a:r>
             <a:r>
@@ -9895,7 +10641,7 @@
               <a:buNone/>
             </a:pPr>
             <a:r>
-              <a:rPr b="1" sz="1400"/>
+              <a:rPr sz="1400" b="1"/>
               <a:t>Lacuna de idioma:  </a:t>
             </a:r>
             <a:r>
@@ -9947,7 +10693,7 @@
           <p:nvPr/>
         </p:nvPicPr>
         <p:blipFill>
-          <a:blip r:embed="rId5"/>
+          <a:blip r:embed="rId2"/>
           <a:stretch>
             <a:fillRect/>
           </a:stretch>
@@ -9971,7 +10717,7 @@
           <p:nvPr/>
         </p:nvPicPr>
         <p:blipFill>
-          <a:blip r:embed="rId6"/>
+          <a:blip r:embed="rId3"/>
           <a:stretch>
             <a:fillRect/>
           </a:stretch>
@@ -10524,14 +11270,6 @@
               <a:rPr lang="pt-BR" dirty="0"/>
               <a:t>Superação de dicionários estáticos e contagem de palavras (TF-IDF) pela adoção do estado da arte em Transformers (FinBERT-PT-BR) para desambiguação de ironias e jargões no português brasileiro.</a:t>
             </a:r>
-            <a:r>
-              <a:rPr lang="pt-BR" dirty="0" err="1"/>
-              <a:t/>
-            </a:r>
-            <a:r>
-              <a:rPr lang="pt-BR" dirty="0"/>
-              <a:t/>
-            </a:r>
           </a:p>
         </p:txBody>
       </p:sp>
@@ -10775,7 +11513,15 @@
           <a:p>
             <a:r>
               <a:rPr lang="pt-BR" dirty="0"/>
-              <a:t>Transição das avaliações genéricas de índices inteiros (</a:t>
+              <a:t>Transição das</a:t>
+            </a:r>
+            <a:r>
+              <a:rPr lang="pt-BR" b="1" dirty="0"/>
+              <a:t> avaliações genéricas</a:t>
+            </a:r>
+            <a:r>
+              <a:rPr lang="pt-BR" dirty="0"/>
+              <a:t> de índices inteiros (</a:t>
             </a:r>
             <a:r>
               <a:rPr lang="pt-BR" dirty="0" err="1"/>
@@ -10864,15 +11610,15 @@
           <a:p>
             <a:r>
               <a:rPr lang="pt-BR" dirty="0"/>
-              <a:t>Superação de dicionários estáticos e contagem de palavras (TF-IDF) pela adoção do estado da arte em Transformers (FinBERT-PT-BR) para desambiguação de ironias e jargões no português brasileiro.</a:t>
-            </a:r>
-            <a:r>
-              <a:rPr lang="pt-BR" dirty="0" err="1"/>
-              <a:t/>
+              <a:t>Superação de </a:t>
+            </a:r>
+            <a:r>
+              <a:rPr lang="pt-BR" b="1" dirty="0"/>
+              <a:t>dicionários estáticos e contagem de palavras (TF-IDF)</a:t>
             </a:r>
             <a:r>
               <a:rPr lang="pt-BR" dirty="0"/>
-              <a:t/>
+              <a:t> pela adoção do estado da arte em Transformers (FinBERT-PT-BR) para desambiguação de ironias e jargões no português brasileiro.</a:t>
             </a:r>
           </a:p>
         </p:txBody>
@@ -10933,7 +11679,7 @@
         <p:spPr>
           <a:xfrm>
             <a:off x="7942545" y="2473891"/>
-            <a:ext cx="3044869" cy="1754326"/>
+            <a:ext cx="3044869" cy="1200329"/>
           </a:xfrm>
           <a:prstGeom prst="rect">
             <a:avLst/>
@@ -10953,7 +11699,7 @@
           <a:p>
             <a:r>
               <a:rPr lang="pt-BR" dirty="0"/>
-              <a:t>Unificação inédita no Brasil integrando Inteligência Artificial textual, inércia econométrica de risco (GARCH) e predição não-linear direcional (</a:t>
+              <a:t>Unificação integrando Inteligência Artificial textual e predição não-linear direcional (</a:t>
             </a:r>
             <a:r>
               <a:rPr lang="pt-BR" dirty="0" err="1"/>
@@ -11139,7 +11885,7 @@
 </file>
 
 <file path=ppt/slides/slide2.xml><?xml version="1.0" encoding="utf-8"?>
-<p:sld xmlns:a="http://schemas.openxmlformats.org/drawingml/2006/main" xmlns:p="http://schemas.openxmlformats.org/presentationml/2006/main" xmlns:r="http://schemas.openxmlformats.org/officeDocument/2006/relationships">
+<p:sld xmlns:a="http://schemas.openxmlformats.org/drawingml/2006/main" xmlns:r="http://schemas.openxmlformats.org/officeDocument/2006/relationships" xmlns:p="http://schemas.openxmlformats.org/presentationml/2006/main">
   <p:cSld>
     <p:spTree>
       <p:nvGrpSpPr>
@@ -11147,7 +11893,14 @@
         <p:cNvGrpSpPr/>
         <p:nvPr/>
       </p:nvGrpSpPr>
-      <p:grpSpPr/>
+      <p:grpSpPr>
+        <a:xfrm>
+          <a:off x="0" y="0"/>
+          <a:ext cx="0" cy="0"/>
+          <a:chOff x="0" y="0"/>
+          <a:chExt cx="0" cy="0"/>
+        </a:xfrm>
+      </p:grpSpPr>
       <p:sp>
         <p:nvSpPr>
           <p:cNvPr id="2" name="Título 1">
@@ -11525,7 +12278,7 @@
         <p:spPr>
           <a:xfrm>
             <a:off x="822960" y="1554480"/>
-            <a:ext cx="10607040" cy="4572000"/>
+            <a:ext cx="10607040" cy="1669688"/>
           </a:xfrm>
           <a:prstGeom prst="rect">
             <a:avLst/>
@@ -11548,12 +12301,88 @@
               <a:buNone/>
             </a:pPr>
             <a:r>
-              <a:rPr b="1" sz="1600"/>
-              <a:t>Método de pesquisa:  </a:t>
-            </a:r>
-            <a:r>
-              <a:rPr sz="1350"/>
-              <a:t>experimental — compara, sob condições controladas, o desempenho de modelos com e sem a informação de sentimento.</a:t>
+              <a:rPr sz="1600" b="1" dirty="0" err="1"/>
+              <a:t>Método</a:t>
+            </a:r>
+            <a:r>
+              <a:rPr sz="1600" b="1" dirty="0"/>
+              <a:t> de </a:t>
+            </a:r>
+            <a:r>
+              <a:rPr sz="1600" b="1" dirty="0" err="1"/>
+              <a:t>pesquisa</a:t>
+            </a:r>
+            <a:r>
+              <a:rPr sz="1600" b="1" dirty="0"/>
+              <a:t>:  </a:t>
+            </a:r>
+            <a:r>
+              <a:rPr sz="1350" dirty="0"/>
+              <a:t>experimental — </a:t>
+            </a:r>
+            <a:r>
+              <a:rPr sz="1350" b="1" dirty="0" err="1"/>
+              <a:t>compara</a:t>
+            </a:r>
+            <a:r>
+              <a:rPr sz="1350" dirty="0"/>
+              <a:t>, sob </a:t>
+            </a:r>
+            <a:r>
+              <a:rPr sz="1350" dirty="0" err="1"/>
+              <a:t>condições</a:t>
+            </a:r>
+            <a:r>
+              <a:rPr sz="1350" dirty="0"/>
+              <a:t> </a:t>
+            </a:r>
+            <a:r>
+              <a:rPr sz="1350" dirty="0" err="1"/>
+              <a:t>controladas</a:t>
+            </a:r>
+            <a:r>
+              <a:rPr sz="1350" dirty="0"/>
+              <a:t>, o </a:t>
+            </a:r>
+            <a:r>
+              <a:rPr sz="1350" dirty="0" err="1"/>
+              <a:t>desempenho</a:t>
+            </a:r>
+            <a:r>
+              <a:rPr sz="1350" dirty="0"/>
+              <a:t> de </a:t>
+            </a:r>
+            <a:r>
+              <a:rPr sz="1350" b="1" dirty="0" err="1"/>
+              <a:t>modelos</a:t>
+            </a:r>
+            <a:r>
+              <a:rPr sz="1350" b="1" dirty="0"/>
+              <a:t> com e </a:t>
+            </a:r>
+            <a:r>
+              <a:rPr sz="1350" b="1" dirty="0" err="1"/>
+              <a:t>sem</a:t>
+            </a:r>
+            <a:r>
+              <a:rPr sz="1350" b="1" dirty="0"/>
+              <a:t> a </a:t>
+            </a:r>
+            <a:r>
+              <a:rPr sz="1350" b="1" dirty="0" err="1"/>
+              <a:t>informação</a:t>
+            </a:r>
+            <a:r>
+              <a:rPr sz="1350" b="1" dirty="0"/>
+              <a:t> de </a:t>
+            </a:r>
+            <a:r>
+              <a:rPr sz="1350" b="1" dirty="0" err="1"/>
+              <a:t>sentimento</a:t>
+            </a:r>
+            <a:r>
+              <a:rPr sz="1350" dirty="0"/>
+              <a:t>.</a:t>
             </a:r>
           </a:p>
           <a:p>
@@ -11567,12 +12396,80 @@
               <a:buNone/>
             </a:pPr>
             <a:r>
-              <a:rPr b="1" sz="1600"/>
-              <a:t>Natureza:  </a:t>
-            </a:r>
-            <a:r>
-              <a:rPr sz="1350"/>
-              <a:t>empírico-quantitativa — conclusões derivadas de dados reais, expressos em números e tratamento estatístico.</a:t>
+              <a:rPr sz="1600" b="1" dirty="0" err="1"/>
+              <a:t>Finalidade</a:t>
+            </a:r>
+            <a:r>
+              <a:rPr sz="1600" b="1" dirty="0"/>
+              <a:t>:  </a:t>
+            </a:r>
+            <a:r>
+              <a:rPr sz="1350" dirty="0" err="1"/>
+              <a:t>aplicada</a:t>
+            </a:r>
+            <a:r>
+              <a:rPr sz="1350" dirty="0"/>
+              <a:t> — </a:t>
+            </a:r>
+            <a:r>
+              <a:rPr sz="1350" dirty="0" err="1"/>
+              <a:t>constrói</a:t>
+            </a:r>
+            <a:r>
+              <a:rPr sz="1350" dirty="0"/>
+              <a:t> </a:t>
+            </a:r>
+            <a:r>
+              <a:rPr sz="1350" b="1" dirty="0"/>
+              <a:t>um </a:t>
+            </a:r>
+            <a:r>
+              <a:rPr sz="1350" b="1" dirty="0" err="1"/>
+              <a:t>artefato</a:t>
+            </a:r>
+            <a:r>
+              <a:rPr sz="1350" b="1" dirty="0"/>
+              <a:t> </a:t>
+            </a:r>
+            <a:r>
+              <a:rPr sz="1350" b="1" dirty="0" err="1"/>
+              <a:t>computacional</a:t>
+            </a:r>
+            <a:r>
+              <a:rPr sz="1350" b="1" dirty="0"/>
+              <a:t> </a:t>
+            </a:r>
+            <a:r>
+              <a:rPr sz="1350" b="1" dirty="0" err="1"/>
+              <a:t>capaz</a:t>
+            </a:r>
+            <a:r>
+              <a:rPr sz="1350" b="1" dirty="0"/>
+              <a:t> de </a:t>
+            </a:r>
+            <a:r>
+              <a:rPr sz="1350" b="1" dirty="0" err="1"/>
+              <a:t>produzir</a:t>
+            </a:r>
+            <a:r>
+              <a:rPr sz="1350" b="1" dirty="0"/>
+              <a:t> pr</a:t>
+            </a:r>
+            <a:r>
+              <a:rPr lang="pt-BR" sz="1350" b="1" dirty="0" err="1"/>
+              <a:t>ojeções</a:t>
+            </a:r>
+            <a:r>
+              <a:rPr sz="1350" b="1" dirty="0"/>
+              <a:t> </a:t>
+            </a:r>
+            <a:r>
+              <a:rPr sz="1350" dirty="0" err="1"/>
+              <a:t>verificáveis</a:t>
+            </a:r>
+            <a:r>
+              <a:rPr sz="1350" dirty="0"/>
+              <a:t>.</a:t>
             </a:r>
           </a:p>
           <a:p>
@@ -11586,12 +12483,140 @@
               <a:buNone/>
             </a:pPr>
             <a:r>
-              <a:rPr b="1" sz="1600"/>
-              <a:t>Finalidade:  </a:t>
-            </a:r>
-            <a:r>
-              <a:rPr sz="1350"/>
-              <a:t>aplicada — constrói um artefato computacional capaz de produzir previsões verificáveis.</a:t>
+              <a:rPr sz="1600" b="1" dirty="0" err="1"/>
+              <a:t>Unidade</a:t>
+            </a:r>
+            <a:r>
+              <a:rPr sz="1600" b="1" dirty="0"/>
+              <a:t> de </a:t>
+            </a:r>
+            <a:r>
+              <a:rPr sz="1600" b="1" dirty="0" err="1"/>
+              <a:t>análise</a:t>
+            </a:r>
+            <a:r>
+              <a:rPr sz="1600" b="1" dirty="0"/>
+              <a:t>:  </a:t>
+            </a:r>
+            <a:r>
+              <a:rPr sz="1350" dirty="0"/>
+              <a:t>o </a:t>
+            </a:r>
+            <a:r>
+              <a:rPr sz="1350" dirty="0" err="1"/>
+              <a:t>pregão</a:t>
+            </a:r>
+            <a:r>
+              <a:rPr sz="1350" dirty="0"/>
+              <a:t> </a:t>
+            </a:r>
+            <a:r>
+              <a:rPr sz="1350" b="1" dirty="0"/>
+              <a:t>(</a:t>
+            </a:r>
+            <a:r>
+              <a:rPr sz="1350" b="1" dirty="0" err="1"/>
+              <a:t>dia</a:t>
+            </a:r>
+            <a:r>
+              <a:rPr sz="1350" b="1" dirty="0"/>
+              <a:t> de </a:t>
+            </a:r>
+            <a:r>
+              <a:rPr sz="1350" b="1" dirty="0" err="1"/>
+              <a:t>negociação</a:t>
+            </a:r>
+            <a:r>
+              <a:rPr sz="1350" dirty="0"/>
+              <a:t>); as </a:t>
+            </a:r>
+            <a:r>
+              <a:rPr sz="1350" dirty="0" err="1"/>
+              <a:t>notícias</a:t>
+            </a:r>
+            <a:r>
+              <a:rPr sz="1350" dirty="0"/>
+              <a:t> do </a:t>
+            </a:r>
+            <a:r>
+              <a:rPr sz="1350" dirty="0" err="1"/>
+              <a:t>dia</a:t>
+            </a:r>
+            <a:r>
+              <a:rPr sz="1350" dirty="0"/>
+              <a:t> </a:t>
+            </a:r>
+            <a:r>
+              <a:rPr sz="1350" dirty="0" err="1"/>
+              <a:t>são</a:t>
+            </a:r>
+            <a:r>
+              <a:rPr sz="1350" dirty="0"/>
+              <a:t> </a:t>
+            </a:r>
+            <a:r>
+              <a:rPr sz="1350" dirty="0" err="1"/>
+              <a:t>agregadas</a:t>
+            </a:r>
+            <a:r>
+              <a:rPr sz="1350" dirty="0"/>
+              <a:t> </a:t>
+            </a:r>
+            <a:r>
+              <a:rPr sz="1350" dirty="0" err="1"/>
+              <a:t>em</a:t>
+            </a:r>
+            <a:r>
+              <a:rPr sz="1350" dirty="0"/>
+              <a:t> um </a:t>
+            </a:r>
+            <a:r>
+              <a:rPr sz="1350" dirty="0" err="1"/>
+              <a:t>índice</a:t>
+            </a:r>
+            <a:r>
+              <a:rPr sz="1350" dirty="0"/>
+              <a:t> </a:t>
+            </a:r>
+            <a:r>
+              <a:rPr sz="1350" dirty="0" err="1"/>
+              <a:t>diário</a:t>
+            </a:r>
+            <a:r>
+              <a:rPr sz="1350" dirty="0"/>
+              <a:t> → </a:t>
+            </a:r>
+            <a:r>
+              <a:rPr sz="1350" dirty="0" err="1"/>
+              <a:t>uma</a:t>
+            </a:r>
+            <a:r>
+              <a:rPr sz="1350" dirty="0"/>
+              <a:t> </a:t>
+            </a:r>
+            <a:r>
+              <a:rPr sz="1350" dirty="0" err="1"/>
+              <a:t>previsão</a:t>
+            </a:r>
+            <a:r>
+              <a:rPr sz="1350" dirty="0"/>
+              <a:t> </a:t>
+            </a:r>
+            <a:r>
+              <a:rPr sz="1350" dirty="0" err="1"/>
+              <a:t>por</a:t>
+            </a:r>
+            <a:r>
+              <a:rPr sz="1350" dirty="0"/>
+              <a:t> </a:t>
+            </a:r>
+            <a:r>
+              <a:rPr sz="1350" dirty="0" err="1"/>
+              <a:t>pregão</a:t>
+            </a:r>
+            <a:r>
+              <a:rPr sz="1350" dirty="0"/>
+              <a:t>.</a:t>
             </a:r>
           </a:p>
           <a:p>
@@ -11605,31 +12630,100 @@
               <a:buNone/>
             </a:pPr>
             <a:r>
-              <a:rPr b="1" sz="1600"/>
-              <a:t>Unidade de análise:  </a:t>
-            </a:r>
-            <a:r>
-              <a:rPr sz="1350"/>
-              <a:t>o pregão (dia de negociação); as notícias do dia são agregadas em um índice diário → uma previsão por pregão.</a:t>
-            </a:r>
-          </a:p>
-          <a:p>
-            <a:pPr>
-              <a:spcBef>
-                <a:spcPts val="0"/>
-              </a:spcBef>
-              <a:spcAft>
-                <a:spcPts val="1000"/>
-              </a:spcAft>
-              <a:buNone/>
-            </a:pPr>
-            <a:r>
-              <a:rPr b="1" sz="1600"/>
-              <a:t>Pressuposto central:  </a:t>
-            </a:r>
-            <a:r>
-              <a:rPr sz="1350"/>
-              <a:t>causalidade temporal — só a informação disponível antes do pregão pode prevê-lo (marcação temporal e defasagem dos atributos).</a:t>
+              <a:rPr sz="1600" b="1" dirty="0" err="1"/>
+              <a:t>Pressuposto</a:t>
+            </a:r>
+            <a:r>
+              <a:rPr sz="1600" b="1" dirty="0"/>
+              <a:t> central:  </a:t>
+            </a:r>
+            <a:r>
+              <a:rPr sz="1350" dirty="0" err="1"/>
+              <a:t>causalidade</a:t>
+            </a:r>
+            <a:r>
+              <a:rPr sz="1350" dirty="0"/>
+              <a:t> temporal — </a:t>
+            </a:r>
+            <a:r>
+              <a:rPr sz="1350" dirty="0" err="1"/>
+              <a:t>só</a:t>
+            </a:r>
+            <a:r>
+              <a:rPr sz="1350" dirty="0"/>
+              <a:t> a </a:t>
+            </a:r>
+            <a:r>
+              <a:rPr sz="1350" b="1" dirty="0" err="1"/>
+              <a:t>informação</a:t>
+            </a:r>
+            <a:r>
+              <a:rPr sz="1350" dirty="0"/>
+              <a:t> </a:t>
+            </a:r>
+            <a:r>
+              <a:rPr sz="1350" dirty="0" err="1"/>
+              <a:t>disponível</a:t>
+            </a:r>
+            <a:r>
+              <a:rPr sz="1350" dirty="0"/>
+              <a:t> </a:t>
+            </a:r>
+            <a:r>
+              <a:rPr sz="1350" b="1" dirty="0"/>
+              <a:t>antes</a:t>
+            </a:r>
+            <a:r>
+              <a:rPr sz="1350" dirty="0"/>
+              <a:t> do </a:t>
+            </a:r>
+            <a:r>
+              <a:rPr sz="1350" b="1" dirty="0" err="1"/>
+              <a:t>pregão</a:t>
+            </a:r>
+            <a:r>
+              <a:rPr sz="1350" dirty="0"/>
+              <a:t> </a:t>
+            </a:r>
+            <a:r>
+              <a:rPr sz="1350" dirty="0" err="1"/>
+              <a:t>pode</a:t>
+            </a:r>
+            <a:r>
+              <a:rPr sz="1350" dirty="0"/>
+              <a:t> </a:t>
+            </a:r>
+            <a:r>
+              <a:rPr sz="1350" dirty="0" err="1"/>
+              <a:t>prevê</a:t>
+            </a:r>
+            <a:r>
+              <a:rPr sz="1350" dirty="0"/>
+              <a:t>-lo (</a:t>
+            </a:r>
+            <a:r>
+              <a:rPr sz="1350" dirty="0" err="1"/>
+              <a:t>marcação</a:t>
+            </a:r>
+            <a:r>
+              <a:rPr sz="1350" dirty="0"/>
+              <a:t> temporal e </a:t>
+            </a:r>
+            <a:r>
+              <a:rPr sz="1350" dirty="0" err="1"/>
+              <a:t>defasagem</a:t>
+            </a:r>
+            <a:r>
+              <a:rPr sz="1350" dirty="0"/>
+              <a:t> dos </a:t>
+            </a:r>
+            <a:r>
+              <a:rPr sz="1350" dirty="0" err="1"/>
+              <a:t>atributos</a:t>
+            </a:r>
+            <a:r>
+              <a:rPr sz="1350" dirty="0"/>
+              <a:t>).</a:t>
             </a:r>
           </a:p>
         </p:txBody>
@@ -11797,7 +12891,7 @@
               <a:buNone/>
             </a:pPr>
             <a:r>
-              <a:rPr b="1" sz="1400"/>
+              <a:rPr sz="1400" b="1"/>
               <a:t>O que coletamos:  </a:t>
             </a:r>
             <a:r>
@@ -11816,7 +12910,7 @@
               <a:buNone/>
             </a:pPr>
             <a:r>
-              <a:rPr b="1" sz="1400"/>
+              <a:rPr sz="1400" b="1"/>
               <a:t>Variável derivada:  </a:t>
             </a:r>
             <a:r>
@@ -11835,7 +12929,7 @@
               <a:buNone/>
             </a:pPr>
             <a:r>
-              <a:rPr b="1" sz="1400"/>
+              <a:rPr sz="1400" b="1"/>
               <a:t>Variável-alvo (direção):  </a:t>
             </a:r>
             <a:r>
@@ -11864,13 +12958,55 @@
                 <a:tableStyleId>{5C22544A-7EE6-4342-B048-85BDC9FD1C3A}</a:tableStyleId>
               </a:tblPr>
               <a:tblGrid>
-                <a:gridCol w="1645920"/>
-                <a:gridCol w="1371600"/>
-                <a:gridCol w="1371600"/>
-                <a:gridCol w="1371600"/>
-                <a:gridCol w="1371600"/>
-                <a:gridCol w="2377440"/>
-                <a:gridCol w="1828800"/>
+                <a:gridCol w="1645920">
+                  <a:extLst>
+                    <a:ext uri="{9D8B030D-6E8A-4147-A177-3AD203B41FA5}">
+                      <a16:colId xmlns:a16="http://schemas.microsoft.com/office/drawing/2014/main" val="20000"/>
+                    </a:ext>
+                  </a:extLst>
+                </a:gridCol>
+                <a:gridCol w="1371600">
+                  <a:extLst>
+                    <a:ext uri="{9D8B030D-6E8A-4147-A177-3AD203B41FA5}">
+                      <a16:colId xmlns:a16="http://schemas.microsoft.com/office/drawing/2014/main" val="20001"/>
+                    </a:ext>
+                  </a:extLst>
+                </a:gridCol>
+                <a:gridCol w="1371600">
+                  <a:extLst>
+                    <a:ext uri="{9D8B030D-6E8A-4147-A177-3AD203B41FA5}">
+                      <a16:colId xmlns:a16="http://schemas.microsoft.com/office/drawing/2014/main" val="20002"/>
+                    </a:ext>
+                  </a:extLst>
+                </a:gridCol>
+                <a:gridCol w="1371600">
+                  <a:extLst>
+                    <a:ext uri="{9D8B030D-6E8A-4147-A177-3AD203B41FA5}">
+                      <a16:colId xmlns:a16="http://schemas.microsoft.com/office/drawing/2014/main" val="20003"/>
+                    </a:ext>
+                  </a:extLst>
+                </a:gridCol>
+                <a:gridCol w="1371600">
+                  <a:extLst>
+                    <a:ext uri="{9D8B030D-6E8A-4147-A177-3AD203B41FA5}">
+                      <a16:colId xmlns:a16="http://schemas.microsoft.com/office/drawing/2014/main" val="20004"/>
+                    </a:ext>
+                  </a:extLst>
+                </a:gridCol>
+                <a:gridCol w="2377440">
+                  <a:extLst>
+                    <a:ext uri="{9D8B030D-6E8A-4147-A177-3AD203B41FA5}">
+                      <a16:colId xmlns:a16="http://schemas.microsoft.com/office/drawing/2014/main" val="20005"/>
+                    </a:ext>
+                  </a:extLst>
+                </a:gridCol>
+                <a:gridCol w="1828800">
+                  <a:extLst>
+                    <a:ext uri="{9D8B030D-6E8A-4147-A177-3AD203B41FA5}">
+                      <a16:colId xmlns:a16="http://schemas.microsoft.com/office/drawing/2014/main" val="20006"/>
+                    </a:ext>
+                  </a:extLst>
+                </a:gridCol>
               </a:tblGrid>
               <a:tr h="320040">
                 <a:tc>
@@ -11889,7 +13025,7 @@
                       </a:r>
                     </a:p>
                   </a:txBody>
-                  <a:tcPr anchor="ctr" marT="12700" marB="12700" marL="50800" marR="25400">
+                  <a:tcPr marL="50800" marR="25400" marT="12700" marB="12700" anchor="ctr">
                     <a:solidFill>
                       <a:srgbClr val="6B0F2A"/>
                     </a:solidFill>
@@ -11911,7 +13047,7 @@
                       </a:r>
                     </a:p>
                   </a:txBody>
-                  <a:tcPr anchor="ctr" marT="12700" marB="12700" marL="50800" marR="25400">
+                  <a:tcPr marL="50800" marR="25400" marT="12700" marB="12700" anchor="ctr">
                     <a:solidFill>
                       <a:srgbClr val="6B0F2A"/>
                     </a:solidFill>
@@ -11933,7 +13069,7 @@
                       </a:r>
                     </a:p>
                   </a:txBody>
-                  <a:tcPr anchor="ctr" marT="12700" marB="12700" marL="50800" marR="25400">
+                  <a:tcPr marL="50800" marR="25400" marT="12700" marB="12700" anchor="ctr">
                     <a:solidFill>
                       <a:srgbClr val="6B0F2A"/>
                     </a:solidFill>
@@ -11955,7 +13091,7 @@
                       </a:r>
                     </a:p>
                   </a:txBody>
-                  <a:tcPr anchor="ctr" marT="12700" marB="12700" marL="50800" marR="25400">
+                  <a:tcPr marL="50800" marR="25400" marT="12700" marB="12700" anchor="ctr">
                     <a:solidFill>
                       <a:srgbClr val="6B0F2A"/>
                     </a:solidFill>
@@ -11977,7 +13113,7 @@
                       </a:r>
                     </a:p>
                   </a:txBody>
-                  <a:tcPr anchor="ctr" marT="12700" marB="12700" marL="50800" marR="25400">
+                  <a:tcPr marL="50800" marR="25400" marT="12700" marB="12700" anchor="ctr">
                     <a:solidFill>
                       <a:srgbClr val="6B0F2A"/>
                     </a:solidFill>
@@ -11999,7 +13135,7 @@
                       </a:r>
                     </a:p>
                   </a:txBody>
-                  <a:tcPr anchor="ctr" marT="12700" marB="12700" marL="50800" marR="25400">
+                  <a:tcPr marL="50800" marR="25400" marT="12700" marB="12700" anchor="ctr">
                     <a:solidFill>
                       <a:srgbClr val="6B0F2A"/>
                     </a:solidFill>
@@ -12021,12 +13157,17 @@
                       </a:r>
                     </a:p>
                   </a:txBody>
-                  <a:tcPr anchor="ctr" marT="12700" marB="12700" marL="50800" marR="25400">
+                  <a:tcPr marL="50800" marR="25400" marT="12700" marB="12700" anchor="ctr">
                     <a:solidFill>
                       <a:srgbClr val="6B0F2A"/>
                     </a:solidFill>
                   </a:tcPr>
                 </a:tc>
+                <a:extLst>
+                  <a:ext uri="{0D108BD9-81ED-4DB2-BD59-A6C34878D82A}">
+                    <a16:rowId xmlns:a16="http://schemas.microsoft.com/office/drawing/2014/main" val="10000"/>
+                  </a:ext>
+                </a:extLst>
               </a:tr>
               <a:tr h="320040">
                 <a:tc>
@@ -12045,7 +13186,7 @@
                       </a:r>
                     </a:p>
                   </a:txBody>
-                  <a:tcPr anchor="ctr" marT="12700" marB="12700" marL="50800" marR="25400">
+                  <a:tcPr marL="50800" marR="25400" marT="12700" marB="12700" anchor="ctr">
                     <a:solidFill>
                       <a:srgbClr val="FFFFFF"/>
                     </a:solidFill>
@@ -12067,7 +13208,7 @@
                       </a:r>
                     </a:p>
                   </a:txBody>
-                  <a:tcPr anchor="ctr" marT="12700" marB="12700" marL="50800" marR="25400">
+                  <a:tcPr marL="50800" marR="25400" marT="12700" marB="12700" anchor="ctr">
                     <a:solidFill>
                       <a:srgbClr val="FFFFFF"/>
                     </a:solidFill>
@@ -12089,7 +13230,7 @@
                       </a:r>
                     </a:p>
                   </a:txBody>
-                  <a:tcPr anchor="ctr" marT="12700" marB="12700" marL="50800" marR="25400">
+                  <a:tcPr marL="50800" marR="25400" marT="12700" marB="12700" anchor="ctr">
                     <a:solidFill>
                       <a:srgbClr val="FFFFFF"/>
                     </a:solidFill>
@@ -12111,7 +13252,7 @@
                       </a:r>
                     </a:p>
                   </a:txBody>
-                  <a:tcPr anchor="ctr" marT="12700" marB="12700" marL="50800" marR="25400">
+                  <a:tcPr marL="50800" marR="25400" marT="12700" marB="12700" anchor="ctr">
                     <a:solidFill>
                       <a:srgbClr val="FFFFFF"/>
                     </a:solidFill>
@@ -12133,7 +13274,7 @@
                       </a:r>
                     </a:p>
                   </a:txBody>
-                  <a:tcPr anchor="ctr" marT="12700" marB="12700" marL="50800" marR="25400">
+                  <a:tcPr marL="50800" marR="25400" marT="12700" marB="12700" anchor="ctr">
                     <a:solidFill>
                       <a:srgbClr val="FFFFFF"/>
                     </a:solidFill>
@@ -12155,7 +13296,7 @@
                       </a:r>
                     </a:p>
                   </a:txBody>
-                  <a:tcPr anchor="ctr" marT="12700" marB="12700" marL="50800" marR="25400">
+                  <a:tcPr marL="50800" marR="25400" marT="12700" marB="12700" anchor="ctr">
                     <a:solidFill>
                       <a:srgbClr val="FFFFFF"/>
                     </a:solidFill>
@@ -12177,12 +13318,17 @@
                       </a:r>
                     </a:p>
                   </a:txBody>
-                  <a:tcPr anchor="ctr" marT="12700" marB="12700" marL="50800" marR="25400">
+                  <a:tcPr marL="50800" marR="25400" marT="12700" marB="12700" anchor="ctr">
                     <a:solidFill>
                       <a:srgbClr val="FFFFFF"/>
                     </a:solidFill>
                   </a:tcPr>
                 </a:tc>
+                <a:extLst>
+                  <a:ext uri="{0D108BD9-81ED-4DB2-BD59-A6C34878D82A}">
+                    <a16:rowId xmlns:a16="http://schemas.microsoft.com/office/drawing/2014/main" val="10001"/>
+                  </a:ext>
+                </a:extLst>
               </a:tr>
               <a:tr h="320040">
                 <a:tc>
@@ -12201,7 +13347,7 @@
                       </a:r>
                     </a:p>
                   </a:txBody>
-                  <a:tcPr anchor="ctr" marT="12700" marB="12700" marL="50800" marR="25400">
+                  <a:tcPr marL="50800" marR="25400" marT="12700" marB="12700" anchor="ctr">
                     <a:solidFill>
                       <a:srgbClr val="DEEBF7"/>
                     </a:solidFill>
@@ -12223,7 +13369,7 @@
                       </a:r>
                     </a:p>
                   </a:txBody>
-                  <a:tcPr anchor="ctr" marT="12700" marB="12700" marL="50800" marR="25400">
+                  <a:tcPr marL="50800" marR="25400" marT="12700" marB="12700" anchor="ctr">
                     <a:solidFill>
                       <a:srgbClr val="DEEBF7"/>
                     </a:solidFill>
@@ -12245,7 +13391,7 @@
                       </a:r>
                     </a:p>
                   </a:txBody>
-                  <a:tcPr anchor="ctr" marT="12700" marB="12700" marL="50800" marR="25400">
+                  <a:tcPr marL="50800" marR="25400" marT="12700" marB="12700" anchor="ctr">
                     <a:solidFill>
                       <a:srgbClr val="DEEBF7"/>
                     </a:solidFill>
@@ -12267,7 +13413,7 @@
                       </a:r>
                     </a:p>
                   </a:txBody>
-                  <a:tcPr anchor="ctr" marT="12700" marB="12700" marL="50800" marR="25400">
+                  <a:tcPr marL="50800" marR="25400" marT="12700" marB="12700" anchor="ctr">
                     <a:solidFill>
                       <a:srgbClr val="DEEBF7"/>
                     </a:solidFill>
@@ -12289,7 +13435,7 @@
                       </a:r>
                     </a:p>
                   </a:txBody>
-                  <a:tcPr anchor="ctr" marT="12700" marB="12700" marL="50800" marR="25400">
+                  <a:tcPr marL="50800" marR="25400" marT="12700" marB="12700" anchor="ctr">
                     <a:solidFill>
                       <a:srgbClr val="DEEBF7"/>
                     </a:solidFill>
@@ -12311,7 +13457,7 @@
                       </a:r>
                     </a:p>
                   </a:txBody>
-                  <a:tcPr anchor="ctr" marT="12700" marB="12700" marL="50800" marR="25400">
+                  <a:tcPr marL="50800" marR="25400" marT="12700" marB="12700" anchor="ctr">
                     <a:solidFill>
                       <a:srgbClr val="DEEBF7"/>
                     </a:solidFill>
@@ -12333,12 +13479,17 @@
                       </a:r>
                     </a:p>
                   </a:txBody>
-                  <a:tcPr anchor="ctr" marT="12700" marB="12700" marL="50800" marR="25400">
+                  <a:tcPr marL="50800" marR="25400" marT="12700" marB="12700" anchor="ctr">
                     <a:solidFill>
                       <a:srgbClr val="DEEBF7"/>
                     </a:solidFill>
                   </a:tcPr>
                 </a:tc>
+                <a:extLst>
+                  <a:ext uri="{0D108BD9-81ED-4DB2-BD59-A6C34878D82A}">
+                    <a16:rowId xmlns:a16="http://schemas.microsoft.com/office/drawing/2014/main" val="10002"/>
+                  </a:ext>
+                </a:extLst>
               </a:tr>
               <a:tr h="320040">
                 <a:tc>
@@ -12357,7 +13508,7 @@
                       </a:r>
                     </a:p>
                   </a:txBody>
-                  <a:tcPr anchor="ctr" marT="12700" marB="12700" marL="50800" marR="25400">
+                  <a:tcPr marL="50800" marR="25400" marT="12700" marB="12700" anchor="ctr">
                     <a:solidFill>
                       <a:srgbClr val="FFFFFF"/>
                     </a:solidFill>
@@ -12379,7 +13530,7 @@
                       </a:r>
                     </a:p>
                   </a:txBody>
-                  <a:tcPr anchor="ctr" marT="12700" marB="12700" marL="50800" marR="25400">
+                  <a:tcPr marL="50800" marR="25400" marT="12700" marB="12700" anchor="ctr">
                     <a:solidFill>
                       <a:srgbClr val="FFFFFF"/>
                     </a:solidFill>
@@ -12401,7 +13552,7 @@
                       </a:r>
                     </a:p>
                   </a:txBody>
-                  <a:tcPr anchor="ctr" marT="12700" marB="12700" marL="50800" marR="25400">
+                  <a:tcPr marL="50800" marR="25400" marT="12700" marB="12700" anchor="ctr">
                     <a:solidFill>
                       <a:srgbClr val="FFFFFF"/>
                     </a:solidFill>
@@ -12423,7 +13574,7 @@
                       </a:r>
                     </a:p>
                   </a:txBody>
-                  <a:tcPr anchor="ctr" marT="12700" marB="12700" marL="50800" marR="25400">
+                  <a:tcPr marL="50800" marR="25400" marT="12700" marB="12700" anchor="ctr">
                     <a:solidFill>
                       <a:srgbClr val="FFFFFF"/>
                     </a:solidFill>
@@ -12445,7 +13596,7 @@
                       </a:r>
                     </a:p>
                   </a:txBody>
-                  <a:tcPr anchor="ctr" marT="12700" marB="12700" marL="50800" marR="25400">
+                  <a:tcPr marL="50800" marR="25400" marT="12700" marB="12700" anchor="ctr">
                     <a:solidFill>
                       <a:srgbClr val="FFFFFF"/>
                     </a:solidFill>
@@ -12467,7 +13618,7 @@
                       </a:r>
                     </a:p>
                   </a:txBody>
-                  <a:tcPr anchor="ctr" marT="12700" marB="12700" marL="50800" marR="25400">
+                  <a:tcPr marL="50800" marR="25400" marT="12700" marB="12700" anchor="ctr">
                     <a:solidFill>
                       <a:srgbClr val="FFFFFF"/>
                     </a:solidFill>
@@ -12489,12 +13640,17 @@
                       </a:r>
                     </a:p>
                   </a:txBody>
-                  <a:tcPr anchor="ctr" marT="12700" marB="12700" marL="50800" marR="25400">
+                  <a:tcPr marL="50800" marR="25400" marT="12700" marB="12700" anchor="ctr">
                     <a:solidFill>
                       <a:srgbClr val="FFFFFF"/>
                     </a:solidFill>
                   </a:tcPr>
                 </a:tc>
+                <a:extLst>
+                  <a:ext uri="{0D108BD9-81ED-4DB2-BD59-A6C34878D82A}">
+                    <a16:rowId xmlns:a16="http://schemas.microsoft.com/office/drawing/2014/main" val="10003"/>
+                  </a:ext>
+                </a:extLst>
               </a:tr>
             </a:tbl>
           </a:graphicData>
@@ -12542,7 +13698,7 @@
 </file>
 
 <file path=ppt/slides/slide22.xml><?xml version="1.0" encoding="utf-8"?>
-<p:sld xmlns:a="http://schemas.openxmlformats.org/drawingml/2006/main" xmlns:p="http://schemas.openxmlformats.org/presentationml/2006/main" xmlns:r="http://schemas.openxmlformats.org/officeDocument/2006/relationships">
+<p:sld xmlns:a="http://schemas.openxmlformats.org/drawingml/2006/main" xmlns:r="http://schemas.openxmlformats.org/officeDocument/2006/relationships" xmlns:p="http://schemas.openxmlformats.org/presentationml/2006/main">
   <p:cSld>
     <p:spTree>
       <p:nvGrpSpPr>
@@ -12550,7 +13706,14 @@
         <p:cNvGrpSpPr/>
         <p:nvPr/>
       </p:nvGrpSpPr>
-      <p:grpSpPr/>
+      <p:grpSpPr>
+        <a:xfrm>
+          <a:off x="0" y="0"/>
+          <a:ext cx="0" cy="0"/>
+          <a:chOff x="0" y="0"/>
+          <a:chExt cx="0" cy="0"/>
+        </a:xfrm>
+      </p:grpSpPr>
       <p:sp>
         <p:nvSpPr>
           <p:cNvPr id="2" name="Título 1">
@@ -12580,7 +13743,7 @@
           <a:lstStyle/>
           <a:p>
             <a:r>
-              <a:rPr lang="pt-BR" dirty="0" sz="2800">
+              <a:rPr lang="pt-BR" sz="2800" dirty="0">
                 <a:solidFill>
                   <a:srgbClr val="810539"/>
                 </a:solidFill>
@@ -12644,7 +13807,7 @@
         <p:spPr>
           <a:xfrm>
             <a:off x="548640" y="1417320"/>
-            <a:ext cx="11155680" cy="1828800"/>
+            <a:ext cx="11155680" cy="1169551"/>
           </a:xfrm>
           <a:prstGeom prst="rect">
             <a:avLst/>
@@ -12667,12 +13830,80 @@
               <a:buNone/>
             </a:pPr>
             <a:r>
-              <a:rPr b="1" sz="1400"/>
-              <a:t>O que coletamos:  </a:t>
-            </a:r>
-            <a:r>
-              <a:rPr sz="1300"/>
-              <a:t>261.960 manchetes datadas (2016-2026) de 5 portais — InfoMoney, Exame, MoneyTimes, Petronotícias e Poder360 — via API WordPress (REST).</a:t>
+              <a:rPr sz="1400" b="1" dirty="0"/>
+              <a:t>O </a:t>
+            </a:r>
+            <a:r>
+              <a:rPr sz="1400" b="1" dirty="0" err="1"/>
+              <a:t>que</a:t>
+            </a:r>
+            <a:r>
+              <a:rPr sz="1400" b="1" dirty="0"/>
+              <a:t> </a:t>
+            </a:r>
+            <a:r>
+              <a:rPr sz="1400" b="1" dirty="0" err="1"/>
+              <a:t>coletamos</a:t>
+            </a:r>
+            <a:r>
+              <a:rPr sz="1400" b="1" dirty="0"/>
+              <a:t>:  </a:t>
+            </a:r>
+            <a:r>
+              <a:rPr sz="1300" b="1" dirty="0"/>
+              <a:t>261.960 </a:t>
+            </a:r>
+            <a:r>
+              <a:rPr sz="1300" b="1" dirty="0" err="1"/>
+              <a:t>manchetes</a:t>
+            </a:r>
+            <a:r>
+              <a:rPr sz="1300" b="1" dirty="0"/>
+              <a:t> </a:t>
+            </a:r>
+            <a:r>
+              <a:rPr sz="1300" b="1" dirty="0" err="1"/>
+              <a:t>datadas</a:t>
+            </a:r>
+            <a:r>
+              <a:rPr sz="1300" b="1" dirty="0"/>
+              <a:t> (2016-2026) de 5 </a:t>
+            </a:r>
+            <a:r>
+              <a:rPr sz="1300" b="1" dirty="0" err="1"/>
+              <a:t>portais</a:t>
+            </a:r>
+            <a:r>
+              <a:rPr sz="1300" b="1" dirty="0"/>
+              <a:t> </a:t>
+            </a:r>
+            <a:r>
+              <a:rPr sz="1300" dirty="0"/>
+              <a:t>— </a:t>
+            </a:r>
+            <a:r>
+              <a:rPr sz="1300" dirty="0" err="1"/>
+              <a:t>InfoMoney</a:t>
+            </a:r>
+            <a:r>
+              <a:rPr sz="1300" dirty="0"/>
+              <a:t>, Exame, </a:t>
+            </a:r>
+            <a:r>
+              <a:rPr sz="1300" dirty="0" err="1"/>
+              <a:t>MoneyTimes</a:t>
+            </a:r>
+            <a:r>
+              <a:rPr sz="1300" dirty="0"/>
+              <a:t>, </a:t>
+            </a:r>
+            <a:r>
+              <a:rPr sz="1300" dirty="0" err="1"/>
+              <a:t>Petronotícias</a:t>
+            </a:r>
+            <a:r>
+              <a:rPr sz="1300" dirty="0"/>
+              <a:t> e Poder360 — via API WordPress (REST).</a:t>
             </a:r>
           </a:p>
           <a:p>
@@ -12686,12 +13917,92 @@
               <a:buNone/>
             </a:pPr>
             <a:r>
-              <a:rPr b="1" sz="1400"/>
-              <a:t>Campos de cada notícia:  </a:t>
-            </a:r>
-            <a:r>
-              <a:rPr sz="1300"/>
-              <a:t>data e hora exatas de publicação, fonte, título, resumo, URL e a categoria temática (taxonomia de 7 classes).</a:t>
+              <a:rPr sz="1400" b="1" dirty="0"/>
+              <a:t>Campos de </a:t>
+            </a:r>
+            <a:r>
+              <a:rPr sz="1400" b="1" dirty="0" err="1"/>
+              <a:t>cada</a:t>
+            </a:r>
+            <a:r>
+              <a:rPr sz="1400" b="1" dirty="0"/>
+              <a:t> </a:t>
+            </a:r>
+            <a:r>
+              <a:rPr sz="1400" b="1" dirty="0" err="1"/>
+              <a:t>notícia</a:t>
+            </a:r>
+            <a:r>
+              <a:rPr sz="1400" b="1" dirty="0"/>
+              <a:t>:  </a:t>
+            </a:r>
+            <a:r>
+              <a:rPr sz="1300" dirty="0"/>
+              <a:t>data e hora </a:t>
+            </a:r>
+            <a:r>
+              <a:rPr sz="1300" dirty="0" err="1"/>
+              <a:t>exatas</a:t>
+            </a:r>
+            <a:r>
+              <a:rPr sz="1300" dirty="0"/>
+              <a:t> de </a:t>
+            </a:r>
+            <a:r>
+              <a:rPr sz="1300" dirty="0" err="1"/>
+              <a:t>publicação</a:t>
+            </a:r>
+            <a:r>
+              <a:rPr sz="1300" dirty="0"/>
+              <a:t>, </a:t>
+            </a:r>
+            <a:r>
+              <a:rPr sz="1300" dirty="0" err="1"/>
+              <a:t>fonte</a:t>
+            </a:r>
+            <a:r>
+              <a:rPr sz="1300" dirty="0"/>
+              <a:t>, </a:t>
+            </a:r>
+            <a:r>
+              <a:rPr sz="1300" dirty="0" err="1"/>
+              <a:t>título</a:t>
+            </a:r>
+            <a:r>
+              <a:rPr sz="1300" dirty="0"/>
+              <a:t>, </a:t>
+            </a:r>
+            <a:r>
+              <a:rPr sz="1300" dirty="0" err="1"/>
+              <a:t>resumo</a:t>
+            </a:r>
+            <a:r>
+              <a:rPr sz="1300" dirty="0"/>
+              <a:t>, URL e a </a:t>
+            </a:r>
+            <a:r>
+              <a:rPr sz="1300" dirty="0" err="1"/>
+              <a:t>categoria</a:t>
+            </a:r>
+            <a:r>
+              <a:rPr sz="1300" dirty="0"/>
+              <a:t> </a:t>
+            </a:r>
+            <a:r>
+              <a:rPr sz="1300" dirty="0" err="1"/>
+              <a:t>temática</a:t>
+            </a:r>
+            <a:r>
+              <a:rPr sz="1300" dirty="0"/>
+              <a:t> (</a:t>
+            </a:r>
+            <a:r>
+              <a:rPr sz="1300" dirty="0" err="1"/>
+              <a:t>taxonomia</a:t>
+            </a:r>
+            <a:r>
+              <a:rPr sz="1300" dirty="0"/>
+              <a:t> de 7 classes).</a:t>
             </a:r>
           </a:p>
           <a:p>
@@ -12705,12 +14016,124 @@
               <a:buNone/>
             </a:pPr>
             <a:r>
-              <a:rPr b="1" sz="1400"/>
+              <a:rPr sz="1400" b="1" dirty="0"/>
               <a:t>Uso:  </a:t>
             </a:r>
             <a:r>
-              <a:rPr sz="1300"/>
-              <a:t>as notícias de cada pregão são agregadas em um índice diário de sentimento (ISM); notícias após 17h vão para o pregão seguinte (Lead-Lag).</a:t>
+              <a:rPr sz="1300" dirty="0"/>
+              <a:t>as </a:t>
+            </a:r>
+            <a:r>
+              <a:rPr sz="1300" dirty="0" err="1"/>
+              <a:t>notícias</a:t>
+            </a:r>
+            <a:r>
+              <a:rPr sz="1300" dirty="0"/>
+              <a:t> de </a:t>
+            </a:r>
+            <a:r>
+              <a:rPr sz="1300" dirty="0" err="1"/>
+              <a:t>cada</a:t>
+            </a:r>
+            <a:r>
+              <a:rPr sz="1300" dirty="0"/>
+              <a:t> </a:t>
+            </a:r>
+            <a:r>
+              <a:rPr sz="1300" dirty="0" err="1"/>
+              <a:t>pregão</a:t>
+            </a:r>
+            <a:r>
+              <a:rPr sz="1300" dirty="0"/>
+              <a:t> </a:t>
+            </a:r>
+            <a:r>
+              <a:rPr sz="1300" dirty="0" err="1"/>
+              <a:t>são</a:t>
+            </a:r>
+            <a:r>
+              <a:rPr sz="1300" dirty="0"/>
+              <a:t> </a:t>
+            </a:r>
+            <a:r>
+              <a:rPr sz="1300" dirty="0" err="1"/>
+              <a:t>agregadas</a:t>
+            </a:r>
+            <a:r>
+              <a:rPr sz="1300" dirty="0"/>
+              <a:t> </a:t>
+            </a:r>
+            <a:r>
+              <a:rPr sz="1300" dirty="0" err="1"/>
+              <a:t>em</a:t>
+            </a:r>
+            <a:r>
+              <a:rPr sz="1300" dirty="0"/>
+              <a:t> um </a:t>
+            </a:r>
+            <a:r>
+              <a:rPr sz="1300" dirty="0" err="1"/>
+              <a:t>índice</a:t>
+            </a:r>
+            <a:r>
+              <a:rPr sz="1300" dirty="0"/>
+              <a:t> </a:t>
+            </a:r>
+            <a:r>
+              <a:rPr sz="1300" dirty="0" err="1"/>
+              <a:t>diário</a:t>
+            </a:r>
+            <a:r>
+              <a:rPr sz="1300" dirty="0"/>
+              <a:t> de </a:t>
+            </a:r>
+            <a:r>
+              <a:rPr sz="1300" dirty="0" err="1"/>
+              <a:t>sentimento</a:t>
+            </a:r>
+            <a:r>
+              <a:rPr sz="1300" dirty="0"/>
+              <a:t> (ISM); </a:t>
+            </a:r>
+            <a:r>
+              <a:rPr sz="1300" dirty="0" err="1"/>
+              <a:t>notícias</a:t>
+            </a:r>
+            <a:r>
+              <a:rPr sz="1300" dirty="0"/>
+              <a:t> </a:t>
+            </a:r>
+            <a:r>
+              <a:rPr sz="1300" dirty="0" err="1"/>
+              <a:t>após</a:t>
+            </a:r>
+            <a:r>
+              <a:rPr sz="1300" dirty="0"/>
+              <a:t> 17h </a:t>
+            </a:r>
+            <a:r>
+              <a:rPr sz="1300" dirty="0" err="1"/>
+              <a:t>vão</a:t>
+            </a:r>
+            <a:r>
+              <a:rPr sz="1300" dirty="0"/>
+              <a:t> para o </a:t>
+            </a:r>
+            <a:r>
+              <a:rPr sz="1300" dirty="0" err="1"/>
+              <a:t>pregão</a:t>
+            </a:r>
+            <a:r>
+              <a:rPr sz="1300" dirty="0"/>
+              <a:t> </a:t>
+            </a:r>
+            <a:r>
+              <a:rPr sz="1300" dirty="0" err="1"/>
+              <a:t>seguinte</a:t>
+            </a:r>
+            <a:r>
+              <a:rPr sz="1300" dirty="0"/>
+              <a:t> (Lead-Lag).</a:t>
             </a:r>
           </a:p>
         </p:txBody>
@@ -12734,10 +14157,34 @@
                 <a:tableStyleId>{5C22544A-7EE6-4342-B048-85BDC9FD1C3A}</a:tableStyleId>
               </a:tblPr>
               <a:tblGrid>
-                <a:gridCol w="2011680"/>
-                <a:gridCol w="2468880"/>
-                <a:gridCol w="1554480"/>
-                <a:gridCol w="5303520"/>
+                <a:gridCol w="2011680">
+                  <a:extLst>
+                    <a:ext uri="{9D8B030D-6E8A-4147-A177-3AD203B41FA5}">
+                      <a16:colId xmlns:a16="http://schemas.microsoft.com/office/drawing/2014/main" val="20000"/>
+                    </a:ext>
+                  </a:extLst>
+                </a:gridCol>
+                <a:gridCol w="2468880">
+                  <a:extLst>
+                    <a:ext uri="{9D8B030D-6E8A-4147-A177-3AD203B41FA5}">
+                      <a16:colId xmlns:a16="http://schemas.microsoft.com/office/drawing/2014/main" val="20001"/>
+                    </a:ext>
+                  </a:extLst>
+                </a:gridCol>
+                <a:gridCol w="1554480">
+                  <a:extLst>
+                    <a:ext uri="{9D8B030D-6E8A-4147-A177-3AD203B41FA5}">
+                      <a16:colId xmlns:a16="http://schemas.microsoft.com/office/drawing/2014/main" val="20002"/>
+                    </a:ext>
+                  </a:extLst>
+                </a:gridCol>
+                <a:gridCol w="5303520">
+                  <a:extLst>
+                    <a:ext uri="{9D8B030D-6E8A-4147-A177-3AD203B41FA5}">
+                      <a16:colId xmlns:a16="http://schemas.microsoft.com/office/drawing/2014/main" val="20003"/>
+                    </a:ext>
+                  </a:extLst>
+                </a:gridCol>
               </a:tblGrid>
               <a:tr h="438912">
                 <a:tc>
@@ -12756,7 +14203,7 @@
                       </a:r>
                     </a:p>
                   </a:txBody>
-                  <a:tcPr anchor="ctr" marT="12700" marB="12700" marL="50800" marR="25400">
+                  <a:tcPr marL="50800" marR="25400" marT="12700" marB="12700" anchor="ctr">
                     <a:solidFill>
                       <a:srgbClr val="6B0F2A"/>
                     </a:solidFill>
@@ -12778,7 +14225,7 @@
                       </a:r>
                     </a:p>
                   </a:txBody>
-                  <a:tcPr anchor="ctr" marT="12700" marB="12700" marL="50800" marR="25400">
+                  <a:tcPr marL="50800" marR="25400" marT="12700" marB="12700" anchor="ctr">
                     <a:solidFill>
                       <a:srgbClr val="6B0F2A"/>
                     </a:solidFill>
@@ -12800,7 +14247,7 @@
                       </a:r>
                     </a:p>
                   </a:txBody>
-                  <a:tcPr anchor="ctr" marT="12700" marB="12700" marL="50800" marR="25400">
+                  <a:tcPr marL="50800" marR="25400" marT="12700" marB="12700" anchor="ctr">
                     <a:solidFill>
                       <a:srgbClr val="6B0F2A"/>
                     </a:solidFill>
@@ -12822,12 +14269,17 @@
                       </a:r>
                     </a:p>
                   </a:txBody>
-                  <a:tcPr anchor="ctr" marT="12700" marB="12700" marL="50800" marR="25400">
+                  <a:tcPr marL="50800" marR="25400" marT="12700" marB="12700" anchor="ctr">
                     <a:solidFill>
                       <a:srgbClr val="6B0F2A"/>
                     </a:solidFill>
                   </a:tcPr>
                 </a:tc>
+                <a:extLst>
+                  <a:ext uri="{0D108BD9-81ED-4DB2-BD59-A6C34878D82A}">
+                    <a16:rowId xmlns:a16="http://schemas.microsoft.com/office/drawing/2014/main" val="10000"/>
+                  </a:ext>
+                </a:extLst>
               </a:tr>
               <a:tr h="438912">
                 <a:tc>
@@ -12846,7 +14298,7 @@
                       </a:r>
                     </a:p>
                   </a:txBody>
-                  <a:tcPr anchor="ctr" marT="12700" marB="12700" marL="50800" marR="25400">
+                  <a:tcPr marL="50800" marR="25400" marT="12700" marB="12700" anchor="ctr">
                     <a:solidFill>
                       <a:srgbClr val="FFFFFF"/>
                     </a:solidFill>
@@ -12868,7 +14320,7 @@
                       </a:r>
                     </a:p>
                   </a:txBody>
-                  <a:tcPr anchor="ctr" marT="12700" marB="12700" marL="50800" marR="25400">
+                  <a:tcPr marL="50800" marR="25400" marT="12700" marB="12700" anchor="ctr">
                     <a:solidFill>
                       <a:srgbClr val="FFFFFF"/>
                     </a:solidFill>
@@ -12890,7 +14342,7 @@
                       </a:r>
                     </a:p>
                   </a:txBody>
-                  <a:tcPr anchor="ctr" marT="12700" marB="12700" marL="50800" marR="25400">
+                  <a:tcPr marL="50800" marR="25400" marT="12700" marB="12700" anchor="ctr">
                     <a:solidFill>
                       <a:srgbClr val="FFFFFF"/>
                     </a:solidFill>
@@ -12912,12 +14364,17 @@
                       </a:r>
                     </a:p>
                   </a:txBody>
-                  <a:tcPr anchor="ctr" marT="12700" marB="12700" marL="50800" marR="25400">
+                  <a:tcPr marL="50800" marR="25400" marT="12700" marB="12700" anchor="ctr">
                     <a:solidFill>
                       <a:srgbClr val="FFFFFF"/>
                     </a:solidFill>
                   </a:tcPr>
                 </a:tc>
+                <a:extLst>
+                  <a:ext uri="{0D108BD9-81ED-4DB2-BD59-A6C34878D82A}">
+                    <a16:rowId xmlns:a16="http://schemas.microsoft.com/office/drawing/2014/main" val="10001"/>
+                  </a:ext>
+                </a:extLst>
               </a:tr>
               <a:tr h="438912">
                 <a:tc>
@@ -12936,7 +14393,7 @@
                       </a:r>
                     </a:p>
                   </a:txBody>
-                  <a:tcPr anchor="ctr" marT="12700" marB="12700" marL="50800" marR="25400">
+                  <a:tcPr marL="50800" marR="25400" marT="12700" marB="12700" anchor="ctr">
                     <a:solidFill>
                       <a:srgbClr val="DEEBF7"/>
                     </a:solidFill>
@@ -12958,7 +14415,7 @@
                       </a:r>
                     </a:p>
                   </a:txBody>
-                  <a:tcPr anchor="ctr" marT="12700" marB="12700" marL="50800" marR="25400">
+                  <a:tcPr marL="50800" marR="25400" marT="12700" marB="12700" anchor="ctr">
                     <a:solidFill>
                       <a:srgbClr val="DEEBF7"/>
                     </a:solidFill>
@@ -12980,7 +14437,7 @@
                       </a:r>
                     </a:p>
                   </a:txBody>
-                  <a:tcPr anchor="ctr" marT="12700" marB="12700" marL="50800" marR="25400">
+                  <a:tcPr marL="50800" marR="25400" marT="12700" marB="12700" anchor="ctr">
                     <a:solidFill>
                       <a:srgbClr val="DEEBF7"/>
                     </a:solidFill>
@@ -13002,12 +14459,17 @@
                       </a:r>
                     </a:p>
                   </a:txBody>
-                  <a:tcPr anchor="ctr" marT="12700" marB="12700" marL="50800" marR="25400">
+                  <a:tcPr marL="50800" marR="25400" marT="12700" marB="12700" anchor="ctr">
                     <a:solidFill>
                       <a:srgbClr val="DEEBF7"/>
                     </a:solidFill>
                   </a:tcPr>
                 </a:tc>
+                <a:extLst>
+                  <a:ext uri="{0D108BD9-81ED-4DB2-BD59-A6C34878D82A}">
+                    <a16:rowId xmlns:a16="http://schemas.microsoft.com/office/drawing/2014/main" val="10002"/>
+                  </a:ext>
+                </a:extLst>
               </a:tr>
               <a:tr h="438912">
                 <a:tc>
@@ -13026,7 +14488,7 @@
                       </a:r>
                     </a:p>
                   </a:txBody>
-                  <a:tcPr anchor="ctr" marT="12700" marB="12700" marL="50800" marR="25400">
+                  <a:tcPr marL="50800" marR="25400" marT="12700" marB="12700" anchor="ctr">
                     <a:solidFill>
                       <a:srgbClr val="FFFFFF"/>
                     </a:solidFill>
@@ -13048,7 +14510,7 @@
                       </a:r>
                     </a:p>
                   </a:txBody>
-                  <a:tcPr anchor="ctr" marT="12700" marB="12700" marL="50800" marR="25400">
+                  <a:tcPr marL="50800" marR="25400" marT="12700" marB="12700" anchor="ctr">
                     <a:solidFill>
                       <a:srgbClr val="FFFFFF"/>
                     </a:solidFill>
@@ -13070,7 +14532,7 @@
                       </a:r>
                     </a:p>
                   </a:txBody>
-                  <a:tcPr anchor="ctr" marT="12700" marB="12700" marL="50800" marR="25400">
+                  <a:tcPr marL="50800" marR="25400" marT="12700" marB="12700" anchor="ctr">
                     <a:solidFill>
                       <a:srgbClr val="FFFFFF"/>
                     </a:solidFill>
@@ -13092,12 +14554,17 @@
                       </a:r>
                     </a:p>
                   </a:txBody>
-                  <a:tcPr anchor="ctr" marT="12700" marB="12700" marL="50800" marR="25400">
+                  <a:tcPr marL="50800" marR="25400" marT="12700" marB="12700" anchor="ctr">
                     <a:solidFill>
                       <a:srgbClr val="FFFFFF"/>
                     </a:solidFill>
                   </a:tcPr>
                 </a:tc>
+                <a:extLst>
+                  <a:ext uri="{0D108BD9-81ED-4DB2-BD59-A6C34878D82A}">
+                    <a16:rowId xmlns:a16="http://schemas.microsoft.com/office/drawing/2014/main" val="10003"/>
+                  </a:ext>
+                </a:extLst>
               </a:tr>
               <a:tr h="438912">
                 <a:tc>
@@ -13116,7 +14583,7 @@
                       </a:r>
                     </a:p>
                   </a:txBody>
-                  <a:tcPr anchor="ctr" marT="12700" marB="12700" marL="50800" marR="25400">
+                  <a:tcPr marL="50800" marR="25400" marT="12700" marB="12700" anchor="ctr">
                     <a:solidFill>
                       <a:srgbClr val="DEEBF7"/>
                     </a:solidFill>
@@ -13138,7 +14605,7 @@
                       </a:r>
                     </a:p>
                   </a:txBody>
-                  <a:tcPr anchor="ctr" marT="12700" marB="12700" marL="50800" marR="25400">
+                  <a:tcPr marL="50800" marR="25400" marT="12700" marB="12700" anchor="ctr">
                     <a:solidFill>
                       <a:srgbClr val="DEEBF7"/>
                     </a:solidFill>
@@ -13160,7 +14627,7 @@
                       </a:r>
                     </a:p>
                   </a:txBody>
-                  <a:tcPr anchor="ctr" marT="12700" marB="12700" marL="50800" marR="25400">
+                  <a:tcPr marL="50800" marR="25400" marT="12700" marB="12700" anchor="ctr">
                     <a:solidFill>
                       <a:srgbClr val="DEEBF7"/>
                     </a:solidFill>
@@ -13182,12 +14649,17 @@
                       </a:r>
                     </a:p>
                   </a:txBody>
-                  <a:tcPr anchor="ctr" marT="12700" marB="12700" marL="50800" marR="25400">
+                  <a:tcPr marL="50800" marR="25400" marT="12700" marB="12700" anchor="ctr">
                     <a:solidFill>
                       <a:srgbClr val="DEEBF7"/>
                     </a:solidFill>
                   </a:tcPr>
                 </a:tc>
+                <a:extLst>
+                  <a:ext uri="{0D108BD9-81ED-4DB2-BD59-A6C34878D82A}">
+                    <a16:rowId xmlns:a16="http://schemas.microsoft.com/office/drawing/2014/main" val="10004"/>
+                  </a:ext>
+                </a:extLst>
               </a:tr>
             </a:tbl>
           </a:graphicData>
@@ -13201,8 +14673,8 @@
         </p:nvSpPr>
         <p:spPr>
           <a:xfrm>
-            <a:off x="457200" y="6382512"/>
-            <a:ext cx="10972800" cy="274320"/>
+            <a:off x="2487880" y="6419686"/>
+            <a:ext cx="8009906" cy="246221"/>
           </a:xfrm>
           <a:prstGeom prst="rect">
             <a:avLst/>
@@ -13210,7 +14682,7 @@
           <a:noFill/>
         </p:spPr>
         <p:txBody>
-          <a:bodyPr wrap="none">
+          <a:bodyPr wrap="square">
             <a:spAutoFit/>
           </a:bodyPr>
           <a:lstStyle/>
@@ -13334,14 +14806,14 @@
           <p:nvPr/>
         </p:nvPicPr>
         <p:blipFill>
-          <a:blip r:embed="rId6"/>
+          <a:blip r:embed="rId4"/>
           <a:stretch>
             <a:fillRect/>
           </a:stretch>
         </p:blipFill>
         <p:spPr>
           <a:xfrm>
-            <a:off x="470915" y="1554480"/>
+            <a:off x="472440" y="1257597"/>
             <a:ext cx="11247120" cy="4972411"/>
           </a:xfrm>
           <a:prstGeom prst="rect">
@@ -13368,7 +14840,7 @@
 </file>
 
 <file path=ppt/slides/slide24.xml><?xml version="1.0" encoding="utf-8"?>
-<p:sld xmlns:a="http://schemas.openxmlformats.org/drawingml/2006/main" xmlns:p="http://schemas.openxmlformats.org/presentationml/2006/main" xmlns:r="http://schemas.openxmlformats.org/officeDocument/2006/relationships">
+<p:sld xmlns:a="http://schemas.openxmlformats.org/drawingml/2006/main" xmlns:r="http://schemas.openxmlformats.org/officeDocument/2006/relationships" xmlns:p="http://schemas.openxmlformats.org/presentationml/2006/main" show="0">
   <p:cSld>
     <p:spTree>
       <p:nvGrpSpPr>
@@ -13376,7 +14848,14 @@
         <p:cNvGrpSpPr/>
         <p:nvPr/>
       </p:nvGrpSpPr>
-      <p:grpSpPr/>
+      <p:grpSpPr>
+        <a:xfrm>
+          <a:off x="0" y="0"/>
+          <a:ext cx="0" cy="0"/>
+          <a:chOff x="0" y="0"/>
+          <a:chExt cx="0" cy="0"/>
+        </a:xfrm>
+      </p:grpSpPr>
       <p:sp>
         <p:nvSpPr>
           <p:cNvPr id="2" name="Título 1">
@@ -13406,7 +14885,7 @@
           <a:lstStyle/>
           <a:p>
             <a:r>
-              <a:rPr lang="pt-BR" dirty="0" sz="2400">
+              <a:rPr lang="pt-BR" sz="2400" dirty="0">
                 <a:solidFill>
                   <a:srgbClr val="810539"/>
                 </a:solidFill>
@@ -13536,7 +15015,7 @@
           <p:nvPr/>
         </p:nvPicPr>
         <p:blipFill>
-          <a:blip r:embed="rId3"/>
+          <a:blip r:embed="rId2"/>
           <a:stretch>
             <a:fillRect/>
           </a:stretch>
@@ -13560,7 +15039,7 @@
 </file>
 
 <file path=ppt/slides/slide25.xml><?xml version="1.0" encoding="utf-8"?>
-<p:sld xmlns:a="http://schemas.openxmlformats.org/drawingml/2006/main" xmlns:p="http://schemas.openxmlformats.org/presentationml/2006/main" xmlns:r="http://schemas.openxmlformats.org/officeDocument/2006/relationships">
+<p:sld xmlns:a="http://schemas.openxmlformats.org/drawingml/2006/main" xmlns:r="http://schemas.openxmlformats.org/officeDocument/2006/relationships" xmlns:p="http://schemas.openxmlformats.org/presentationml/2006/main">
   <p:cSld>
     <p:spTree>
       <p:nvGrpSpPr>
@@ -13568,7 +15047,14 @@
         <p:cNvGrpSpPr/>
         <p:nvPr/>
       </p:nvGrpSpPr>
-      <p:grpSpPr/>
+      <p:grpSpPr>
+        <a:xfrm>
+          <a:off x="0" y="0"/>
+          <a:ext cx="0" cy="0"/>
+          <a:chOff x="0" y="0"/>
+          <a:chExt cx="0" cy="0"/>
+        </a:xfrm>
+      </p:grpSpPr>
       <p:sp>
         <p:nvSpPr>
           <p:cNvPr id="2" name="Título 1">
@@ -13598,7 +15084,7 @@
           <a:lstStyle/>
           <a:p>
             <a:r>
-              <a:rPr lang="pt-BR" dirty="0" sz="2200">
+              <a:rPr lang="pt-BR" sz="2200" dirty="0">
                 <a:solidFill>
                   <a:srgbClr val="810539"/>
                 </a:solidFill>
@@ -13672,9 +15158,27 @@
                 <a:tableStyleId>{5C22544A-7EE6-4342-B048-85BDC9FD1C3A}</a:tableStyleId>
               </a:tblPr>
               <a:tblGrid>
-                <a:gridCol w="3657600"/>
-                <a:gridCol w="3931920"/>
-                <a:gridCol w="3474720"/>
+                <a:gridCol w="3657600">
+                  <a:extLst>
+                    <a:ext uri="{9D8B030D-6E8A-4147-A177-3AD203B41FA5}">
+                      <a16:colId xmlns:a16="http://schemas.microsoft.com/office/drawing/2014/main" val="20000"/>
+                    </a:ext>
+                  </a:extLst>
+                </a:gridCol>
+                <a:gridCol w="3931920">
+                  <a:extLst>
+                    <a:ext uri="{9D8B030D-6E8A-4147-A177-3AD203B41FA5}">
+                      <a16:colId xmlns:a16="http://schemas.microsoft.com/office/drawing/2014/main" val="20001"/>
+                    </a:ext>
+                  </a:extLst>
+                </a:gridCol>
+                <a:gridCol w="3474720">
+                  <a:extLst>
+                    <a:ext uri="{9D8B030D-6E8A-4147-A177-3AD203B41FA5}">
+                      <a16:colId xmlns:a16="http://schemas.microsoft.com/office/drawing/2014/main" val="20002"/>
+                    </a:ext>
+                  </a:extLst>
+                </a:gridCol>
               </a:tblGrid>
               <a:tr h="502920">
                 <a:tc>
@@ -13693,7 +15197,7 @@
                       </a:r>
                     </a:p>
                   </a:txBody>
-                  <a:tcPr anchor="ctr" marT="12700" marB="12700" marL="63500">
+                  <a:tcPr marL="63500" marT="12700" marB="12700" anchor="ctr">
                     <a:solidFill>
                       <a:srgbClr val="6B0F2A"/>
                     </a:solidFill>
@@ -13715,7 +15219,7 @@
                       </a:r>
                     </a:p>
                   </a:txBody>
-                  <a:tcPr anchor="ctr" marT="12700" marB="12700" marL="63500">
+                  <a:tcPr marL="63500" marT="12700" marB="12700" anchor="ctr">
                     <a:solidFill>
                       <a:srgbClr val="6B0F2A"/>
                     </a:solidFill>
@@ -13737,12 +15241,17 @@
                       </a:r>
                     </a:p>
                   </a:txBody>
-                  <a:tcPr anchor="ctr" marT="12700" marB="12700" marL="63500">
+                  <a:tcPr marL="63500" marT="12700" marB="12700" anchor="ctr">
                     <a:solidFill>
                       <a:srgbClr val="6B0F2A"/>
                     </a:solidFill>
                   </a:tcPr>
                 </a:tc>
+                <a:extLst>
+                  <a:ext uri="{0D108BD9-81ED-4DB2-BD59-A6C34878D82A}">
+                    <a16:rowId xmlns:a16="http://schemas.microsoft.com/office/drawing/2014/main" val="10000"/>
+                  </a:ext>
+                </a:extLst>
               </a:tr>
               <a:tr h="502920">
                 <a:tc>
@@ -13761,7 +15270,7 @@
                       </a:r>
                     </a:p>
                   </a:txBody>
-                  <a:tcPr anchor="ctr" marT="12700" marB="12700" marL="63500">
+                  <a:tcPr marL="63500" marT="12700" marB="12700" anchor="ctr">
                     <a:solidFill>
                       <a:srgbClr val="FFFFFF"/>
                     </a:solidFill>
@@ -13783,7 +15292,7 @@
                       </a:r>
                     </a:p>
                   </a:txBody>
-                  <a:tcPr anchor="ctr" marT="12700" marB="12700" marL="63500">
+                  <a:tcPr marL="63500" marT="12700" marB="12700" anchor="ctr">
                     <a:solidFill>
                       <a:srgbClr val="FFFFFF"/>
                     </a:solidFill>
@@ -13805,12 +15314,17 @@
                       </a:r>
                     </a:p>
                   </a:txBody>
-                  <a:tcPr anchor="ctr" marT="12700" marB="12700" marL="63500">
+                  <a:tcPr marL="63500" marT="12700" marB="12700" anchor="ctr">
                     <a:solidFill>
                       <a:srgbClr val="FFFFFF"/>
                     </a:solidFill>
                   </a:tcPr>
                 </a:tc>
+                <a:extLst>
+                  <a:ext uri="{0D108BD9-81ED-4DB2-BD59-A6C34878D82A}">
+                    <a16:rowId xmlns:a16="http://schemas.microsoft.com/office/drawing/2014/main" val="10001"/>
+                  </a:ext>
+                </a:extLst>
               </a:tr>
               <a:tr h="502920">
                 <a:tc>
@@ -13829,7 +15343,7 @@
                       </a:r>
                     </a:p>
                   </a:txBody>
-                  <a:tcPr anchor="ctr" marT="12700" marB="12700" marL="63500">
+                  <a:tcPr marL="63500" marT="12700" marB="12700" anchor="ctr">
                     <a:solidFill>
                       <a:srgbClr val="DEEBF7"/>
                     </a:solidFill>
@@ -13851,7 +15365,7 @@
                       </a:r>
                     </a:p>
                   </a:txBody>
-                  <a:tcPr anchor="ctr" marT="12700" marB="12700" marL="63500">
+                  <a:tcPr marL="63500" marT="12700" marB="12700" anchor="ctr">
                     <a:solidFill>
                       <a:srgbClr val="DEEBF7"/>
                     </a:solidFill>
@@ -13873,12 +15387,17 @@
                       </a:r>
                     </a:p>
                   </a:txBody>
-                  <a:tcPr anchor="ctr" marT="12700" marB="12700" marL="63500">
+                  <a:tcPr marL="63500" marT="12700" marB="12700" anchor="ctr">
                     <a:solidFill>
                       <a:srgbClr val="DEEBF7"/>
                     </a:solidFill>
                   </a:tcPr>
                 </a:tc>
+                <a:extLst>
+                  <a:ext uri="{0D108BD9-81ED-4DB2-BD59-A6C34878D82A}">
+                    <a16:rowId xmlns:a16="http://schemas.microsoft.com/office/drawing/2014/main" val="10002"/>
+                  </a:ext>
+                </a:extLst>
               </a:tr>
               <a:tr h="502920">
                 <a:tc>
@@ -13897,7 +15416,7 @@
                       </a:r>
                     </a:p>
                   </a:txBody>
-                  <a:tcPr anchor="ctr" marT="12700" marB="12700" marL="63500">
+                  <a:tcPr marL="63500" marT="12700" marB="12700" anchor="ctr">
                     <a:solidFill>
                       <a:srgbClr val="FFFFFF"/>
                     </a:solidFill>
@@ -13919,7 +15438,7 @@
                       </a:r>
                     </a:p>
                   </a:txBody>
-                  <a:tcPr anchor="ctr" marT="12700" marB="12700" marL="63500">
+                  <a:tcPr marL="63500" marT="12700" marB="12700" anchor="ctr">
                     <a:solidFill>
                       <a:srgbClr val="FFFFFF"/>
                     </a:solidFill>
@@ -13941,12 +15460,17 @@
                       </a:r>
                     </a:p>
                   </a:txBody>
-                  <a:tcPr anchor="ctr" marT="12700" marB="12700" marL="63500">
+                  <a:tcPr marL="63500" marT="12700" marB="12700" anchor="ctr">
                     <a:solidFill>
                       <a:srgbClr val="FFFFFF"/>
                     </a:solidFill>
                   </a:tcPr>
                 </a:tc>
+                <a:extLst>
+                  <a:ext uri="{0D108BD9-81ED-4DB2-BD59-A6C34878D82A}">
+                    <a16:rowId xmlns:a16="http://schemas.microsoft.com/office/drawing/2014/main" val="10003"/>
+                  </a:ext>
+                </a:extLst>
               </a:tr>
               <a:tr h="502920">
                 <a:tc>
@@ -13965,7 +15489,7 @@
                       </a:r>
                     </a:p>
                   </a:txBody>
-                  <a:tcPr anchor="ctr" marT="12700" marB="12700" marL="63500">
+                  <a:tcPr marL="63500" marT="12700" marB="12700" anchor="ctr">
                     <a:solidFill>
                       <a:srgbClr val="DEEBF7"/>
                     </a:solidFill>
@@ -13987,7 +15511,7 @@
                       </a:r>
                     </a:p>
                   </a:txBody>
-                  <a:tcPr anchor="ctr" marT="12700" marB="12700" marL="63500">
+                  <a:tcPr marL="63500" marT="12700" marB="12700" anchor="ctr">
                     <a:solidFill>
                       <a:srgbClr val="DEEBF7"/>
                     </a:solidFill>
@@ -14009,12 +15533,17 @@
                       </a:r>
                     </a:p>
                   </a:txBody>
-                  <a:tcPr anchor="ctr" marT="12700" marB="12700" marL="63500">
+                  <a:tcPr marL="63500" marT="12700" marB="12700" anchor="ctr">
                     <a:solidFill>
                       <a:srgbClr val="DEEBF7"/>
                     </a:solidFill>
                   </a:tcPr>
                 </a:tc>
+                <a:extLst>
+                  <a:ext uri="{0D108BD9-81ED-4DB2-BD59-A6C34878D82A}">
+                    <a16:rowId xmlns:a16="http://schemas.microsoft.com/office/drawing/2014/main" val="10004"/>
+                  </a:ext>
+                </a:extLst>
               </a:tr>
               <a:tr h="502920">
                 <a:tc>
@@ -14033,7 +15562,7 @@
                       </a:r>
                     </a:p>
                   </a:txBody>
-                  <a:tcPr anchor="ctr" marT="12700" marB="12700" marL="63500">
+                  <a:tcPr marL="63500" marT="12700" marB="12700" anchor="ctr">
                     <a:solidFill>
                       <a:srgbClr val="FFFFFF"/>
                     </a:solidFill>
@@ -14055,7 +15584,7 @@
                       </a:r>
                     </a:p>
                   </a:txBody>
-                  <a:tcPr anchor="ctr" marT="12700" marB="12700" marL="63500">
+                  <a:tcPr marL="63500" marT="12700" marB="12700" anchor="ctr">
                     <a:solidFill>
                       <a:srgbClr val="FFFFFF"/>
                     </a:solidFill>
@@ -14077,12 +15606,17 @@
                       </a:r>
                     </a:p>
                   </a:txBody>
-                  <a:tcPr anchor="ctr" marT="12700" marB="12700" marL="63500">
+                  <a:tcPr marL="63500" marT="12700" marB="12700" anchor="ctr">
                     <a:solidFill>
                       <a:srgbClr val="FFFFFF"/>
                     </a:solidFill>
                   </a:tcPr>
                 </a:tc>
+                <a:extLst>
+                  <a:ext uri="{0D108BD9-81ED-4DB2-BD59-A6C34878D82A}">
+                    <a16:rowId xmlns:a16="http://schemas.microsoft.com/office/drawing/2014/main" val="10005"/>
+                  </a:ext>
+                </a:extLst>
               </a:tr>
               <a:tr h="502920">
                 <a:tc>
@@ -14101,7 +15635,7 @@
                       </a:r>
                     </a:p>
                   </a:txBody>
-                  <a:tcPr anchor="ctr" marT="12700" marB="12700" marL="63500">
+                  <a:tcPr marL="63500" marT="12700" marB="12700" anchor="ctr">
                     <a:solidFill>
                       <a:srgbClr val="DEEBF7"/>
                     </a:solidFill>
@@ -14123,7 +15657,7 @@
                       </a:r>
                     </a:p>
                   </a:txBody>
-                  <a:tcPr anchor="ctr" marT="12700" marB="12700" marL="63500">
+                  <a:tcPr marL="63500" marT="12700" marB="12700" anchor="ctr">
                     <a:solidFill>
                       <a:srgbClr val="DEEBF7"/>
                     </a:solidFill>
@@ -14145,12 +15679,17 @@
                       </a:r>
                     </a:p>
                   </a:txBody>
-                  <a:tcPr anchor="ctr" marT="12700" marB="12700" marL="63500">
+                  <a:tcPr marL="63500" marT="12700" marB="12700" anchor="ctr">
                     <a:solidFill>
                       <a:srgbClr val="DEEBF7"/>
                     </a:solidFill>
                   </a:tcPr>
                 </a:tc>
+                <a:extLst>
+                  <a:ext uri="{0D108BD9-81ED-4DB2-BD59-A6C34878D82A}">
+                    <a16:rowId xmlns:a16="http://schemas.microsoft.com/office/drawing/2014/main" val="10006"/>
+                  </a:ext>
+                </a:extLst>
               </a:tr>
               <a:tr h="502920">
                 <a:tc>
@@ -14169,7 +15708,7 @@
                       </a:r>
                     </a:p>
                   </a:txBody>
-                  <a:tcPr anchor="ctr" marT="12700" marB="12700" marL="63500">
+                  <a:tcPr marL="63500" marT="12700" marB="12700" anchor="ctr">
                     <a:solidFill>
                       <a:srgbClr val="FFFFFF"/>
                     </a:solidFill>
@@ -14191,7 +15730,7 @@
                       </a:r>
                     </a:p>
                   </a:txBody>
-                  <a:tcPr anchor="ctr" marT="12700" marB="12700" marL="63500">
+                  <a:tcPr marL="63500" marT="12700" marB="12700" anchor="ctr">
                     <a:solidFill>
                       <a:srgbClr val="FFFFFF"/>
                     </a:solidFill>
@@ -14213,12 +15752,17 @@
                       </a:r>
                     </a:p>
                   </a:txBody>
-                  <a:tcPr anchor="ctr" marT="12700" marB="12700" marL="63500">
+                  <a:tcPr marL="63500" marT="12700" marB="12700" anchor="ctr">
                     <a:solidFill>
                       <a:srgbClr val="FFFFFF"/>
                     </a:solidFill>
                   </a:tcPr>
                 </a:tc>
+                <a:extLst>
+                  <a:ext uri="{0D108BD9-81ED-4DB2-BD59-A6C34878D82A}">
+                    <a16:rowId xmlns:a16="http://schemas.microsoft.com/office/drawing/2014/main" val="10007"/>
+                  </a:ext>
+                </a:extLst>
               </a:tr>
             </a:tbl>
           </a:graphicData>
@@ -14233,7 +15777,7 @@
         <p:spPr>
           <a:xfrm>
             <a:off x="548640" y="5623560"/>
-            <a:ext cx="11155680" cy="914400"/>
+            <a:ext cx="11155680" cy="292388"/>
           </a:xfrm>
           <a:prstGeom prst="rect">
             <a:avLst/>
@@ -14256,31 +15800,108 @@
               <a:buNone/>
             </a:pPr>
             <a:r>
-              <a:rPr b="1" sz="1300"/>
-              <a:t>Para que serve:  </a:t>
-            </a:r>
-            <a:r>
-              <a:rPr sz="1200"/>
-              <a:t>152 termos, definidos a priori pela literatura econômica. Substitui o LDA (não supervisionado) por categorias interpretáveis e auditáveis.</a:t>
-            </a:r>
-          </a:p>
-          <a:p>
-            <a:pPr>
-              <a:spcBef>
-                <a:spcPts val="0"/>
-              </a:spcBef>
-              <a:spcAft>
-                <a:spcPts val="600"/>
-              </a:spcAft>
-              <a:buNone/>
-            </a:pPr>
-            <a:r>
-              <a:rPr b="1" sz="1300"/>
-              <a:t>Análise de ablação:  </a:t>
-            </a:r>
-            <a:r>
-              <a:rPr sz="1200"/>
-              <a:t>remove-se uma categoria por vez e mede-se o impacto — a de Sanções/Navegação foi a mais informativa (−3,68 pp de acurácia).</a:t>
+              <a:rPr sz="1300" b="1" dirty="0"/>
+              <a:t>Para </a:t>
+            </a:r>
+            <a:r>
+              <a:rPr sz="1300" b="1" dirty="0" err="1"/>
+              <a:t>que</a:t>
+            </a:r>
+            <a:r>
+              <a:rPr sz="1300" b="1" dirty="0"/>
+              <a:t> serve:  </a:t>
+            </a:r>
+            <a:r>
+              <a:rPr sz="1200" dirty="0"/>
+              <a:t>152 </a:t>
+            </a:r>
+            <a:r>
+              <a:rPr sz="1200" dirty="0" err="1"/>
+              <a:t>termos</a:t>
+            </a:r>
+            <a:r>
+              <a:rPr sz="1200" dirty="0"/>
+              <a:t>, </a:t>
+            </a:r>
+            <a:r>
+              <a:rPr sz="1200" dirty="0" err="1"/>
+              <a:t>definidos</a:t>
+            </a:r>
+            <a:r>
+              <a:rPr sz="1200" dirty="0"/>
+              <a:t> a priori pela </a:t>
+            </a:r>
+            <a:r>
+              <a:rPr sz="1200" dirty="0" err="1"/>
+              <a:t>literatura</a:t>
+            </a:r>
+            <a:r>
+              <a:rPr sz="1200" dirty="0"/>
+              <a:t> </a:t>
+            </a:r>
+            <a:r>
+              <a:rPr sz="1200" dirty="0" err="1"/>
+              <a:t>econômica</a:t>
+            </a:r>
+            <a:r>
+              <a:rPr sz="1200" dirty="0"/>
+              <a:t>. </a:t>
+            </a:r>
+            <a:r>
+              <a:rPr sz="1200" dirty="0" err="1"/>
+              <a:t>Substitui</a:t>
+            </a:r>
+            <a:r>
+              <a:rPr sz="1200" dirty="0"/>
+              <a:t> o LDA (</a:t>
+            </a:r>
+            <a:r>
+              <a:rPr sz="1200" dirty="0" err="1"/>
+              <a:t>não</a:t>
+            </a:r>
+            <a:r>
+              <a:rPr sz="1200" dirty="0"/>
+              <a:t> </a:t>
+            </a:r>
+            <a:r>
+              <a:rPr sz="1200" dirty="0" err="1"/>
+              <a:t>supervisionado</a:t>
+            </a:r>
+            <a:r>
+              <a:rPr sz="1200" dirty="0"/>
+              <a:t>) </a:t>
+            </a:r>
+            <a:r>
+              <a:rPr sz="1200" dirty="0" err="1"/>
+              <a:t>por</a:t>
+            </a:r>
+            <a:r>
+              <a:rPr sz="1200" dirty="0"/>
+              <a:t> </a:t>
+            </a:r>
+            <a:r>
+              <a:rPr sz="1200" dirty="0" err="1"/>
+              <a:t>categorias</a:t>
+            </a:r>
+            <a:r>
+              <a:rPr sz="1200" dirty="0"/>
+              <a:t> </a:t>
+            </a:r>
+            <a:r>
+              <a:rPr sz="1200" dirty="0" err="1"/>
+              <a:t>interpretáveis</a:t>
+            </a:r>
+            <a:r>
+              <a:rPr sz="1200" dirty="0"/>
+              <a:t> e </a:t>
+            </a:r>
+            <a:r>
+              <a:rPr sz="1200" dirty="0" err="1"/>
+              <a:t>auditáveis</a:t>
+            </a:r>
+            <a:r>
+              <a:rPr sz="1200" dirty="0"/>
+              <a:t>.</a:t>
             </a:r>
           </a:p>
         </p:txBody>
@@ -14294,7 +15915,7 @@
 </file>
 
 <file path=ppt/slides/slide26.xml><?xml version="1.0" encoding="utf-8"?>
-<p:sld xmlns:a="http://schemas.openxmlformats.org/drawingml/2006/main" xmlns:p="http://schemas.openxmlformats.org/presentationml/2006/main" xmlns:r="http://schemas.openxmlformats.org/officeDocument/2006/relationships">
+<p:sld xmlns:a="http://schemas.openxmlformats.org/drawingml/2006/main" xmlns:r="http://schemas.openxmlformats.org/officeDocument/2006/relationships" xmlns:p="http://schemas.openxmlformats.org/presentationml/2006/main">
   <p:cSld>
     <p:spTree>
       <p:nvGrpSpPr>
@@ -14302,7 +15923,14 @@
         <p:cNvGrpSpPr/>
         <p:nvPr/>
       </p:nvGrpSpPr>
-      <p:grpSpPr/>
+      <p:grpSpPr>
+        <a:xfrm>
+          <a:off x="0" y="0"/>
+          <a:ext cx="0" cy="0"/>
+          <a:chOff x="0" y="0"/>
+          <a:chExt cx="0" cy="0"/>
+        </a:xfrm>
+      </p:grpSpPr>
       <p:sp>
         <p:nvSpPr>
           <p:cNvPr id="2" name="Título 1">
@@ -14332,7 +15960,7 @@
           <a:lstStyle/>
           <a:p>
             <a:r>
-              <a:rPr lang="pt-BR" dirty="0" sz="2400">
+              <a:rPr lang="pt-BR" sz="2400" dirty="0">
                 <a:solidFill>
                   <a:srgbClr val="810539"/>
                 </a:solidFill>
@@ -14462,7 +16090,7 @@
           <p:nvPr/>
         </p:nvPicPr>
         <p:blipFill>
-          <a:blip r:embed="rId3"/>
+          <a:blip r:embed="rId2"/>
           <a:stretch>
             <a:fillRect/>
           </a:stretch>
@@ -14486,7 +16114,7 @@
 </file>
 
 <file path=ppt/slides/slide27.xml><?xml version="1.0" encoding="utf-8"?>
-<p:sld xmlns:a="http://schemas.openxmlformats.org/drawingml/2006/main" xmlns:p="http://schemas.openxmlformats.org/presentationml/2006/main" xmlns:r="http://schemas.openxmlformats.org/officeDocument/2006/relationships">
+<p:sld xmlns:a="http://schemas.openxmlformats.org/drawingml/2006/main" xmlns:r="http://schemas.openxmlformats.org/officeDocument/2006/relationships" xmlns:p="http://schemas.openxmlformats.org/presentationml/2006/main">
   <p:cSld>
     <p:spTree>
       <p:nvGrpSpPr>
@@ -14494,7 +16122,14 @@
         <p:cNvGrpSpPr/>
         <p:nvPr/>
       </p:nvGrpSpPr>
-      <p:grpSpPr/>
+      <p:grpSpPr>
+        <a:xfrm>
+          <a:off x="0" y="0"/>
+          <a:ext cx="0" cy="0"/>
+          <a:chOff x="0" y="0"/>
+          <a:chExt cx="0" cy="0"/>
+        </a:xfrm>
+      </p:grpSpPr>
       <p:sp>
         <p:nvSpPr>
           <p:cNvPr id="2" name="Título 1">
@@ -14524,7 +16159,7 @@
           <a:lstStyle/>
           <a:p>
             <a:r>
-              <a:rPr lang="pt-BR" dirty="0" sz="2400">
+              <a:rPr lang="pt-BR" sz="2400" dirty="0">
                 <a:solidFill>
                   <a:srgbClr val="810539"/>
                 </a:solidFill>
@@ -14635,7 +16270,7 @@
               <a:buNone/>
             </a:pPr>
             <a:r>
-              <a:rPr b="1" sz="1400"/>
+              <a:rPr sz="1400" b="1"/>
               <a:t>Por que cronológico (nunca aleatório):  </a:t>
             </a:r>
             <a:r>
@@ -14654,7 +16289,7 @@
               <a:buNone/>
             </a:pPr>
             <a:r>
-              <a:rPr b="1" sz="1400"/>
+              <a:rPr sz="1400" b="1"/>
               <a:t>Treino (60%):  </a:t>
             </a:r>
             <a:r>
@@ -14673,7 +16308,7 @@
               <a:buNone/>
             </a:pPr>
             <a:r>
-              <a:rPr b="1" sz="1400"/>
+              <a:rPr sz="1400" b="1"/>
               <a:t>Teste (25% · 653 pregões):  </a:t>
             </a:r>
             <a:r>
@@ -14692,7 +16327,7 @@
               <a:buNone/>
             </a:pPr>
             <a:r>
-              <a:rPr b="1" sz="1400"/>
+              <a:rPr sz="1400" b="1"/>
               <a:t>Walk-forward:  </a:t>
             </a:r>
             <a:r>
@@ -14817,8 +16452,8 @@
         </p:nvSpPr>
         <p:spPr>
           <a:xfrm>
-            <a:off x="548640" y="1554480"/>
-            <a:ext cx="5669280" cy="4754880"/>
+            <a:off x="548639" y="1554480"/>
+            <a:ext cx="9070373" cy="2631490"/>
           </a:xfrm>
           <a:prstGeom prst="rect">
             <a:avLst/>
@@ -14841,12 +16476,56 @@
               <a:buNone/>
             </a:pPr>
             <a:r>
-              <a:rPr b="1" sz="1450"/>
-              <a:t>Saída:  </a:t>
-            </a:r>
-            <a:r>
-              <a:rPr sz="1300"/>
-              <a:t>direção do pregão seguinte (alta/baixa).</a:t>
+              <a:rPr sz="1450" b="1" dirty="0" err="1"/>
+              <a:t>Saída</a:t>
+            </a:r>
+            <a:r>
+              <a:rPr sz="1450" b="1" dirty="0"/>
+              <a:t>:  </a:t>
+            </a:r>
+            <a:r>
+              <a:rPr lang="pt-BR" sz="1300" dirty="0"/>
+              <a:t>D</a:t>
+            </a:r>
+            <a:r>
+              <a:rPr sz="1300" dirty="0" err="1"/>
+              <a:t>ireção</a:t>
+            </a:r>
+            <a:r>
+              <a:rPr sz="1300" dirty="0"/>
+              <a:t> do </a:t>
+            </a:r>
+            <a:r>
+              <a:rPr sz="1300" dirty="0" err="1"/>
+              <a:t>pregão</a:t>
+            </a:r>
+            <a:r>
+              <a:rPr sz="1300" dirty="0"/>
+              <a:t> </a:t>
+            </a:r>
+            <a:r>
+              <a:rPr sz="1300" dirty="0" err="1"/>
+              <a:t>seguinte</a:t>
+            </a:r>
+            <a:r>
+              <a:rPr sz="1300" dirty="0"/>
+              <a:t> (</a:t>
+            </a:r>
+            <a:r>
+              <a:rPr sz="1300" dirty="0" err="1"/>
+              <a:t>alta</a:t>
+            </a:r>
+            <a:r>
+              <a:rPr sz="1300" dirty="0"/>
+              <a:t>/</a:t>
+            </a:r>
+            <a:r>
+              <a:rPr sz="1300" dirty="0" err="1"/>
+              <a:t>baixa</a:t>
+            </a:r>
+            <a:r>
+              <a:rPr sz="1300" dirty="0"/>
+              <a:t>).</a:t>
             </a:r>
           </a:p>
           <a:p>
@@ -14860,12 +16539,48 @@
               <a:buNone/>
             </a:pPr>
             <a:r>
-              <a:rPr b="1" sz="1450"/>
-              <a:t>Acurácia:  </a:t>
-            </a:r>
-            <a:r>
-              <a:rPr sz="1300"/>
-              <a:t>% de acertos. Só vale se superar a classe majoritária (baseline).</a:t>
+              <a:rPr sz="1450" b="1" dirty="0" err="1"/>
+              <a:t>Acurácia</a:t>
+            </a:r>
+            <a:r>
+              <a:rPr sz="1450" b="1" dirty="0"/>
+              <a:t>:  </a:t>
+            </a:r>
+            <a:r>
+              <a:rPr sz="1300" b="1" dirty="0"/>
+              <a:t>% de </a:t>
+            </a:r>
+            <a:r>
+              <a:rPr sz="1300" b="1" dirty="0" err="1"/>
+              <a:t>acertos</a:t>
+            </a:r>
+            <a:r>
+              <a:rPr sz="1300" dirty="0"/>
+              <a:t>. Só vale se </a:t>
+            </a:r>
+            <a:r>
+              <a:rPr sz="1300" dirty="0" err="1"/>
+              <a:t>superar</a:t>
+            </a:r>
+            <a:r>
+              <a:rPr sz="1300" dirty="0"/>
+              <a:t> a </a:t>
+            </a:r>
+            <a:r>
+              <a:rPr sz="1300" dirty="0" err="1"/>
+              <a:t>classe</a:t>
+            </a:r>
+            <a:r>
+              <a:rPr sz="1300" dirty="0"/>
+              <a:t> </a:t>
+            </a:r>
+            <a:r>
+              <a:rPr sz="1300" dirty="0" err="1"/>
+              <a:t>majoritária</a:t>
+            </a:r>
+            <a:r>
+              <a:rPr sz="1300" dirty="0"/>
+              <a:t> (baseline).</a:t>
             </a:r>
           </a:p>
           <a:p>
@@ -14879,13 +16594,82 @@
               <a:buNone/>
             </a:pPr>
             <a:r>
-              <a:rPr b="1" sz="1450"/>
-              <a:t>Precisão:  </a:t>
-            </a:r>
-            <a:r>
-              <a:rPr sz="1300"/>
-              <a:t>dos pregões previstos como alta, quantos foram realmente alta.</a:t>
-            </a:r>
+              <a:rPr sz="1450" b="1" dirty="0" err="1"/>
+              <a:t>Precisão</a:t>
+            </a:r>
+            <a:r>
+              <a:rPr sz="1450" b="1" dirty="0"/>
+              <a:t>:  </a:t>
+            </a:r>
+            <a:r>
+              <a:rPr sz="1300" dirty="0"/>
+              <a:t>dos </a:t>
+            </a:r>
+            <a:r>
+              <a:rPr sz="1300" dirty="0" err="1"/>
+              <a:t>pregões</a:t>
+            </a:r>
+            <a:r>
+              <a:rPr sz="1300" dirty="0"/>
+              <a:t> </a:t>
+            </a:r>
+            <a:r>
+              <a:rPr sz="1300" dirty="0" err="1"/>
+              <a:t>previstos</a:t>
+            </a:r>
+            <a:r>
+              <a:rPr sz="1300" dirty="0"/>
+              <a:t> </a:t>
+            </a:r>
+            <a:r>
+              <a:rPr sz="1300" dirty="0" err="1"/>
+              <a:t>como</a:t>
+            </a:r>
+            <a:r>
+              <a:rPr sz="1300" dirty="0"/>
+              <a:t> </a:t>
+            </a:r>
+            <a:r>
+              <a:rPr sz="1300" dirty="0" err="1"/>
+              <a:t>alta</a:t>
+            </a:r>
+            <a:r>
+              <a:rPr sz="1300" dirty="0"/>
+              <a:t>, </a:t>
+            </a:r>
+            <a:r>
+              <a:rPr sz="1300" b="1" dirty="0" err="1"/>
+              <a:t>quantos</a:t>
+            </a:r>
+            <a:r>
+              <a:rPr sz="1300" b="1" dirty="0"/>
+              <a:t> </a:t>
+            </a:r>
+            <a:r>
+              <a:rPr sz="1300" b="1" dirty="0" err="1"/>
+              <a:t>foram</a:t>
+            </a:r>
+            <a:r>
+              <a:rPr sz="1300" b="1" dirty="0"/>
+              <a:t> </a:t>
+            </a:r>
+            <a:r>
+              <a:rPr sz="1300" b="1" dirty="0" err="1"/>
+              <a:t>realmente</a:t>
+            </a:r>
+            <a:r>
+              <a:rPr sz="1300" b="1" dirty="0"/>
+              <a:t> </a:t>
+            </a:r>
+            <a:r>
+              <a:rPr sz="1300" b="1" dirty="0" err="1"/>
+              <a:t>alta</a:t>
+            </a:r>
+            <a:r>
+              <a:rPr sz="1300" dirty="0" err="1"/>
+              <a:t>.</a:t>
+            </a:r>
+            <a:endParaRPr sz="1300" dirty="0"/>
           </a:p>
           <a:p>
             <a:pPr>
@@ -14898,12 +16682,52 @@
               <a:buNone/>
             </a:pPr>
             <a:r>
-              <a:rPr b="1" sz="1450"/>
-              <a:t>Revocação (recall):  </a:t>
-            </a:r>
-            <a:r>
-              <a:rPr sz="1300"/>
-              <a:t>das altas reais, quantas o modelo capturou.</a:t>
+              <a:rPr sz="1450" b="1" dirty="0" err="1"/>
+              <a:t>Revocação</a:t>
+            </a:r>
+            <a:r>
+              <a:rPr sz="1450" b="1" dirty="0"/>
+              <a:t> (recall):  </a:t>
+            </a:r>
+            <a:r>
+              <a:rPr sz="1300" dirty="0"/>
+              <a:t>das </a:t>
+            </a:r>
+            <a:r>
+              <a:rPr sz="1300" dirty="0" err="1"/>
+              <a:t>altas</a:t>
+            </a:r>
+            <a:r>
+              <a:rPr sz="1300" dirty="0"/>
+              <a:t> reais,</a:t>
+            </a:r>
+            <a:r>
+              <a:rPr sz="1300" b="1" dirty="0"/>
+              <a:t> </a:t>
+            </a:r>
+            <a:r>
+              <a:rPr sz="1300" b="1" dirty="0" err="1"/>
+              <a:t>quantas</a:t>
+            </a:r>
+            <a:r>
+              <a:rPr sz="1300" b="1" dirty="0"/>
+              <a:t> o </a:t>
+            </a:r>
+            <a:r>
+              <a:rPr sz="1300" b="1" dirty="0" err="1"/>
+              <a:t>modelo</a:t>
+            </a:r>
+            <a:r>
+              <a:rPr sz="1300" b="1" dirty="0"/>
+              <a:t> </a:t>
+            </a:r>
+            <a:r>
+              <a:rPr sz="1300" b="1" dirty="0" err="1"/>
+              <a:t>capturou</a:t>
+            </a:r>
+            <a:r>
+              <a:rPr sz="1300" b="1" dirty="0"/>
+              <a:t>.</a:t>
             </a:r>
           </a:p>
           <a:p>
@@ -14917,12 +16741,83 @@
               <a:buNone/>
             </a:pPr>
             <a:r>
-              <a:rPr b="1" sz="1450"/>
+              <a:rPr sz="1450" b="1" dirty="0"/>
               <a:t>F1-Score:  </a:t>
             </a:r>
             <a:r>
-              <a:rPr sz="1300"/>
-              <a:t>média harmônica de precisão e revocação (desmascara viés de classe).</a:t>
+              <a:rPr lang="pt-BR" sz="1300" b="1" dirty="0"/>
+              <a:t>M</a:t>
+            </a:r>
+            <a:r>
+              <a:rPr sz="1300" b="1" dirty="0" err="1"/>
+              <a:t>édia</a:t>
+            </a:r>
+            <a:r>
+              <a:rPr sz="1300" b="1" dirty="0"/>
+              <a:t> </a:t>
+            </a:r>
+            <a:r>
+              <a:rPr sz="1300" b="1" dirty="0" err="1"/>
+              <a:t>harmônica</a:t>
+            </a:r>
+            <a:r>
+              <a:rPr sz="1300" b="1" dirty="0"/>
+              <a:t> de </a:t>
+            </a:r>
+            <a:r>
+              <a:rPr sz="1300" b="1" dirty="0" err="1"/>
+              <a:t>precisão</a:t>
+            </a:r>
+            <a:r>
+              <a:rPr sz="1300" dirty="0"/>
+              <a:t> e </a:t>
+            </a:r>
+            <a:r>
+              <a:rPr sz="1300" b="1" dirty="0" err="1"/>
+              <a:t>revocação</a:t>
+            </a:r>
+            <a:r>
+              <a:rPr sz="1300" dirty="0"/>
+              <a:t> (</a:t>
+            </a:r>
+            <a:r>
+              <a:rPr sz="1300" dirty="0" err="1"/>
+              <a:t>desmascara</a:t>
+            </a:r>
+            <a:r>
+              <a:rPr sz="1300" dirty="0"/>
+              <a:t> </a:t>
+            </a:r>
+            <a:r>
+              <a:rPr sz="1300" dirty="0" err="1"/>
+              <a:t>viés</a:t>
+            </a:r>
+            <a:r>
+              <a:rPr sz="1300" dirty="0"/>
+              <a:t> de </a:t>
+            </a:r>
+            <a:r>
+              <a:rPr sz="1300" dirty="0" err="1"/>
+              <a:t>classe</a:t>
+            </a:r>
+            <a:r>
+              <a:rPr sz="1300" dirty="0"/>
+              <a:t>).</a:t>
+            </a:r>
+          </a:p>
+          <a:p>
+            <a:pPr>
+              <a:spcAft>
+                <a:spcPts val="1300"/>
+              </a:spcAft>
+            </a:pPr>
+            <a:r>
+              <a:rPr lang="pt-BR" sz="1450" b="1" dirty="0"/>
+              <a:t>Validação:  </a:t>
+            </a:r>
+            <a:r>
+              <a:rPr lang="pt-BR" sz="1300" dirty="0"/>
+              <a:t>Split cronológico 60/15/25; teste de 653 pregões consultado uma única vez.</a:t>
             </a:r>
           </a:p>
           <a:p>
@@ -14935,94 +16830,7 @@
               </a:spcAft>
               <a:buNone/>
             </a:pPr>
-            <a:r>
-              <a:rPr b="1" sz="1450"/>
-              <a:t>AUC-ROC:  </a:t>
-            </a:r>
-            <a:r>
-              <a:rPr sz="1300"/>
-              <a:t>capacidade de ordenar alta × baixa; 0,5 = acaso, 1,0 = perfeito.</a:t>
-            </a:r>
-          </a:p>
-        </p:txBody>
-      </p:sp>
-      <p:sp>
-        <p:nvSpPr>
-          <p:cNvPr id="7" name="TextBox 6"/>
-          <p:cNvSpPr txBox="1"/>
-          <p:nvPr/>
-        </p:nvSpPr>
-        <p:spPr>
-          <a:xfrm>
-            <a:off x="6355080" y="1554480"/>
-            <a:ext cx="5577840" cy="4754880"/>
-          </a:xfrm>
-          <a:prstGeom prst="rect">
-            <a:avLst/>
-          </a:prstGeom>
-          <a:noFill/>
-        </p:spPr>
-        <p:txBody>
-          <a:bodyPr wrap="square">
-            <a:spAutoFit/>
-          </a:bodyPr>
-          <a:lstStyle/>
-          <a:p>
-            <a:pPr>
-              <a:spcBef>
-                <a:spcPts val="0"/>
-              </a:spcBef>
-              <a:spcAft>
-                <a:spcPts val="1300"/>
-              </a:spcAft>
-              <a:buNone/>
-            </a:pPr>
-            <a:r>
-              <a:rPr b="1" sz="1450"/>
-              <a:t>Volatilidade:  </a:t>
-            </a:r>
-            <a:r>
-              <a:rPr sz="1300"/>
-              <a:t>correlação, MAE, RMSE, QLIKE, R² e coeficiente de Mincer-Zarnowitz.</a:t>
-            </a:r>
-          </a:p>
-          <a:p>
-            <a:pPr>
-              <a:spcBef>
-                <a:spcPts val="0"/>
-              </a:spcBef>
-              <a:spcAft>
-                <a:spcPts val="1300"/>
-              </a:spcAft>
-              <a:buNone/>
-            </a:pPr>
-            <a:r>
-              <a:rPr b="1" sz="1450"/>
-              <a:t>Significância:  </a:t>
-            </a:r>
-            <a:r>
-              <a:rPr sz="1300"/>
-              <a:t>teste binomial (vs. acaso), McNemar (pareado entre modelos) e intervalo de confiança da proporção.</a:t>
-            </a:r>
-          </a:p>
-          <a:p>
-            <a:pPr>
-              <a:spcBef>
-                <a:spcPts val="0"/>
-              </a:spcBef>
-              <a:spcAft>
-                <a:spcPts val="1300"/>
-              </a:spcAft>
-              <a:buNone/>
-            </a:pPr>
-            <a:r>
-              <a:rPr b="1" sz="1450"/>
-              <a:t>Validação:  </a:t>
-            </a:r>
-            <a:r>
-              <a:rPr sz="1300"/>
-              <a:t>split cronológico 60/15/25 + walk-forward; teste de 653 pregões consultado uma única vez.</a:t>
-            </a:r>
+            <a:endParaRPr sz="1300" dirty="0"/>
           </a:p>
         </p:txBody>
       </p:sp>
@@ -15424,7 +17232,7 @@
         <p:spPr>
           <a:xfrm>
             <a:off x="822960" y="1645920"/>
-            <a:ext cx="10424160" cy="4114800"/>
+            <a:ext cx="10424160" cy="2015936"/>
           </a:xfrm>
           <a:prstGeom prst="rect">
             <a:avLst/>
@@ -15447,7 +17255,7 @@
               <a:buNone/>
             </a:pPr>
             <a:r>
-              <a:rPr sz="1700">
+              <a:rPr sz="1700" dirty="0">
                 <a:solidFill>
                   <a:srgbClr val="2E75B6"/>
                 </a:solidFill>
@@ -15455,20 +17263,84 @@
               <a:t>■  </a:t>
             </a:r>
             <a:r>
-              <a:rPr b="1" sz="1700">
+              <a:rPr sz="1700" b="1" dirty="0">
                 <a:solidFill>
                   <a:srgbClr val="2E75B6"/>
                 </a:solidFill>
               </a:rPr>
-              <a:t>Corpus coletado:  </a:t>
-            </a:r>
-            <a:r>
-              <a:rPr sz="1450">
+              <a:t>Corpus </a:t>
+            </a:r>
+            <a:r>
+              <a:rPr sz="1700" b="1" dirty="0" err="1">
+                <a:solidFill>
+                  <a:srgbClr val="2E75B6"/>
+                </a:solidFill>
+              </a:rPr>
+              <a:t>coletado</a:t>
+            </a:r>
+            <a:r>
+              <a:rPr sz="1700" b="1" dirty="0">
+                <a:solidFill>
+                  <a:srgbClr val="2E75B6"/>
+                </a:solidFill>
+              </a:rPr>
+              <a:t>:  </a:t>
+            </a:r>
+            <a:r>
+              <a:rPr sz="1450" dirty="0">
                 <a:solidFill>
                   <a:srgbClr val="333333"/>
                 </a:solidFill>
               </a:rPr>
-              <a:t>261.960 manchetes datadas de 5 portais (2016–2026).</a:t>
+              <a:t>261.960 </a:t>
+            </a:r>
+            <a:r>
+              <a:rPr sz="1450" dirty="0" err="1">
+                <a:solidFill>
+                  <a:srgbClr val="333333"/>
+                </a:solidFill>
+              </a:rPr>
+              <a:t>manchetes</a:t>
+            </a:r>
+            <a:r>
+              <a:rPr sz="1450" dirty="0">
+                <a:solidFill>
+                  <a:srgbClr val="333333"/>
+                </a:solidFill>
+              </a:rPr>
+              <a:t> </a:t>
+            </a:r>
+            <a:r>
+              <a:rPr sz="1450" dirty="0" err="1">
+                <a:solidFill>
+                  <a:srgbClr val="333333"/>
+                </a:solidFill>
+              </a:rPr>
+              <a:t>datadas</a:t>
+            </a:r>
+            <a:r>
+              <a:rPr sz="1450" dirty="0">
+                <a:solidFill>
+                  <a:srgbClr val="333333"/>
+                </a:solidFill>
+              </a:rPr>
+              <a:t> de 5 </a:t>
+            </a:r>
+            <a:r>
+              <a:rPr sz="1450" dirty="0" err="1">
+                <a:solidFill>
+                  <a:srgbClr val="333333"/>
+                </a:solidFill>
+              </a:rPr>
+              <a:t>portais</a:t>
+            </a:r>
+            <a:r>
+              <a:rPr sz="1450" dirty="0">
+                <a:solidFill>
+                  <a:srgbClr val="333333"/>
+                </a:solidFill>
+              </a:rPr>
+              <a:t> (2016–2026).</a:t>
             </a:r>
           </a:p>
           <a:p>
@@ -15482,7 +17354,7 @@
               <a:buNone/>
             </a:pPr>
             <a:r>
-              <a:rPr sz="1700">
+              <a:rPr sz="1700" dirty="0">
                 <a:solidFill>
                   <a:srgbClr val="1E7E34"/>
                 </a:solidFill>
@@ -15490,20 +17362,124 @@
               <a:t>■  </a:t>
             </a:r>
             <a:r>
-              <a:rPr b="1" sz="1700">
+              <a:rPr sz="1700" b="1" dirty="0" err="1">
                 <a:solidFill>
                   <a:srgbClr val="1E7E34"/>
                 </a:solidFill>
               </a:rPr>
-              <a:t>Ruído branco (~85%):  </a:t>
-            </a:r>
-            <a:r>
-              <a:rPr sz="1450">
+              <a:t>Ruído</a:t>
+            </a:r>
+            <a:r>
+              <a:rPr sz="1700" b="1" dirty="0">
+                <a:solidFill>
+                  <a:srgbClr val="1E7E34"/>
+                </a:solidFill>
+              </a:rPr>
+              <a:t> </a:t>
+            </a:r>
+            <a:r>
+              <a:rPr sz="1700" b="1" dirty="0" err="1">
+                <a:solidFill>
+                  <a:srgbClr val="1E7E34"/>
+                </a:solidFill>
+              </a:rPr>
+              <a:t>branco</a:t>
+            </a:r>
+            <a:r>
+              <a:rPr sz="1700" b="1" dirty="0">
+                <a:solidFill>
+                  <a:srgbClr val="1E7E34"/>
+                </a:solidFill>
+              </a:rPr>
+              <a:t> (~85%):  </a:t>
+            </a:r>
+            <a:r>
+              <a:rPr sz="1450" dirty="0">
                 <a:solidFill>
                   <a:srgbClr val="333333"/>
                 </a:solidFill>
               </a:rPr>
-              <a:t>a maioria das notícias não desloca o preço da PETR4 de forma anormal.</a:t>
+              <a:t>a </a:t>
+            </a:r>
+            <a:r>
+              <a:rPr sz="1450" dirty="0" err="1">
+                <a:solidFill>
+                  <a:srgbClr val="333333"/>
+                </a:solidFill>
+              </a:rPr>
+              <a:t>maioria</a:t>
+            </a:r>
+            <a:r>
+              <a:rPr sz="1450" dirty="0">
+                <a:solidFill>
+                  <a:srgbClr val="333333"/>
+                </a:solidFill>
+              </a:rPr>
+              <a:t> das </a:t>
+            </a:r>
+            <a:r>
+              <a:rPr sz="1450" dirty="0" err="1">
+                <a:solidFill>
+                  <a:srgbClr val="333333"/>
+                </a:solidFill>
+              </a:rPr>
+              <a:t>notícias</a:t>
+            </a:r>
+            <a:r>
+              <a:rPr sz="1450" dirty="0">
+                <a:solidFill>
+                  <a:srgbClr val="333333"/>
+                </a:solidFill>
+              </a:rPr>
+              <a:t> </a:t>
+            </a:r>
+            <a:r>
+              <a:rPr sz="1450" dirty="0" err="1">
+                <a:solidFill>
+                  <a:srgbClr val="333333"/>
+                </a:solidFill>
+              </a:rPr>
+              <a:t>não</a:t>
+            </a:r>
+            <a:r>
+              <a:rPr sz="1450" dirty="0">
+                <a:solidFill>
+                  <a:srgbClr val="333333"/>
+                </a:solidFill>
+              </a:rPr>
+              <a:t> </a:t>
+            </a:r>
+            <a:r>
+              <a:rPr sz="1450" dirty="0" err="1">
+                <a:solidFill>
+                  <a:srgbClr val="333333"/>
+                </a:solidFill>
+              </a:rPr>
+              <a:t>desloca</a:t>
+            </a:r>
+            <a:r>
+              <a:rPr sz="1450" dirty="0">
+                <a:solidFill>
+                  <a:srgbClr val="333333"/>
+                </a:solidFill>
+              </a:rPr>
+              <a:t> o </a:t>
+            </a:r>
+            <a:r>
+              <a:rPr sz="1450" dirty="0" err="1">
+                <a:solidFill>
+                  <a:srgbClr val="333333"/>
+                </a:solidFill>
+              </a:rPr>
+              <a:t>preço</a:t>
+            </a:r>
+            <a:r>
+              <a:rPr sz="1450" dirty="0">
+                <a:solidFill>
+                  <a:srgbClr val="333333"/>
+                </a:solidFill>
+              </a:rPr>
+              <a:t> da PETR4 de forma anormal.</a:t>
             </a:r>
           </a:p>
           <a:p>
@@ -15517,7 +17493,7 @@
               <a:buNone/>
             </a:pPr>
             <a:r>
-              <a:rPr sz="1700">
+              <a:rPr sz="1700" dirty="0">
                 <a:solidFill>
                   <a:srgbClr val="E87D0D"/>
                 </a:solidFill>
@@ -15525,20 +17501,164 @@
               <a:t>■  </a:t>
             </a:r>
             <a:r>
-              <a:rPr b="1" sz="1700">
+              <a:rPr sz="1700" b="1" dirty="0">
                 <a:solidFill>
                   <a:srgbClr val="E87D0D"/>
                 </a:solidFill>
               </a:rPr>
-              <a:t>Choque informacional (~15%):  </a:t>
-            </a:r>
-            <a:r>
-              <a:rPr sz="1450">
+              <a:t>Choque </a:t>
+            </a:r>
+            <a:r>
+              <a:rPr sz="1700" b="1" dirty="0" err="1">
+                <a:solidFill>
+                  <a:srgbClr val="E87D0D"/>
+                </a:solidFill>
+              </a:rPr>
+              <a:t>informacional</a:t>
+            </a:r>
+            <a:r>
+              <a:rPr sz="1700" b="1" dirty="0">
+                <a:solidFill>
+                  <a:srgbClr val="E87D0D"/>
+                </a:solidFill>
+              </a:rPr>
+              <a:t> (~15%):  </a:t>
+            </a:r>
+            <a:r>
+              <a:rPr sz="1450" dirty="0">
                 <a:solidFill>
                   <a:srgbClr val="333333"/>
                 </a:solidFill>
               </a:rPr>
-              <a:t>as notícias que coincidem com rompimentos de estresse no GARCH — onde o sinal se concentra.</a:t>
+              <a:t>as </a:t>
+            </a:r>
+            <a:r>
+              <a:rPr sz="1450" dirty="0" err="1">
+                <a:solidFill>
+                  <a:srgbClr val="333333"/>
+                </a:solidFill>
+              </a:rPr>
+              <a:t>notícias</a:t>
+            </a:r>
+            <a:r>
+              <a:rPr sz="1450" dirty="0">
+                <a:solidFill>
+                  <a:srgbClr val="333333"/>
+                </a:solidFill>
+              </a:rPr>
+              <a:t> </a:t>
+            </a:r>
+            <a:r>
+              <a:rPr sz="1450" dirty="0" err="1">
+                <a:solidFill>
+                  <a:srgbClr val="333333"/>
+                </a:solidFill>
+              </a:rPr>
+              <a:t>que</a:t>
+            </a:r>
+            <a:r>
+              <a:rPr sz="1450" dirty="0">
+                <a:solidFill>
+                  <a:srgbClr val="333333"/>
+                </a:solidFill>
+              </a:rPr>
+              <a:t> </a:t>
+            </a:r>
+            <a:r>
+              <a:rPr sz="1450" dirty="0" err="1">
+                <a:solidFill>
+                  <a:srgbClr val="333333"/>
+                </a:solidFill>
+              </a:rPr>
+              <a:t>coincidem</a:t>
+            </a:r>
+            <a:r>
+              <a:rPr sz="1450" dirty="0">
+                <a:solidFill>
+                  <a:srgbClr val="333333"/>
+                </a:solidFill>
+              </a:rPr>
+              <a:t> com </a:t>
+            </a:r>
+            <a:r>
+              <a:rPr sz="1450" dirty="0" err="1">
+                <a:solidFill>
+                  <a:srgbClr val="333333"/>
+                </a:solidFill>
+              </a:rPr>
+              <a:t>rompimentos</a:t>
+            </a:r>
+            <a:r>
+              <a:rPr sz="1450" dirty="0">
+                <a:solidFill>
+                  <a:srgbClr val="333333"/>
+                </a:solidFill>
+              </a:rPr>
+              <a:t> de </a:t>
+            </a:r>
+            <a:r>
+              <a:rPr sz="1450" dirty="0" err="1">
+                <a:solidFill>
+                  <a:srgbClr val="333333"/>
+                </a:solidFill>
+              </a:rPr>
+              <a:t>estresse</a:t>
+            </a:r>
+            <a:r>
+              <a:rPr sz="1450" dirty="0">
+                <a:solidFill>
+                  <a:srgbClr val="333333"/>
+                </a:solidFill>
+              </a:rPr>
+              <a:t> no GARCH — </a:t>
+            </a:r>
+            <a:r>
+              <a:rPr sz="1450" dirty="0" err="1">
+                <a:solidFill>
+                  <a:srgbClr val="333333"/>
+                </a:solidFill>
+              </a:rPr>
+              <a:t>onde</a:t>
+            </a:r>
+            <a:r>
+              <a:rPr sz="1450" dirty="0">
+                <a:solidFill>
+                  <a:srgbClr val="333333"/>
+                </a:solidFill>
+              </a:rPr>
+              <a:t> o </a:t>
+            </a:r>
+            <a:r>
+              <a:rPr sz="1450" dirty="0" err="1">
+                <a:solidFill>
+                  <a:srgbClr val="333333"/>
+                </a:solidFill>
+              </a:rPr>
+              <a:t>sinal</a:t>
+            </a:r>
+            <a:r>
+              <a:rPr sz="1450" dirty="0">
+                <a:solidFill>
+                  <a:srgbClr val="333333"/>
+                </a:solidFill>
+              </a:rPr>
+              <a:t> se </a:t>
+            </a:r>
+            <a:r>
+              <a:rPr sz="1450" dirty="0" err="1">
+                <a:solidFill>
+                  <a:srgbClr val="333333"/>
+                </a:solidFill>
+              </a:rPr>
+              <a:t>concentra</a:t>
+            </a:r>
+            <a:r>
+              <a:rPr sz="1450" dirty="0">
+                <a:solidFill>
+                  <a:srgbClr val="333333"/>
+                </a:solidFill>
+              </a:rPr>
+              <a:t>.</a:t>
             </a:r>
           </a:p>
           <a:p>
@@ -15551,30 +17671,11 @@
               </a:spcAft>
               <a:buNone/>
             </a:pPr>
-            <a:r>
-              <a:rPr sz="1700">
-                <a:solidFill>
-                  <a:srgbClr val="6B0F2A"/>
-                </a:solidFill>
-              </a:rPr>
-              <a:t>■  </a:t>
-            </a:r>
-            <a:r>
-              <a:rPr b="1" sz="1700">
-                <a:solidFill>
-                  <a:srgbClr val="6B0F2A"/>
-                </a:solidFill>
-              </a:rPr>
-              <a:t>Leitura:  </a:t>
-            </a:r>
-            <a:r>
-              <a:rPr sz="1450">
-                <a:solidFill>
-                  <a:srgbClr val="333333"/>
-                </a:solidFill>
-              </a:rPr>
-              <a:t>o modelo não lê tudo cegamente; o filtro de risco separa o que é relevante do que é ruído.</a:t>
-            </a:r>
+            <a:endParaRPr sz="1450" dirty="0">
+              <a:solidFill>
+                <a:srgbClr val="333333"/>
+              </a:solidFill>
+            </a:endParaRPr>
           </a:p>
         </p:txBody>
       </p:sp>
@@ -15592,7 +17693,7 @@
 </file>
 
 <file path=ppt/slides/slide31.xml><?xml version="1.0" encoding="utf-8"?>
-<p:sld xmlns:a="http://schemas.openxmlformats.org/drawingml/2006/main" xmlns:p="http://schemas.openxmlformats.org/presentationml/2006/main" xmlns:r="http://schemas.openxmlformats.org/officeDocument/2006/relationships">
+<p:sld xmlns:a="http://schemas.openxmlformats.org/drawingml/2006/main" xmlns:r="http://schemas.openxmlformats.org/officeDocument/2006/relationships" xmlns:p="http://schemas.openxmlformats.org/presentationml/2006/main">
   <p:cSld>
     <p:spTree>
       <p:nvGrpSpPr>
@@ -15600,7 +17701,14 @@
         <p:cNvGrpSpPr/>
         <p:nvPr/>
       </p:nvGrpSpPr>
-      <p:grpSpPr/>
+      <p:grpSpPr>
+        <a:xfrm>
+          <a:off x="0" y="0"/>
+          <a:ext cx="0" cy="0"/>
+          <a:chOff x="0" y="0"/>
+          <a:chExt cx="0" cy="0"/>
+        </a:xfrm>
+      </p:grpSpPr>
       <p:sp>
         <p:nvSpPr>
           <p:cNvPr id="2" name="Título 1">
@@ -15630,7 +17738,7 @@
           <a:lstStyle/>
           <a:p>
             <a:r>
-              <a:rPr lang="pt-BR" dirty="0" sz="2600">
+              <a:rPr lang="pt-BR" sz="2600" dirty="0">
                 <a:solidFill>
                   <a:srgbClr val="810539"/>
                 </a:solidFill>
@@ -15704,11 +17812,41 @@
                 <a:tableStyleId>{5C22544A-7EE6-4342-B048-85BDC9FD1C3A}</a:tableStyleId>
               </a:tblPr>
               <a:tblGrid>
-                <a:gridCol w="4480560"/>
-                <a:gridCol w="1554479"/>
-                <a:gridCol w="1554479"/>
-                <a:gridCol w="1554479"/>
-                <a:gridCol w="1554479"/>
+                <a:gridCol w="4480560">
+                  <a:extLst>
+                    <a:ext uri="{9D8B030D-6E8A-4147-A177-3AD203B41FA5}">
+                      <a16:colId xmlns:a16="http://schemas.microsoft.com/office/drawing/2014/main" val="20000"/>
+                    </a:ext>
+                  </a:extLst>
+                </a:gridCol>
+                <a:gridCol w="1554479">
+                  <a:extLst>
+                    <a:ext uri="{9D8B030D-6E8A-4147-A177-3AD203B41FA5}">
+                      <a16:colId xmlns:a16="http://schemas.microsoft.com/office/drawing/2014/main" val="20001"/>
+                    </a:ext>
+                  </a:extLst>
+                </a:gridCol>
+                <a:gridCol w="1554479">
+                  <a:extLst>
+                    <a:ext uri="{9D8B030D-6E8A-4147-A177-3AD203B41FA5}">
+                      <a16:colId xmlns:a16="http://schemas.microsoft.com/office/drawing/2014/main" val="20002"/>
+                    </a:ext>
+                  </a:extLst>
+                </a:gridCol>
+                <a:gridCol w="1554479">
+                  <a:extLst>
+                    <a:ext uri="{9D8B030D-6E8A-4147-A177-3AD203B41FA5}">
+                      <a16:colId xmlns:a16="http://schemas.microsoft.com/office/drawing/2014/main" val="20003"/>
+                    </a:ext>
+                  </a:extLst>
+                </a:gridCol>
+                <a:gridCol w="1554479">
+                  <a:extLst>
+                    <a:ext uri="{9D8B030D-6E8A-4147-A177-3AD203B41FA5}">
+                      <a16:colId xmlns:a16="http://schemas.microsoft.com/office/drawing/2014/main" val="20004"/>
+                    </a:ext>
+                  </a:extLst>
+                </a:gridCol>
               </a:tblGrid>
               <a:tr h="420624">
                 <a:tc>
@@ -15718,16 +17856,21 @@
                     <a:p>
                       <a:pPr algn="l"/>
                       <a:r>
-                        <a:rPr sz="1300" b="1">
+                        <a:rPr sz="1300" b="1" dirty="0" err="1">
                           <a:solidFill>
                             <a:srgbClr val="FFFFFF"/>
                           </a:solidFill>
                         </a:rPr>
                         <a:t>Preditor</a:t>
                       </a:r>
+                      <a:endParaRPr sz="1300" b="1" dirty="0">
+                        <a:solidFill>
+                          <a:srgbClr val="FFFFFF"/>
+                        </a:solidFill>
+                      </a:endParaRPr>
                     </a:p>
                   </a:txBody>
-                  <a:tcPr anchor="ctr" marT="25400" marB="25400" marL="76200">
+                  <a:tcPr marL="76200" marT="25400" marB="25400" anchor="ctr">
                     <a:solidFill>
                       <a:srgbClr val="6B0F2A"/>
                     </a:solidFill>
@@ -15740,16 +17883,21 @@
                     <a:p>
                       <a:pPr algn="ctr"/>
                       <a:r>
-                        <a:rPr sz="1300" b="1">
+                        <a:rPr sz="1300" b="1" dirty="0" err="1">
                           <a:solidFill>
                             <a:srgbClr val="FFFFFF"/>
                           </a:solidFill>
                         </a:rPr>
                         <a:t>Acurácia</a:t>
                       </a:r>
+                      <a:endParaRPr sz="1300" b="1" dirty="0">
+                        <a:solidFill>
+                          <a:srgbClr val="FFFFFF"/>
+                        </a:solidFill>
+                      </a:endParaRPr>
                     </a:p>
                   </a:txBody>
-                  <a:tcPr anchor="ctr" marT="25400" marB="25400" marL="76200">
+                  <a:tcPr marL="76200" marT="25400" marB="25400" anchor="ctr">
                     <a:solidFill>
                       <a:srgbClr val="6B0F2A"/>
                     </a:solidFill>
@@ -15771,7 +17919,7 @@
                       </a:r>
                     </a:p>
                   </a:txBody>
-                  <a:tcPr anchor="ctr" marT="25400" marB="25400" marL="76200">
+                  <a:tcPr marL="76200" marT="25400" marB="25400" anchor="ctr">
                     <a:solidFill>
                       <a:srgbClr val="6B0F2A"/>
                     </a:solidFill>
@@ -15793,7 +17941,7 @@
                       </a:r>
                     </a:p>
                   </a:txBody>
-                  <a:tcPr anchor="ctr" marT="25400" marB="25400" marL="76200">
+                  <a:tcPr marL="76200" marT="25400" marB="25400" anchor="ctr">
                     <a:solidFill>
                       <a:srgbClr val="6B0F2A"/>
                     </a:solidFill>
@@ -15815,12 +17963,17 @@
                       </a:r>
                     </a:p>
                   </a:txBody>
-                  <a:tcPr anchor="ctr" marT="25400" marB="25400" marL="76200">
+                  <a:tcPr marL="76200" marT="25400" marB="25400" anchor="ctr">
                     <a:solidFill>
                       <a:srgbClr val="6B0F2A"/>
                     </a:solidFill>
                   </a:tcPr>
                 </a:tc>
+                <a:extLst>
+                  <a:ext uri="{0D108BD9-81ED-4DB2-BD59-A6C34878D82A}">
+                    <a16:rowId xmlns:a16="http://schemas.microsoft.com/office/drawing/2014/main" val="10000"/>
+                  </a:ext>
+                </a:extLst>
               </a:tr>
               <a:tr h="420624">
                 <a:tc>
@@ -15839,7 +17992,7 @@
                       </a:r>
                     </a:p>
                   </a:txBody>
-                  <a:tcPr anchor="ctr" marT="25400" marB="25400" marL="76200">
+                  <a:tcPr marL="76200" marT="25400" marB="25400" anchor="ctr">
                     <a:solidFill>
                       <a:srgbClr val="FFFFFF"/>
                     </a:solidFill>
@@ -15861,7 +18014,7 @@
                       </a:r>
                     </a:p>
                   </a:txBody>
-                  <a:tcPr anchor="ctr" marT="25400" marB="25400" marL="76200">
+                  <a:tcPr marL="76200" marT="25400" marB="25400" anchor="ctr">
                     <a:solidFill>
                       <a:srgbClr val="FFFFFF"/>
                     </a:solidFill>
@@ -15883,7 +18036,7 @@
                       </a:r>
                     </a:p>
                   </a:txBody>
-                  <a:tcPr anchor="ctr" marT="25400" marB="25400" marL="76200">
+                  <a:tcPr marL="76200" marT="25400" marB="25400" anchor="ctr">
                     <a:solidFill>
                       <a:srgbClr val="FFFFFF"/>
                     </a:solidFill>
@@ -15905,7 +18058,7 @@
                       </a:r>
                     </a:p>
                   </a:txBody>
-                  <a:tcPr anchor="ctr" marT="25400" marB="25400" marL="76200">
+                  <a:tcPr marL="76200" marT="25400" marB="25400" anchor="ctr">
                     <a:solidFill>
                       <a:srgbClr val="FFFFFF"/>
                     </a:solidFill>
@@ -15927,12 +18080,17 @@
                       </a:r>
                     </a:p>
                   </a:txBody>
-                  <a:tcPr anchor="ctr" marT="25400" marB="25400" marL="76200">
+                  <a:tcPr marL="76200" marT="25400" marB="25400" anchor="ctr">
                     <a:solidFill>
                       <a:srgbClr val="FFFFFF"/>
                     </a:solidFill>
                   </a:tcPr>
                 </a:tc>
+                <a:extLst>
+                  <a:ext uri="{0D108BD9-81ED-4DB2-BD59-A6C34878D82A}">
+                    <a16:rowId xmlns:a16="http://schemas.microsoft.com/office/drawing/2014/main" val="10001"/>
+                  </a:ext>
+                </a:extLst>
               </a:tr>
               <a:tr h="420624">
                 <a:tc>
@@ -15951,7 +18109,7 @@
                       </a:r>
                     </a:p>
                   </a:txBody>
-                  <a:tcPr anchor="ctr" marT="25400" marB="25400" marL="76200">
+                  <a:tcPr marL="76200" marT="25400" marB="25400" anchor="ctr">
                     <a:solidFill>
                       <a:srgbClr val="FFFFFF"/>
                     </a:solidFill>
@@ -15973,7 +18131,7 @@
                       </a:r>
                     </a:p>
                   </a:txBody>
-                  <a:tcPr anchor="ctr" marT="25400" marB="25400" marL="76200">
+                  <a:tcPr marL="76200" marT="25400" marB="25400" anchor="ctr">
                     <a:solidFill>
                       <a:srgbClr val="FFFFFF"/>
                     </a:solidFill>
@@ -15995,7 +18153,7 @@
                       </a:r>
                     </a:p>
                   </a:txBody>
-                  <a:tcPr anchor="ctr" marT="25400" marB="25400" marL="76200">
+                  <a:tcPr marL="76200" marT="25400" marB="25400" anchor="ctr">
                     <a:solidFill>
                       <a:srgbClr val="FFFFFF"/>
                     </a:solidFill>
@@ -16017,7 +18175,7 @@
                       </a:r>
                     </a:p>
                   </a:txBody>
-                  <a:tcPr anchor="ctr" marT="25400" marB="25400" marL="76200">
+                  <a:tcPr marL="76200" marT="25400" marB="25400" anchor="ctr">
                     <a:solidFill>
                       <a:srgbClr val="FFFFFF"/>
                     </a:solidFill>
@@ -16039,12 +18197,17 @@
                       </a:r>
                     </a:p>
                   </a:txBody>
-                  <a:tcPr anchor="ctr" marT="25400" marB="25400" marL="76200">
+                  <a:tcPr marL="76200" marT="25400" marB="25400" anchor="ctr">
                     <a:solidFill>
                       <a:srgbClr val="FFFFFF"/>
                     </a:solidFill>
                   </a:tcPr>
                 </a:tc>
+                <a:extLst>
+                  <a:ext uri="{0D108BD9-81ED-4DB2-BD59-A6C34878D82A}">
+                    <a16:rowId xmlns:a16="http://schemas.microsoft.com/office/drawing/2014/main" val="10002"/>
+                  </a:ext>
+                </a:extLst>
               </a:tr>
               <a:tr h="420624">
                 <a:tc>
@@ -16063,7 +18226,7 @@
                       </a:r>
                     </a:p>
                   </a:txBody>
-                  <a:tcPr anchor="ctr" marT="25400" marB="25400" marL="76200">
+                  <a:tcPr marL="76200" marT="25400" marB="25400" anchor="ctr">
                     <a:solidFill>
                       <a:srgbClr val="FFFFFF"/>
                     </a:solidFill>
@@ -16085,7 +18248,7 @@
                       </a:r>
                     </a:p>
                   </a:txBody>
-                  <a:tcPr anchor="ctr" marT="25400" marB="25400" marL="76200">
+                  <a:tcPr marL="76200" marT="25400" marB="25400" anchor="ctr">
                     <a:solidFill>
                       <a:srgbClr val="FFFFFF"/>
                     </a:solidFill>
@@ -16107,7 +18270,7 @@
                       </a:r>
                     </a:p>
                   </a:txBody>
-                  <a:tcPr anchor="ctr" marT="25400" marB="25400" marL="76200">
+                  <a:tcPr marL="76200" marT="25400" marB="25400" anchor="ctr">
                     <a:solidFill>
                       <a:srgbClr val="FFFFFF"/>
                     </a:solidFill>
@@ -16129,7 +18292,7 @@
                       </a:r>
                     </a:p>
                   </a:txBody>
-                  <a:tcPr anchor="ctr" marT="25400" marB="25400" marL="76200">
+                  <a:tcPr marL="76200" marT="25400" marB="25400" anchor="ctr">
                     <a:solidFill>
                       <a:srgbClr val="FFFFFF"/>
                     </a:solidFill>
@@ -16151,12 +18314,17 @@
                       </a:r>
                     </a:p>
                   </a:txBody>
-                  <a:tcPr anchor="ctr" marT="25400" marB="25400" marL="76200">
+                  <a:tcPr marL="76200" marT="25400" marB="25400" anchor="ctr">
                     <a:solidFill>
                       <a:srgbClr val="FFFFFF"/>
                     </a:solidFill>
                   </a:tcPr>
                 </a:tc>
+                <a:extLst>
+                  <a:ext uri="{0D108BD9-81ED-4DB2-BD59-A6C34878D82A}">
+                    <a16:rowId xmlns:a16="http://schemas.microsoft.com/office/drawing/2014/main" val="10003"/>
+                  </a:ext>
+                </a:extLst>
               </a:tr>
               <a:tr h="420624">
                 <a:tc>
@@ -16175,7 +18343,7 @@
                       </a:r>
                     </a:p>
                   </a:txBody>
-                  <a:tcPr anchor="ctr" marT="25400" marB="25400" marL="76200">
+                  <a:tcPr marL="76200" marT="25400" marB="25400" anchor="ctr">
                     <a:solidFill>
                       <a:srgbClr val="DEEBF7"/>
                     </a:solidFill>
@@ -16197,7 +18365,7 @@
                       </a:r>
                     </a:p>
                   </a:txBody>
-                  <a:tcPr anchor="ctr" marT="25400" marB="25400" marL="76200">
+                  <a:tcPr marL="76200" marT="25400" marB="25400" anchor="ctr">
                     <a:solidFill>
                       <a:srgbClr val="DEEBF7"/>
                     </a:solidFill>
@@ -16219,7 +18387,7 @@
                       </a:r>
                     </a:p>
                   </a:txBody>
-                  <a:tcPr anchor="ctr" marT="25400" marB="25400" marL="76200">
+                  <a:tcPr marL="76200" marT="25400" marB="25400" anchor="ctr">
                     <a:solidFill>
                       <a:srgbClr val="DEEBF7"/>
                     </a:solidFill>
@@ -16241,7 +18409,7 @@
                       </a:r>
                     </a:p>
                   </a:txBody>
-                  <a:tcPr anchor="ctr" marT="25400" marB="25400" marL="76200">
+                  <a:tcPr marL="76200" marT="25400" marB="25400" anchor="ctr">
                     <a:solidFill>
                       <a:srgbClr val="DEEBF7"/>
                     </a:solidFill>
@@ -16263,12 +18431,17 @@
                       </a:r>
                     </a:p>
                   </a:txBody>
-                  <a:tcPr anchor="ctr" marT="25400" marB="25400" marL="76200">
+                  <a:tcPr marL="76200" marT="25400" marB="25400" anchor="ctr">
                     <a:solidFill>
                       <a:srgbClr val="DEEBF7"/>
                     </a:solidFill>
                   </a:tcPr>
                 </a:tc>
+                <a:extLst>
+                  <a:ext uri="{0D108BD9-81ED-4DB2-BD59-A6C34878D82A}">
+                    <a16:rowId xmlns:a16="http://schemas.microsoft.com/office/drawing/2014/main" val="10004"/>
+                  </a:ext>
+                </a:extLst>
               </a:tr>
             </a:tbl>
           </a:graphicData>
@@ -16283,7 +18456,7 @@
         <p:spPr>
           <a:xfrm>
             <a:off x="731520" y="4114800"/>
-            <a:ext cx="10698480" cy="2103120"/>
+            <a:ext cx="10698480" cy="1438855"/>
           </a:xfrm>
           <a:prstGeom prst="rect">
             <a:avLst/>
@@ -16306,12 +18479,32 @@
               <a:buNone/>
             </a:pPr>
             <a:r>
-              <a:rPr b="1" sz="1350"/>
+              <a:rPr sz="1350" b="1" dirty="0"/>
               <a:t>Janela 2016-2026:  </a:t>
             </a:r>
             <a:r>
-              <a:rPr sz="1250"/>
-              <a:t>treino 2016-2022, teste 2023-2026 (652 pregões; 340 acertos).</a:t>
+              <a:rPr sz="1250" dirty="0" err="1"/>
+              <a:t>treino</a:t>
+            </a:r>
+            <a:r>
+              <a:rPr sz="1250" dirty="0"/>
+              <a:t> 2016-2022, teste 2023-2026 (652 </a:t>
+            </a:r>
+            <a:r>
+              <a:rPr sz="1250" dirty="0" err="1"/>
+              <a:t>pregões</a:t>
+            </a:r>
+            <a:r>
+              <a:rPr sz="1250" dirty="0"/>
+              <a:t>; 340 </a:t>
+            </a:r>
+            <a:r>
+              <a:rPr sz="1250" dirty="0" err="1"/>
+              <a:t>acertos</a:t>
+            </a:r>
+            <a:r>
+              <a:rPr sz="1250" dirty="0"/>
+              <a:t>).</a:t>
             </a:r>
           </a:p>
           <a:p>
@@ -16325,12 +18518,52 @@
               <a:buNone/>
             </a:pPr>
             <a:r>
-              <a:rPr b="1" sz="1350"/>
-              <a:t>Ganho do Data Fusion:  </a:t>
-            </a:r>
-            <a:r>
-              <a:rPr sz="1250"/>
-              <a:t>XGBoost +2,45 pp; o Sentimento é a variável mais importante (0,344).</a:t>
+              <a:rPr sz="1350" b="1" dirty="0" err="1"/>
+              <a:t>Ganho</a:t>
+            </a:r>
+            <a:r>
+              <a:rPr sz="1350" b="1" dirty="0"/>
+              <a:t> do Data Fusion:  </a:t>
+            </a:r>
+            <a:r>
+              <a:rPr sz="1250" dirty="0" err="1"/>
+              <a:t>XGBoost</a:t>
+            </a:r>
+            <a:r>
+              <a:rPr sz="1250" dirty="0"/>
+              <a:t> +2,45 pp; o </a:t>
+            </a:r>
+            <a:r>
+              <a:rPr sz="1250" dirty="0" err="1"/>
+              <a:t>Sentimento</a:t>
+            </a:r>
+            <a:r>
+              <a:rPr sz="1250" dirty="0"/>
+              <a:t> é a </a:t>
+            </a:r>
+            <a:r>
+              <a:rPr sz="1250" dirty="0" err="1"/>
+              <a:t>variável</a:t>
+            </a:r>
+            <a:r>
+              <a:rPr sz="1250" dirty="0"/>
+              <a:t> </a:t>
+            </a:r>
+            <a:r>
+              <a:rPr sz="1250" dirty="0" err="1"/>
+              <a:t>mais</a:t>
+            </a:r>
+            <a:r>
+              <a:rPr sz="1250" dirty="0"/>
+              <a:t> </a:t>
+            </a:r>
+            <a:r>
+              <a:rPr sz="1250" dirty="0" err="1"/>
+              <a:t>importante</a:t>
+            </a:r>
+            <a:r>
+              <a:rPr sz="1250" dirty="0"/>
+              <a:t> (0,344).</a:t>
             </a:r>
           </a:p>
           <a:p>
@@ -16344,12 +18577,80 @@
               <a:buNone/>
             </a:pPr>
             <a:r>
-              <a:rPr b="1" sz="1350"/>
-              <a:t>Significância:  </a:t>
-            </a:r>
-            <a:r>
-              <a:rPr sz="1250"/>
-              <a:t>binomial p = 0,145 — na janela ampliada, o ganho direcional é modesto e não significativo (mais difícil que 2018-2025).</a:t>
+              <a:rPr sz="1350" b="1" dirty="0" err="1"/>
+              <a:t>Significância</a:t>
+            </a:r>
+            <a:r>
+              <a:rPr sz="1350" b="1" dirty="0"/>
+              <a:t>:  </a:t>
+            </a:r>
+            <a:r>
+              <a:rPr sz="1250" dirty="0"/>
+              <a:t>binomial p = 0,145 — </a:t>
+            </a:r>
+            <a:r>
+              <a:rPr sz="1250" dirty="0" err="1"/>
+              <a:t>na</a:t>
+            </a:r>
+            <a:r>
+              <a:rPr sz="1250" dirty="0"/>
+              <a:t> </a:t>
+            </a:r>
+            <a:r>
+              <a:rPr sz="1250" dirty="0" err="1"/>
+              <a:t>janela</a:t>
+            </a:r>
+            <a:r>
+              <a:rPr sz="1250" dirty="0"/>
+              <a:t> </a:t>
+            </a:r>
+            <a:r>
+              <a:rPr sz="1250" dirty="0" err="1"/>
+              <a:t>ampliada</a:t>
+            </a:r>
+            <a:r>
+              <a:rPr sz="1250" dirty="0"/>
+              <a:t>, o </a:t>
+            </a:r>
+            <a:r>
+              <a:rPr sz="1250" dirty="0" err="1"/>
+              <a:t>ganho</a:t>
+            </a:r>
+            <a:r>
+              <a:rPr sz="1250" dirty="0"/>
+              <a:t> </a:t>
+            </a:r>
+            <a:r>
+              <a:rPr sz="1250" dirty="0" err="1"/>
+              <a:t>direcional</a:t>
+            </a:r>
+            <a:r>
+              <a:rPr sz="1250" dirty="0"/>
+              <a:t> é </a:t>
+            </a:r>
+            <a:r>
+              <a:rPr sz="1250" dirty="0" err="1"/>
+              <a:t>modesto</a:t>
+            </a:r>
+            <a:r>
+              <a:rPr sz="1250" dirty="0"/>
+              <a:t> e </a:t>
+            </a:r>
+            <a:r>
+              <a:rPr sz="1250" dirty="0" err="1"/>
+              <a:t>não</a:t>
+            </a:r>
+            <a:r>
+              <a:rPr sz="1250" dirty="0"/>
+              <a:t> </a:t>
+            </a:r>
+            <a:r>
+              <a:rPr sz="1250" dirty="0" err="1"/>
+              <a:t>significativo</a:t>
+            </a:r>
+            <a:r>
+              <a:rPr sz="1250" dirty="0"/>
+              <a:t>.</a:t>
             </a:r>
           </a:p>
           <a:p>
@@ -16363,12 +18664,64 @@
               <a:buNone/>
             </a:pPr>
             <a:r>
-              <a:rPr b="1" sz="1350"/>
-              <a:t>Ablação por categoria:  </a:t>
-            </a:r>
-            <a:r>
-              <a:rPr sz="1250"/>
-              <a:t>'Sanções/Navegação' é a mais informativa (remover custa −3,68 pp).</a:t>
+              <a:rPr sz="1350" b="1" dirty="0" err="1"/>
+              <a:t>Ablação</a:t>
+            </a:r>
+            <a:r>
+              <a:rPr sz="1350" b="1" dirty="0"/>
+              <a:t> </a:t>
+            </a:r>
+            <a:r>
+              <a:rPr sz="1350" b="1" dirty="0" err="1"/>
+              <a:t>por</a:t>
+            </a:r>
+            <a:r>
+              <a:rPr sz="1350" b="1" dirty="0"/>
+              <a:t> </a:t>
+            </a:r>
+            <a:r>
+              <a:rPr sz="1350" b="1" dirty="0" err="1"/>
+              <a:t>categoria</a:t>
+            </a:r>
+            <a:r>
+              <a:rPr sz="1350" b="1" dirty="0"/>
+              <a:t>:  </a:t>
+            </a:r>
+            <a:r>
+              <a:rPr sz="1250" dirty="0"/>
+              <a:t>'</a:t>
+            </a:r>
+            <a:r>
+              <a:rPr sz="1250" dirty="0" err="1"/>
+              <a:t>Sanções</a:t>
+            </a:r>
+            <a:r>
+              <a:rPr sz="1250" dirty="0"/>
+              <a:t>/</a:t>
+            </a:r>
+            <a:r>
+              <a:rPr sz="1250" dirty="0" err="1"/>
+              <a:t>Navegação</a:t>
+            </a:r>
+            <a:r>
+              <a:rPr sz="1250" dirty="0"/>
+              <a:t>' é a </a:t>
+            </a:r>
+            <a:r>
+              <a:rPr sz="1250" dirty="0" err="1"/>
+              <a:t>mais</a:t>
+            </a:r>
+            <a:r>
+              <a:rPr sz="1250" dirty="0"/>
+              <a:t> </a:t>
+            </a:r>
+            <a:r>
+              <a:rPr sz="1250" dirty="0" err="1"/>
+              <a:t>informativa</a:t>
+            </a:r>
+            <a:r>
+              <a:rPr sz="1250" dirty="0"/>
+              <a:t>.</a:t>
             </a:r>
           </a:p>
           <a:p>
@@ -16382,12 +18735,84 @@
               <a:buNone/>
             </a:pPr>
             <a:r>
-              <a:rPr b="1" sz="1350"/>
-              <a:t>† F1 inflado:  </a:t>
-            </a:r>
-            <a:r>
-              <a:rPr sz="1250"/>
-              <a:t>o SVM prevê quase sempre 'alta' — por isso reportamos várias métricas.</a:t>
+              <a:rPr sz="1350" b="1" dirty="0"/>
+              <a:t>† F1 </a:t>
+            </a:r>
+            <a:r>
+              <a:rPr sz="1350" b="1" dirty="0" err="1"/>
+              <a:t>inflado</a:t>
+            </a:r>
+            <a:r>
+              <a:rPr sz="1350" b="1" dirty="0"/>
+              <a:t>:  </a:t>
+            </a:r>
+            <a:r>
+              <a:rPr sz="1250" dirty="0"/>
+              <a:t>o SVM </a:t>
+            </a:r>
+            <a:r>
+              <a:rPr sz="1250" dirty="0" err="1"/>
+              <a:t>prevê</a:t>
+            </a:r>
+            <a:r>
+              <a:rPr sz="1250" dirty="0"/>
+              <a:t> </a:t>
+            </a:r>
+            <a:r>
+              <a:rPr sz="1250" dirty="0" err="1"/>
+              <a:t>quase</a:t>
+            </a:r>
+            <a:r>
+              <a:rPr sz="1250" dirty="0"/>
+              <a:t> sempre '</a:t>
+            </a:r>
+            <a:r>
+              <a:rPr sz="1250" dirty="0" err="1"/>
+              <a:t>alta</a:t>
+            </a:r>
+            <a:r>
+              <a:rPr sz="1250" dirty="0"/>
+              <a:t>' — </a:t>
+            </a:r>
+            <a:r>
+              <a:rPr sz="1250" dirty="0" err="1"/>
+              <a:t>por</a:t>
+            </a:r>
+            <a:r>
+              <a:rPr sz="1250" dirty="0"/>
+              <a:t> </a:t>
+            </a:r>
+            <a:r>
+              <a:rPr sz="1250" dirty="0" err="1"/>
+              <a:t>isso</a:t>
+            </a:r>
+            <a:r>
+              <a:rPr sz="1250" dirty="0"/>
+              <a:t> </a:t>
+            </a:r>
+            <a:r>
+              <a:rPr sz="1250" dirty="0" err="1"/>
+              <a:t>reportamos</a:t>
+            </a:r>
+            <a:r>
+              <a:rPr sz="1250" dirty="0"/>
+              <a:t> </a:t>
+            </a:r>
+            <a:r>
+              <a:rPr sz="1250" dirty="0" err="1"/>
+              <a:t>várias</a:t>
+            </a:r>
+            <a:r>
+              <a:rPr sz="1250" dirty="0"/>
+              <a:t> </a:t>
+            </a:r>
+            <a:r>
+              <a:rPr sz="1250" dirty="0" err="1"/>
+              <a:t>métricas</a:t>
+            </a:r>
+            <a:r>
+              <a:rPr sz="1250" dirty="0"/>
+              <a:t>.</a:t>
             </a:r>
           </a:p>
         </p:txBody>
@@ -16434,7 +18859,7 @@
 </file>
 
 <file path=ppt/slides/slide32.xml><?xml version="1.0" encoding="utf-8"?>
-<p:sld xmlns:a="http://schemas.openxmlformats.org/drawingml/2006/main" xmlns:r="http://schemas.openxmlformats.org/officeDocument/2006/relationships" xmlns:p="http://schemas.openxmlformats.org/presentationml/2006/main">
+<p:sld xmlns:a="http://schemas.openxmlformats.org/drawingml/2006/main" xmlns:r="http://schemas.openxmlformats.org/officeDocument/2006/relationships" xmlns:p="http://schemas.openxmlformats.org/presentationml/2006/main" show="0">
   <p:cSld>
     <p:spTree>
       <p:nvGrpSpPr>
@@ -16624,7 +19049,7 @@
               <a:t>■  </a:t>
             </a:r>
             <a:r>
-              <a:rPr b="1" sz="1600">
+              <a:rPr sz="1600" b="1">
                 <a:solidFill>
                   <a:srgbClr val="333333"/>
                 </a:solidFill>
@@ -16659,7 +19084,7 @@
               <a:t>■  </a:t>
             </a:r>
             <a:r>
-              <a:rPr b="1" sz="1600">
+              <a:rPr sz="1600" b="1">
                 <a:solidFill>
                   <a:srgbClr val="1E7E34"/>
                 </a:solidFill>
@@ -16694,7 +19119,7 @@
               <a:t>■  </a:t>
             </a:r>
             <a:r>
-              <a:rPr b="1" sz="1600">
+              <a:rPr sz="1600" b="1">
                 <a:solidFill>
                   <a:srgbClr val="6B0F2A"/>
                 </a:solidFill>
@@ -19085,7 +21510,7 @@
         <p:spPr>
           <a:xfrm>
             <a:off x="838200" y="3183554"/>
-            <a:ext cx="10515600" cy="738664"/>
+            <a:ext cx="10515600" cy="954107"/>
           </a:xfrm>
           <a:prstGeom prst="rect">
             <a:avLst/>
@@ -19108,7 +21533,7 @@
             <a:pPr algn="ctr"/>
             <a:r>
               <a:rPr lang="pt-BR" sz="1400" dirty="0"/>
-              <a:t>Orientador: </a:t>
+              <a:t>Orientador: Dr. </a:t>
             </a:r>
             <a:r>
               <a:rPr lang="pt-BR" sz="1400" dirty="0" err="1"/>
@@ -19123,6 +21548,13 @@
               <a:t>Nievola</a:t>
             </a:r>
             <a:endParaRPr lang="pt-BR" sz="1400" dirty="0"/>
+          </a:p>
+          <a:p>
+            <a:pPr algn="ctr"/>
+            <a:r>
+              <a:rPr lang="pt-BR" sz="1400" dirty="0"/>
+              <a:t>Coorientador: Dr. Emerson Cabrera Paraiso</a:t>
+            </a:r>
           </a:p>
           <a:p>
             <a:pPr algn="ctr"/>
@@ -19378,7 +21810,7 @@
           <a:lstStyle/>
           <a:p>
             <a:r>
-              <a:rPr lang="pt-BR" sz="2600" b="1">
+              <a:rPr lang="pt-BR" sz="2600" b="1" dirty="0">
                 <a:solidFill>
                   <a:srgbClr val="810539"/>
                 </a:solidFill>
@@ -19386,7 +21818,7 @@
               </a:rPr>
               <a:t>Choque Informacional: Geopolítica e a Volatilidade da PETR4</a:t>
             </a:r>
-            <a:endParaRPr lang="pt-BR">
+            <a:endParaRPr lang="pt-BR" dirty="0">
               <a:latin typeface="Arial Black"/>
             </a:endParaRPr>
           </a:p>
@@ -21648,7 +24080,7 @@
           <p:nvPr>
             <p:extLst>
               <p:ext uri="{D42A27DB-BD31-4B8C-83A1-F6EECF244321}">
-                <p14:modId xmlns:p14="http://schemas.microsoft.com/office/powerpoint/2010/main" val="3674890916"/>
+                <p14:modId xmlns:p14="http://schemas.microsoft.com/office/powerpoint/2010/main" val="3555510249"/>
               </p:ext>
             </p:extLst>
           </p:nvPr>
@@ -21711,23 +24143,9 @@
                           <a:ea typeface="Calibri"/>
                           <a:cs typeface="Calibri"/>
                         </a:rPr>
-                        <a:t>Framework Preditivo de Data Fusion Híbrido</a:t>
+                        <a:t>Avaliação da influência obtida pelas notícias na projeção de direção do preço da PETR4</a:t>
                       </a:r>
-                      <a:r>
-                        <a:rPr lang="pt-BR" sz="1800" b="0" i="0" u="none" strike="noStrike" noProof="0" dirty="0">
-                          <a:solidFill>
-                            <a:schemeClr val="tx1">
-                              <a:lumMod val="65000"/>
-                              <a:lumOff val="35000"/>
-                            </a:schemeClr>
-                          </a:solidFill>
-                          <a:latin typeface="Calibri"/>
-                          <a:ea typeface="Calibri"/>
-                          <a:cs typeface="Calibri"/>
-                        </a:rPr>
-                        <a:t> </a:t>
-                      </a:r>
-                      <a:endParaRPr lang="pt-BR" sz="1800">
+                      <a:endParaRPr lang="pt-BR" sz="1800" dirty="0">
                         <a:solidFill>
                           <a:schemeClr val="tx1">
                             <a:lumMod val="65000"/>
@@ -21753,7 +24171,7 @@
                         <a:buNone/>
                       </a:pPr>
                       <a:r>
-                        <a:rPr lang="pt-BR" sz="1500" b="0" i="0" u="none" strike="noStrike" noProof="0">
+                        <a:rPr lang="pt-BR" sz="1500" b="0" i="0" u="none" strike="noStrike" noProof="0" dirty="0">
                           <a:solidFill>
                             <a:schemeClr val="tx1">
                               <a:lumMod val="65000"/>
@@ -21766,7 +24184,7 @@
                         </a:rPr>
                         <a:t>Desenvolvimento de um pipeline computacional diário que funde NLP Transformers com Risco GARCH para predição direcional da PETR4.</a:t>
                       </a:r>
-                      <a:endParaRPr lang="pt-BR" sz="1500">
+                      <a:endParaRPr lang="pt-BR" sz="1500" dirty="0">
                         <a:solidFill>
                           <a:schemeClr val="tx1">
                             <a:lumMod val="65000"/>
@@ -21883,7 +24301,7 @@
         </p:nvSpPr>
         <p:spPr>
           <a:xfrm>
-            <a:off x="1375890" y="3409867"/>
+            <a:off x="4431692" y="3409867"/>
             <a:ext cx="2869765" cy="1261884"/>
           </a:xfrm>
           <a:prstGeom prst="rect">
@@ -21956,7 +24374,7 @@
         </p:nvSpPr>
         <p:spPr>
           <a:xfrm>
-            <a:off x="5358418" y="3424242"/>
+            <a:off x="7931968" y="3409867"/>
             <a:ext cx="2884142" cy="1523494"/>
           </a:xfrm>
           <a:prstGeom prst="rect">
@@ -21979,10 +24397,10 @@
           <a:lstStyle/>
           <a:p>
             <a:r>
-              <a:rPr lang="pt-BR" b="1"/>
+              <a:rPr lang="pt-BR" b="1" dirty="0"/>
               <a:t>Modelo</a:t>
             </a:r>
-            <a:endParaRPr lang="pt-BR" sz="1300"/>
+            <a:endParaRPr lang="pt-BR" sz="1300" dirty="0"/>
           </a:p>
           <a:p>
             <a:pPr algn="just"/>
@@ -21990,27 +24408,81 @@
               <a:rPr lang="pt-BR" sz="1500" dirty="0"/>
             </a:br>
             <a:r>
-              <a:rPr lang="pt-BR" sz="1500">
-                <a:ea typeface="+mn-lt"/>
-                <a:cs typeface="+mn-lt"/>
-              </a:rPr>
-              <a:t>Um modelo que comprova </a:t>
-            </a:r>
-            <a:r>
               <a:rPr lang="pt-BR" sz="1500" dirty="0">
                 <a:ea typeface="+mn-lt"/>
                 <a:cs typeface="+mn-lt"/>
               </a:rPr>
-              <a:t>numericamente o 'Viés' na B3, demonstrando como o investidor da PETR4 </a:t>
-            </a:r>
-            <a:r>
-              <a:rPr lang="pt-BR" sz="1500">
-                <a:ea typeface="+mn-lt"/>
-                <a:cs typeface="+mn-lt"/>
-              </a:rPr>
-              <a:t>reage às notícias.</a:t>
-            </a:r>
-            <a:endParaRPr lang="pt-BR" sz="1500">
+              <a:t>Um modelo que comprova numericamente o 'Viés' na B3, demonstrando como o investidor da PETR4 reage às notícias.</a:t>
+            </a:r>
+            <a:endParaRPr lang="pt-BR" sz="1500" dirty="0">
+              <a:ea typeface="Calibri"/>
+              <a:cs typeface="Calibri"/>
+            </a:endParaRPr>
+          </a:p>
+        </p:txBody>
+      </p:sp>
+      <p:sp>
+        <p:nvSpPr>
+          <p:cNvPr id="3" name="CaixaDeTexto 2">
+            <a:extLst>
+              <a:ext uri="{FF2B5EF4-FFF2-40B4-BE49-F238E27FC236}">
+                <a16:creationId xmlns:a16="http://schemas.microsoft.com/office/drawing/2014/main" id="{1A0931CF-DA5F-F7EC-4FB6-219B40506354}"/>
+              </a:ext>
+            </a:extLst>
+          </p:cNvPr>
+          <p:cNvSpPr txBox="1"/>
+          <p:nvPr/>
+        </p:nvSpPr>
+        <p:spPr>
+          <a:xfrm>
+            <a:off x="931416" y="3397661"/>
+            <a:ext cx="2869765" cy="1954381"/>
+          </a:xfrm>
+          <a:prstGeom prst="rect">
+            <a:avLst/>
+          </a:prstGeom>
+          <a:noFill/>
+          <a:ln w="6350">
+            <a:solidFill>
+              <a:schemeClr val="tx1"/>
+            </a:solidFill>
+          </a:ln>
+          <a:effectLst>
+            <a:reflection stA="40000" endPos="54000" dist="50800" dir="5400000" sy="-100000" algn="bl" rotWithShape="0"/>
+          </a:effectLst>
+        </p:spPr>
+        <p:txBody>
+          <a:bodyPr wrap="square" lIns="91440" tIns="45720" rIns="91440" bIns="45720" rtlCol="0" anchor="t">
+            <a:spAutoFit/>
+          </a:bodyPr>
+          <a:lstStyle/>
+          <a:p>
+            <a:pPr>
+              <a:buClr>
+                <a:srgbClr val="810539"/>
+              </a:buClr>
+            </a:pPr>
+            <a:r>
+              <a:rPr lang="pt-BR" b="1" dirty="0">
+                <a:ea typeface="Calibri"/>
+                <a:cs typeface="Calibri"/>
+              </a:rPr>
+              <a:t>Framework preditivo</a:t>
+            </a:r>
+            <a:br>
+              <a:rPr lang="pt-BR" b="1" dirty="0">
+                <a:ea typeface="Calibri"/>
+                <a:cs typeface="Calibri"/>
+              </a:rPr>
+            </a:br>
+            <a:br>
+              <a:rPr lang="pt-BR" sz="1300" dirty="0"/>
+            </a:br>
+            <a:r>
+              <a:rPr lang="pt-BR" sz="1500" dirty="0"/>
+              <a:t>Framework que coleta as notícias divulgadas após o fechamento do pregão e projeto se essa notícia é capaz de influenciar a direção do preço de fechamento da ação no dia seguinte.</a:t>
+            </a:r>
+            <a:endParaRPr lang="pt-BR" sz="1500" dirty="0">
               <a:ea typeface="Calibri"/>
               <a:cs typeface="Calibri"/>
             </a:endParaRPr>
@@ -22031,7 +24503,7 @@
 </file>
 
 <file path=ppt/slides/slide9.xml><?xml version="1.0" encoding="utf-8"?>
-<p:sld xmlns:a="http://schemas.openxmlformats.org/drawingml/2006/main" xmlns:p="http://schemas.openxmlformats.org/presentationml/2006/main" xmlns:r="http://schemas.openxmlformats.org/officeDocument/2006/relationships">
+<p:sld xmlns:a="http://schemas.openxmlformats.org/drawingml/2006/main" xmlns:r="http://schemas.openxmlformats.org/officeDocument/2006/relationships" xmlns:p="http://schemas.openxmlformats.org/presentationml/2006/main">
   <p:cSld>
     <p:spTree>
       <p:nvGrpSpPr>
@@ -22039,7 +24511,14 @@
         <p:cNvGrpSpPr/>
         <p:nvPr/>
       </p:nvGrpSpPr>
-      <p:grpSpPr/>
+      <p:grpSpPr>
+        <a:xfrm>
+          <a:off x="0" y="0"/>
+          <a:ext cx="0" cy="0"/>
+          <a:chOff x="0" y="0"/>
+          <a:chExt cx="0" cy="0"/>
+        </a:xfrm>
+      </p:grpSpPr>
       <p:sp>
         <p:nvSpPr>
           <p:cNvPr id="2" name="Título 1">
@@ -22166,7 +24645,7 @@
           <p:nvPr/>
         </p:nvPicPr>
         <p:blipFill>
-          <a:blip r:embed="rId3"/>
+          <a:blip r:embed="rId2"/>
           <a:stretch>
             <a:fillRect/>
           </a:stretch>
@@ -22181,6 +24660,48 @@
           </a:prstGeom>
         </p:spPr>
       </p:pic>
+      <p:sp>
+        <p:nvSpPr>
+          <p:cNvPr id="4" name="CaixaDeTexto 3">
+            <a:extLst>
+              <a:ext uri="{FF2B5EF4-FFF2-40B4-BE49-F238E27FC236}">
+                <a16:creationId xmlns:a16="http://schemas.microsoft.com/office/drawing/2014/main" id="{FB55A8F3-E373-8478-C5B8-AC894C676C79}"/>
+              </a:ext>
+            </a:extLst>
+          </p:cNvPr>
+          <p:cNvSpPr txBox="1"/>
+          <p:nvPr/>
+        </p:nvSpPr>
+        <p:spPr>
+          <a:xfrm>
+            <a:off x="914398" y="1914996"/>
+            <a:ext cx="10319659" cy="400110"/>
+          </a:xfrm>
+          <a:prstGeom prst="rect">
+            <a:avLst/>
+          </a:prstGeom>
+          <a:solidFill>
+            <a:srgbClr val="68042F"/>
+          </a:solidFill>
+        </p:spPr>
+        <p:txBody>
+          <a:bodyPr wrap="square" rtlCol="0">
+            <a:spAutoFit/>
+          </a:bodyPr>
+          <a:lstStyle/>
+          <a:p>
+            <a:pPr algn="ctr"/>
+            <a:r>
+              <a:rPr lang="pt-BR" sz="2000" b="1" dirty="0">
+                <a:solidFill>
+                  <a:schemeClr val="bg1"/>
+                </a:solidFill>
+              </a:rPr>
+              <a:t>CONTRIBUIÇÃO COMPLEMENTAR: FRAMEWORK PREDITIVO</a:t>
+            </a:r>
+          </a:p>
+        </p:txBody>
+      </p:sp>
     </p:spTree>
   </p:cSld>
   <p:clrMapOvr>
